--- a/산출물/통합반/이론_오프라인/07회차/통합반_오프라인_07회차.pptx
+++ b/산출물/통합반/이론_오프라인/07회차/통합반_오프라인_07회차.pptx
@@ -1136,7 +1136,7 @@
           </a:p>
           <a:p>
             <a:r>
-              <a:t>[다음] 수용 기준: 다 되었는지를 가르는 조건</a:t>
+              <a:t>[다음] 수용 기준</a:t>
             </a:r>
           </a:p>
         </p:txBody>
@@ -1336,7 +1336,7 @@
           </a:p>
           <a:p>
             <a:r>
-              <a:t>[다음] 기대 행동의 시나리오: Given · When · Then</a:t>
+              <a:t>[다음] 기대 행동의 시나리오</a:t>
             </a:r>
           </a:p>
         </p:txBody>
@@ -1421,7 +1421,7 @@
           </a:p>
           <a:p>
             <a:r>
-              <a:t>[다음] BDD: 행동을 시나리오로 적고 실행으로 확인하는 방식</a:t>
+              <a:t>[다음] BDD</a:t>
             </a:r>
           </a:p>
         </p:txBody>
@@ -1521,7 +1521,7 @@
           </a:p>
           <a:p>
             <a:r>
-              <a:t>[다음] Given · When · Then: 시나리오의 세 부분</a:t>
+              <a:t>[다음] Given · When · Then</a:t>
             </a:r>
           </a:p>
         </p:txBody>
@@ -1716,7 +1716,7 @@
           </a:p>
           <a:p>
             <a:r>
-              <a:t>[다음] 시나리오 한 편: 승인 단계의 거절</a:t>
+              <a:t>[다음] 시나리오 한 편</a:t>
             </a:r>
           </a:p>
         </p:txBody>
@@ -1816,7 +1816,7 @@
           </a:p>
           <a:p>
             <a:r>
-              <a:t>[다음] Then의 조건: 실행 결과로 가릴 수 있는 사실</a:t>
+              <a:t>[다음] Then의 조건</a:t>
             </a:r>
           </a:p>
         </p:txBody>
@@ -2111,7 +2111,7 @@
           </a:p>
           <a:p>
             <a:r>
-              <a:t>[다음] 변경 뒤의 확인: 기존 요청과 새 요청을 함께 실행한다</a:t>
+              <a:t>[다음] 변경 뒤의 확인</a:t>
             </a:r>
           </a:p>
         </p:txBody>
@@ -2221,7 +2221,7 @@
           </a:p>
           <a:p>
             <a:r>
-              <a:t>[다음] 네 종류의 시험: 정상, 경계, 예외, 회귀</a:t>
+              <a:t>[다음] 네 종류의 시험</a:t>
             </a:r>
           </a:p>
         </p:txBody>
@@ -2326,7 +2326,7 @@
           </a:p>
           <a:p>
             <a:r>
-              <a:t>[다음] 경계값 분석: 기준값의 바로 안쪽과 바깥쪽</a:t>
+              <a:t>[다음] 경계값 분석</a:t>
             </a:r>
           </a:p>
         </p:txBody>
@@ -2426,7 +2426,7 @@
           </a:p>
           <a:p>
             <a:r>
-              <a:t>[다음] 회귀 시험: 변경 뒤에 다시 실행하는 기존 시나리오</a:t>
+              <a:t>[다음] 회귀 시험</a:t>
             </a:r>
           </a:p>
         </p:txBody>
@@ -2896,7 +2896,7 @@
           </a:p>
           <a:p>
             <a:r>
-              <a:t>[다음] HITL(Human-in-the-Loop): 자동 처리와 사람의 결정</a:t>
+              <a:t>[다음] HITL(Human-in-the-Loop)</a:t>
             </a:r>
           </a:p>
         </p:txBody>
@@ -3106,7 +3106,7 @@
           </a:p>
           <a:p>
             <a:r>
-              <a:t>[다음] 에이전트의 질문: 묻고, 답을 받아, 이어서 처리한다</a:t>
+              <a:t>[다음] 에이전트의 질문</a:t>
             </a:r>
           </a:p>
         </p:txBody>
@@ -7932,7 +7932,7 @@
       </p:sp>
       <p:pic>
         <p:nvPicPr>
-          <p:cNvPr id="6" name="삽화:세해석.svg" descr="illust_7909206226142081163_1793113376.png"/>
+          <p:cNvPr id="6" name="삽화:세해석.svg" descr="illust_6362061650539690005_1793113376.png"/>
           <p:cNvPicPr>
             <a:picLocks noChangeAspect="1"/>
           </p:cNvPicPr>
@@ -9857,7 +9857,7 @@
       </p:sp>
       <p:pic>
         <p:nvPicPr>
-          <p:cNvPr id="6" name="삽화:명세문서.svg" descr="illust_5550042618378991944_1793113376.png"/>
+          <p:cNvPr id="6" name="삽화:명세문서.svg" descr="illust_5612708498467531620_1793113376.png"/>
           <p:cNvPicPr>
             <a:picLocks noChangeAspect="1"/>
           </p:cNvPicPr>
@@ -13842,7 +13842,7 @@
       </p:sp>
       <p:pic>
         <p:nvPicPr>
-          <p:cNvPr id="6" name="삽화:세부분.svg" descr="illust_6407221486129844875_1793113376.png"/>
+          <p:cNvPr id="6" name="삽화:세부분.svg" descr="illust_2046639521865658387_1793113376.png"/>
           <p:cNvPicPr>
             <a:picLocks noChangeAspect="1"/>
           </p:cNvPicPr>
@@ -21287,7 +21287,7 @@
       </p:sp>
       <p:pic>
         <p:nvPicPr>
-          <p:cNvPr id="6" name="삽화:경계값.svg" descr="illust_3108598919381481557_1793113376.png"/>
+          <p:cNvPr id="6" name="삽화:경계값.svg" descr="illust_5386190771411207218_1793113376.png"/>
           <p:cNvPicPr>
             <a:picLocks noChangeAspect="1"/>
           </p:cNvPicPr>
@@ -21882,7 +21882,7 @@
       </p:sp>
       <p:pic>
         <p:nvPicPr>
-          <p:cNvPr id="6" name="삽화:회귀.svg" descr="illust_7641802578603548372_1793113376.png"/>
+          <p:cNvPr id="6" name="삽화:회귀.svg" descr="illust_3902056013269034575_1793113376.png"/>
           <p:cNvPicPr>
             <a:picLocks noChangeAspect="1"/>
           </p:cNvPicPr>

--- a/산출물/통합반/이론_오프라인/07회차/통합반_오프라인_07회차.pptx
+++ b/산출물/통합반/이론_오프라인/07회차/통합반_오프라인_07회차.pptx
@@ -35,6 +35,12 @@
     <p:sldId id="283" r:id="rId35"/>
     <p:sldId id="284" r:id="rId36"/>
     <p:sldId id="285" r:id="rId37"/>
+    <p:sldId id="286" r:id="rId38"/>
+    <p:sldId id="287" r:id="rId39"/>
+    <p:sldId id="288" r:id="rId40"/>
+    <p:sldId id="289" r:id="rId41"/>
+    <p:sldId id="290" r:id="rId42"/>
+    <p:sldId id="291" r:id="rId43"/>
   </p:sldIdLst>
   <p:sldSz cx="12191695" cy="6858000" type="screen4x3"/>
   <p:notesSz cx="6858000" cy="9144000"/>
@@ -536,12 +542,12 @@
           </a:p>
           <a:p>
             <a:r>
-              <a:t>· 지난 회차까지 만든 점검 요청 기능에 두 일이 생긴다: 필요한 정보가 빠진 요청, 「긴급한 건 표시해 달라」는 새 요구</a:t>
-            </a:r>
-          </a:p>
-          <a:p>
-            <a:r>
-              <a:t>· 네 교시: 이론 50분 → 질문 · 답변 · 재개와 작성 · 검토 → 변경을 명세하고 구현 → 행동 검증과 인수인계 결과</a:t>
+              <a:t>· 앞에서 만든 점검 요청 기능에 두 일이 생긴다: 필요한 정보가 빠진 요청, 「긴급한 건 표시해 달라」는 새 요구</a:t>
+            </a:r>
+          </a:p>
+          <a:p>
+            <a:r>
+              <a:t>· 오늘의 흐름: 이론 → 질문 · 답변 · 재개와 작성 · 검토 → 변경을 명세하고 구현 → 행동 검증과 인수인계 결과</a:t>
             </a:r>
           </a:p>
           <a:p>
@@ -631,7 +637,7 @@
           </a:p>
           <a:p>
             <a:r>
-              <a:t>· 3교시에 같은 점검 요청 프로젝트의 spec.md에 긴급 표시를 명세하고 구현한다</a:t>
+              <a:t>· 실습에서 같은 점검 요청 프로젝트의 spec.md에 긴급 표시를 명세하고 구현한다</a:t>
             </a:r>
           </a:p>
           <a:p>
@@ -1026,7 +1032,7 @@
           </a:p>
           <a:p>
             <a:r>
-              <a:t>· 놓이는 곳: 프로젝트 안 spec.md 같은 파일로 코드와 함께 변경 관리. 파일 이름이나 다섯 항목 틀이 모든 SDD 도구의 공통 의무는 아니다(이 수업에서 쓸 구성). 3교시 실습에서 쓸 파일도 이 이름</a:t>
+              <a:t>· 놓이는 곳: 프로젝트 안 spec.md 같은 파일로 코드와 함께 변경 관리. 파일 이름이나 다섯 항목 틀이 모든 SDD 도구의 공통 의무는 아니다(이 수업에서 쓸 구성). 실습에서 쓸 파일도 이 이름</a:t>
             </a:r>
           </a:p>
           <a:p>
@@ -1416,7 +1422,7 @@
           </a:p>
           <a:p>
             <a:r>
-              <a:t>· 4교시에 정상 · 정보 누락 · 변경 요구의 기대 결과를 Given · When · Then으로 적어 실제 출력과 비교한다</a:t>
+              <a:t>· 실습에서 정상 · 정보 누락 · 변경 요구의 기대 결과를 Given · When · Then으로 적어 실제 출력과 비교한다</a:t>
             </a:r>
           </a:p>
           <a:p>
@@ -1596,12 +1602,12 @@
           </a:p>
           <a:p>
             <a:r>
-              <a:t>· 1 질문과 승인: 부품 수량을 물어 답을 받는 것과 조치를 승인하는 것은 다른 권한 → 2교시</a:t>
-            </a:r>
-          </a:p>
-          <a:p>
-            <a:r>
-              <a:t>· 2 명세: 한 문장 요구는 여러 뜻으로 읽힌다 → 무엇을 받아 무엇을 내고 무엇을 하지 않는지, 끝났음을 가르는 기준 → 3교시 spec.md</a:t>
+              <a:t>· 1 질문과 승인: 부품 수량을 물어 답을 받는 것과 조치를 승인하는 것은 다른 권한</a:t>
+            </a:r>
+          </a:p>
+          <a:p>
+            <a:r>
+              <a:t>· 2 명세: 한 문장 요구는 여러 뜻으로 읽힌다 → 무엇을 받아 무엇을 내고 무엇을 하지 않는지, 끝났음을 가르는 기준 → 실습의 spec.md</a:t>
             </a:r>
           </a:p>
           <a:p>
@@ -1611,7 +1617,7 @@
           </a:p>
           <a:p>
             <a:r>
-              <a:t>· 4 기존 기능 보존: 새 기능만 돌려 보면 일반 요청이 깨진 것을 놓친다 → 4교시</a:t>
+              <a:t>· 4 기존 기능 보존: 새 기능만 돌려 보면 일반 요청이 깨진 것을 놓친다</a:t>
             </a:r>
           </a:p>
           <a:p>
@@ -2621,7 +2627,7 @@
           </a:p>
           <a:p>
             <a:r>
-              <a:t>[다음] 오늘의 실습과 남길 결과</a:t>
+              <a:t>[다음] 복습</a:t>
             </a:r>
           </a:p>
         </p:txBody>
@@ -2786,27 +2792,617 @@
           <a:lstStyle/>
           <a:p>
             <a:r>
-              <a:t>[짚을 곳] 표 세 줄: 교시 → 실습 → 남길 결과, 강조한 4교시</a:t>
-            </a:r>
-          </a:p>
-          <a:p>
-            <a:r>
-              <a:t>· 2교시: 포털의 승인 · 거절 상태를 확인한 뒤 점검 요청 시작본에서, 도구로 읽을 수 있는 것은 먼저 읽고 부족한 것만 묻고 같은 요청의 답으로 재개. 작성 · 검토 시작본에 원자료 대조 기준, AI 검토와 사람 승인은 다르다</a:t>
-            </a:r>
-          </a:p>
-          <a:p>
-            <a:r>
-              <a:t>· 3교시: 긴급 표시의 입력 · 조건 · 출력 · 금지 사항을 spec.md로, 시간 구간 · 단위 · 경계값 · 누락 처리까지 정하고 AI와 구현. 일반 요청과 변경 요청을 비교해 근거 · 미확인 · 승인 조건 유지</a:t>
-            </a:r>
-          </a:p>
-          <a:p>
-            <a:r>
-              <a:t>· 4교시: 정상 · 정보 누락 · 변경 요구의 Given · When · Then을 실제 출력과 비교, 제공 센서 · 정비 · 부품 자료로 완료 · 미완료 · 다음 조치 · 근거 시각의 인수인계 결과</a:t>
-            </a:r>
-          </a:p>
-          <a:p>
-            <a:r>
-              <a:t>· 진행은 실습마다 핸즈온 가이드를 따른다. 다음 회차에 검증한 작업을 사람의 승인과 함께 BPMN으로 그린다</a:t>
+              <a:t>[짚을 곳] 표 머리(상황 · 먼저 가를 것 · 확인할 근거) → 다섯 줄, 강조한 다섯째 줄. 오른쪽 근거 열은 가린 채 먼저 고르게 하고 20초 기다린다</a:t>
+            </a:r>
+          </a:p>
+          <a:p>
+            <a:r>
+              <a:t>· 1 응답 없음: 사람의 대기(에이전트의 멈춤 아님). 담당자가 승인하거나 거절한다</a:t>
+            </a:r>
+          </a:p>
+          <a:p>
+            <a:r>
+              <a:t>· 2 거절: 설비 명령 · 후속 업무 · 메일 0건. 0건은 실행이 없다는 뜻이지 기록이 없다는 뜻이 아니다 — 거절 사유와 상태 변경은 남는다</a:t>
+            </a:r>
+          </a:p>
+          <a:p>
+            <a:r>
+              <a:t>· 3 추천 항목 이름 변경: 계약을 깨는 변경. 출력 계약은 기존 항목의 이름 · 형식 · 뜻을 유지하고 항목 하나를 더하는 확장이다</a:t>
+            </a:r>
+          </a:p>
+          <a:p>
+            <a:r>
+              <a:t>· 4 경계: 실제 사건의 51.5 ℃ 한 번으로는 기준 바로 옆의 판정을 모른다. 54.9만 충족, 55.0 · 55.1은 충족하지 않아야 한다</a:t>
+            </a:r>
+          </a:p>
+          <a:p>
+            <a:r>
+              <a:t>· 5 고친 뒤 긴급 경보 한 건만 실행: 새 기능만 확인. 기존 · 긴급 · 보류 요청의 수용 기준을 함께 다시 실행해야 기존 기능이 지켜졌는지 안다(회귀)</a:t>
+            </a:r>
+          </a:p>
+          <a:p>
+            <a:r>
+              <a:t>· 묶으면: 앞 둘은 누가 결정하고 결정이 무엇을 남기는지, 뒤 셋은 바뀐 요구를 무엇에 대어 확인하는지</a:t>
+            </a:r>
+          </a:p>
+          <a:p>
+            <a:r>
+              <a:t>[다음] 오늘 다룬 핵심 개념과 주요 용어 정리</a:t>
+            </a:r>
+          </a:p>
+        </p:txBody>
+      </p:sp>
+      <p:sp>
+        <p:nvSpPr>
+          <p:cNvPr id="4" name="Slide Number Placeholder 3"/>
+          <p:cNvSpPr>
+            <a:spLocks noGrp="1"/>
+          </p:cNvSpPr>
+          <p:nvPr>
+            <p:ph type="sldNum" idx="5" sz="quarter"/>
+          </p:nvPr>
+        </p:nvSpPr>
+        <p:spPr/>
+      </p:sp>
+    </p:spTree>
+  </p:cSld>
+  <p:clrMapOvr>
+    <a:masterClrMapping/>
+  </p:clrMapOvr>
+</p:notes>
+</file>
+
+<file path=ppt/notesSlides/notesSlide31.xml><?xml version="1.0" encoding="utf-8"?>
+<p:notes xmlns:a="http://schemas.openxmlformats.org/drawingml/2006/main" xmlns:p="http://schemas.openxmlformats.org/presentationml/2006/main" xmlns:r="http://schemas.openxmlformats.org/officeDocument/2006/relationships">
+  <p:cSld>
+    <p:spTree>
+      <p:nvGrpSpPr>
+        <p:cNvPr id="1" name=""/>
+        <p:cNvGrpSpPr/>
+        <p:nvPr/>
+      </p:nvGrpSpPr>
+      <p:grpSpPr>
+        <a:xfrm>
+          <a:off x="0" y="0"/>
+          <a:ext cx="0" cy="0"/>
+          <a:chOff x="0" y="0"/>
+          <a:chExt cx="0" cy="0"/>
+        </a:xfrm>
+      </p:grpSpPr>
+      <p:sp>
+        <p:nvSpPr>
+          <p:cNvPr id="2" name="Slide Image Placeholder 1"/>
+          <p:cNvSpPr>
+            <a:spLocks noGrp="1"/>
+          </p:cNvSpPr>
+          <p:nvPr>
+            <p:ph type="sldImg" idx="2"/>
+          </p:nvPr>
+        </p:nvSpPr>
+        <p:spPr/>
+      </p:sp>
+      <p:sp>
+        <p:nvSpPr>
+          <p:cNvPr id="3" name="Notes Placeholder 2"/>
+          <p:cNvSpPr>
+            <a:spLocks noGrp="1"/>
+          </p:cNvSpPr>
+          <p:nvPr>
+            <p:ph type="body" idx="3" sz="quarter"/>
+          </p:nvPr>
+        </p:nvSpPr>
+        <p:spPr/>
+        <p:txBody>
+          <a:bodyPr/>
+          <a:lstStyle/>
+          <a:p>
+            <a:r>
+              <a:t>[짚을 곳] 표 아홉 줄 위에서부터. 영문 정식 명칭은 화면에 두고 뜻을 짚는다</a:t>
+            </a:r>
+          </a:p>
+          <a:p>
+            <a:r>
+              <a:t>· HITL: 자동 처리의 정해진 지점에 사람의 결정을 넣는 방식</a:t>
+            </a:r>
+          </a:p>
+          <a:p>
+            <a:r>
+              <a:t>· SDD: 구현 전에 명세를 정하고 그 명세로 구현과 확인을 하는 개발 방식. 명세: 무엇을 받아 무엇을 내고 무엇을 하지 않는지 적은 문서. 계약: 주는 쪽과 받는 쪽이 지키기로 한 항목 · 형식 · 뜻 · 처리 조건</a:t>
+            </a:r>
+          </a:p>
+          <a:p>
+            <a:r>
+              <a:t>· 수용 기준: 구현이 끝났는지를 참 · 거짓으로 가를 수 있게 적은 조건</a:t>
+            </a:r>
+          </a:p>
+          <a:p>
+            <a:r>
+              <a:t>· BDD: 행동 사례로 기대를 함께 정하고 실행 가능한 검증에 연결하는 개발 방식. Given · When · Then: 전제 · 행동 · 기대 결과로 나눈 구조</a:t>
+            </a:r>
+          </a:p>
+          <a:p>
+            <a:r>
+              <a:t>· 경계값 분석: 판정이 갈리는 기준값 바로 안팎을 입력으로 고르는 방법. 회귀 시험: 바꾼 뒤 기존 시나리오를 다시 실행해 의도하지 않은 영향을 찾는 시험</a:t>
+            </a:r>
+          </a:p>
+          <a:p>
+            <a:r>
+              <a:t>[다음] Review Quiz</a:t>
+            </a:r>
+          </a:p>
+        </p:txBody>
+      </p:sp>
+      <p:sp>
+        <p:nvSpPr>
+          <p:cNvPr id="4" name="Slide Number Placeholder 3"/>
+          <p:cNvSpPr>
+            <a:spLocks noGrp="1"/>
+          </p:cNvSpPr>
+          <p:nvPr>
+            <p:ph type="sldNum" idx="5" sz="quarter"/>
+          </p:nvPr>
+        </p:nvSpPr>
+        <p:spPr/>
+      </p:sp>
+    </p:spTree>
+  </p:cSld>
+  <p:clrMapOvr>
+    <a:masterClrMapping/>
+  </p:clrMapOvr>
+</p:notes>
+</file>
+
+<file path=ppt/notesSlides/notesSlide32.xml><?xml version="1.0" encoding="utf-8"?>
+<p:notes xmlns:a="http://schemas.openxmlformats.org/drawingml/2006/main" xmlns:p="http://schemas.openxmlformats.org/presentationml/2006/main" xmlns:r="http://schemas.openxmlformats.org/officeDocument/2006/relationships">
+  <p:cSld>
+    <p:spTree>
+      <p:nvGrpSpPr>
+        <p:cNvPr id="1" name=""/>
+        <p:cNvGrpSpPr/>
+        <p:nvPr/>
+      </p:nvGrpSpPr>
+      <p:grpSpPr>
+        <a:xfrm>
+          <a:off x="0" y="0"/>
+          <a:ext cx="0" cy="0"/>
+          <a:chOff x="0" y="0"/>
+          <a:chExt cx="0" cy="0"/>
+        </a:xfrm>
+      </p:grpSpPr>
+      <p:sp>
+        <p:nvSpPr>
+          <p:cNvPr id="2" name="Slide Image Placeholder 1"/>
+          <p:cNvSpPr>
+            <a:spLocks noGrp="1"/>
+          </p:cNvSpPr>
+          <p:nvPr>
+            <p:ph type="sldImg" idx="2"/>
+          </p:nvPr>
+        </p:nvSpPr>
+        <p:spPr/>
+      </p:sp>
+      <p:sp>
+        <p:nvSpPr>
+          <p:cNvPr id="3" name="Notes Placeholder 2"/>
+          <p:cNvSpPr>
+            <a:spLocks noGrp="1"/>
+          </p:cNvSpPr>
+          <p:nvPr>
+            <p:ph type="body" idx="3" sz="quarter"/>
+          </p:nvPr>
+        </p:nvSpPr>
+        <p:spPr/>
+        <p:txBody>
+          <a:bodyPr/>
+          <a:lstStyle/>
+          <a:p>
+            <a:r>
+              <a:t>[짚을 곳] 간지 제목 Review Quiz → 부제</a:t>
+            </a:r>
+          </a:p>
+          <a:p>
+            <a:r>
+              <a:t>· 세 문제로 배운 내용을 판단에 쓸 수 있는지 확인</a:t>
+            </a:r>
+          </a:p>
+          <a:p>
+            <a:r>
+              <a:t>· 풀 때의 관점: 무엇이 결정이고 무엇이 확인인지, 무엇을 세거나 대조하면 되는지</a:t>
+            </a:r>
+          </a:p>
+          <a:p>
+            <a:r>
+              <a:t>· 정답과 까닭은 세 문항을 다 본 뒤 함께 확인</a:t>
+            </a:r>
+          </a:p>
+          <a:p>
+            <a:r>
+              <a:t>[다음] Quiz 1. 두 실행의 차이</a:t>
+            </a:r>
+          </a:p>
+        </p:txBody>
+      </p:sp>
+      <p:sp>
+        <p:nvSpPr>
+          <p:cNvPr id="4" name="Slide Number Placeholder 3"/>
+          <p:cNvSpPr>
+            <a:spLocks noGrp="1"/>
+          </p:cNvSpPr>
+          <p:nvPr>
+            <p:ph type="sldNum" idx="5" sz="quarter"/>
+          </p:nvPr>
+        </p:nvSpPr>
+        <p:spPr/>
+      </p:sp>
+    </p:spTree>
+  </p:cSld>
+  <p:clrMapOvr>
+    <a:masterClrMapping/>
+  </p:clrMapOvr>
+</p:notes>
+</file>
+
+<file path=ppt/notesSlides/notesSlide33.xml><?xml version="1.0" encoding="utf-8"?>
+<p:notes xmlns:a="http://schemas.openxmlformats.org/drawingml/2006/main" xmlns:p="http://schemas.openxmlformats.org/presentationml/2006/main" xmlns:r="http://schemas.openxmlformats.org/officeDocument/2006/relationships">
+  <p:cSld>
+    <p:spTree>
+      <p:nvGrpSpPr>
+        <p:cNvPr id="1" name=""/>
+        <p:cNvGrpSpPr/>
+        <p:nvPr/>
+      </p:nvGrpSpPr>
+      <p:grpSpPr>
+        <a:xfrm>
+          <a:off x="0" y="0"/>
+          <a:ext cx="0" cy="0"/>
+          <a:chOff x="0" y="0"/>
+          <a:chExt cx="0" cy="0"/>
+        </a:xfrm>
+      </p:grpSpPr>
+      <p:sp>
+        <p:nvSpPr>
+          <p:cNvPr id="2" name="Slide Image Placeholder 1"/>
+          <p:cNvSpPr>
+            <a:spLocks noGrp="1"/>
+          </p:cNvSpPr>
+          <p:nvPr>
+            <p:ph type="sldImg" idx="2"/>
+          </p:nvPr>
+        </p:nvSpPr>
+        <p:spPr/>
+      </p:sp>
+      <p:sp>
+        <p:nvSpPr>
+          <p:cNvPr id="3" name="Notes Placeholder 2"/>
+          <p:cNvSpPr>
+            <a:spLocks noGrp="1"/>
+          </p:cNvSpPr>
+          <p:nvPr>
+            <p:ph type="body" idx="3" sz="quarter"/>
+          </p:nvPr>
+        </p:nvSpPr>
+        <p:spPr/>
+        <p:txBody>
+          <a:bodyPr/>
+          <a:lstStyle/>
+          <a:p>
+            <a:r>
+              <a:t>[짚을 곳] 메시지의 상황(같은 종류 경보 두 건, 둘째 실행은 설명 문장 · 도구 순서가 다르고 decision_id가 없음. 의미 · 근거는 맞고 순서는 권한 · 의존 관계를 지킴) → 질문 → 보기 넷. 20초 기다린다</a:t>
+            </a:r>
+          </a:p>
+          <a:p>
+            <a:r>
+              <a:t>· 묻는 것: 이 조건에서 시험이 실패로 세어야 하는 것</a:t>
+            </a:r>
+          </a:p>
+          <a:p>
+            <a:r>
+              <a:t>· 생각할 점: 세 차이 가운데 출력 계약이 정한 것은 무엇인가</a:t>
+            </a:r>
+          </a:p>
+          <a:p>
+            <a:r>
+              <a:t>· 1 decision_id 누락, 2 설명 문장이 다름, 3 도구 순서가 다름, 4 셋 모두</a:t>
+            </a:r>
+          </a:p>
+          <a:p>
+            <a:r>
+              <a:t>· 앞의 「표현 차이와 계약 위반」 비교를 떠올리게 한다</a:t>
+            </a:r>
+          </a:p>
+          <a:p>
+            <a:r>
+              <a:t>[다음] Quiz 2. 승인이 섞인 답변</a:t>
+            </a:r>
+          </a:p>
+        </p:txBody>
+      </p:sp>
+      <p:sp>
+        <p:nvSpPr>
+          <p:cNvPr id="4" name="Slide Number Placeholder 3"/>
+          <p:cNvSpPr>
+            <a:spLocks noGrp="1"/>
+          </p:cNvSpPr>
+          <p:nvPr>
+            <p:ph type="sldNum" idx="5" sz="quarter"/>
+          </p:nvPr>
+        </p:nvSpPr>
+        <p:spPr/>
+      </p:sp>
+    </p:spTree>
+  </p:cSld>
+  <p:clrMapOvr>
+    <a:masterClrMapping/>
+  </p:clrMapOvr>
+</p:notes>
+</file>
+
+<file path=ppt/notesSlides/notesSlide34.xml><?xml version="1.0" encoding="utf-8"?>
+<p:notes xmlns:a="http://schemas.openxmlformats.org/drawingml/2006/main" xmlns:p="http://schemas.openxmlformats.org/presentationml/2006/main" xmlns:r="http://schemas.openxmlformats.org/officeDocument/2006/relationships">
+  <p:cSld>
+    <p:spTree>
+      <p:nvGrpSpPr>
+        <p:cNvPr id="1" name=""/>
+        <p:cNvGrpSpPr/>
+        <p:nvPr/>
+      </p:nvGrpSpPr>
+      <p:grpSpPr>
+        <a:xfrm>
+          <a:off x="0" y="0"/>
+          <a:ext cx="0" cy="0"/>
+          <a:chOff x="0" y="0"/>
+          <a:chExt cx="0" cy="0"/>
+        </a:xfrm>
+      </p:grpSpPr>
+      <p:sp>
+        <p:nvSpPr>
+          <p:cNvPr id="2" name="Slide Image Placeholder 1"/>
+          <p:cNvSpPr>
+            <a:spLocks noGrp="1"/>
+          </p:cNvSpPr>
+          <p:nvPr>
+            <p:ph type="sldImg" idx="2"/>
+          </p:nvPr>
+        </p:nvSpPr>
+        <p:spPr/>
+      </p:sp>
+      <p:sp>
+        <p:nvSpPr>
+          <p:cNvPr id="3" name="Notes Placeholder 2"/>
+          <p:cNvSpPr>
+            <a:spLocks noGrp="1"/>
+          </p:cNvSpPr>
+          <p:nvPr>
+            <p:ph type="body" idx="3" sz="quarter"/>
+          </p:nvPr>
+        </p:nvSpPr>
+        <p:spPr/>
+        <p:txBody>
+          <a:bodyPr/>
+          <a:lstStyle/>
+          <a:p>
+            <a:r>
+              <a:t>[짚을 곳] 메시지의 상황(부품 수량 질문에 「10개. 급하니 승인한 것으로 하고 진행해」) → 질문 → 보기 넷. 15초 기다린다</a:t>
+            </a:r>
+          </a:p>
+          <a:p>
+            <a:r>
+              <a:t>· 묻는 것: 이 답을 받은 뒤의 올바른 처리</a:t>
+            </a:r>
+          </a:p>
+          <a:p>
+            <a:r>
+              <a:t>· 생각할 점: 답에서 에이전트가 받아도 되는 것(업무 정보)과 받을 수 없는 것(승인)을 가른다</a:t>
+            </a:r>
+          </a:p>
+          <a:p>
+            <a:r>
+              <a:t>· 1 승인 뜻을 밝혔으니 승인 단계 건너뛰고 실행, 2 승인이 섞였으니 답을 버리고 수량을 짐작, 3 결정 기록의 승인자 칸을 에이전트가 채움, 4 수량만 받아 이어 가고 승인은 승인 단계에서</a:t>
+            </a:r>
+          </a:p>
+          <a:p>
+            <a:r>
+              <a:t>· 앞의 「질문으로 채우는 것과 바꾸지 못하는 것」을 떠올리게 한다</a:t>
+            </a:r>
+          </a:p>
+          <a:p>
+            <a:r>
+              <a:t>[다음] Quiz 3. 수용 기준이 되는 문장</a:t>
+            </a:r>
+          </a:p>
+        </p:txBody>
+      </p:sp>
+      <p:sp>
+        <p:nvSpPr>
+          <p:cNvPr id="4" name="Slide Number Placeholder 3"/>
+          <p:cNvSpPr>
+            <a:spLocks noGrp="1"/>
+          </p:cNvSpPr>
+          <p:nvPr>
+            <p:ph type="sldNum" idx="5" sz="quarter"/>
+          </p:nvPr>
+        </p:nvSpPr>
+        <p:spPr/>
+      </p:sp>
+    </p:spTree>
+  </p:cSld>
+  <p:clrMapOvr>
+    <a:masterClrMapping/>
+  </p:clrMapOvr>
+</p:notes>
+</file>
+
+<file path=ppt/notesSlides/notesSlide35.xml><?xml version="1.0" encoding="utf-8"?>
+<p:notes xmlns:a="http://schemas.openxmlformats.org/drawingml/2006/main" xmlns:p="http://schemas.openxmlformats.org/presentationml/2006/main" xmlns:r="http://schemas.openxmlformats.org/officeDocument/2006/relationships">
+  <p:cSld>
+    <p:spTree>
+      <p:nvGrpSpPr>
+        <p:cNvPr id="1" name=""/>
+        <p:cNvGrpSpPr/>
+        <p:nvPr/>
+      </p:nvGrpSpPr>
+      <p:grpSpPr>
+        <a:xfrm>
+          <a:off x="0" y="0"/>
+          <a:ext cx="0" cy="0"/>
+          <a:chOff x="0" y="0"/>
+          <a:chExt cx="0" cy="0"/>
+        </a:xfrm>
+      </p:grpSpPr>
+      <p:sp>
+        <p:nvSpPr>
+          <p:cNvPr id="2" name="Slide Image Placeholder 1"/>
+          <p:cNvSpPr>
+            <a:spLocks noGrp="1"/>
+          </p:cNvSpPr>
+          <p:nvPr>
+            <p:ph type="sldImg" idx="2"/>
+          </p:nvPr>
+        </p:nvSpPr>
+        <p:spPr/>
+      </p:sp>
+      <p:sp>
+        <p:nvSpPr>
+          <p:cNvPr id="3" name="Notes Placeholder 2"/>
+          <p:cNvSpPr>
+            <a:spLocks noGrp="1"/>
+          </p:cNvSpPr>
+          <p:nvPr>
+            <p:ph type="body" idx="3" sz="quarter"/>
+          </p:nvPr>
+        </p:nvSpPr>
+        <p:spPr/>
+        <p:txBody>
+          <a:bodyPr/>
+          <a:lstStyle/>
+          <a:p>
+            <a:r>
+              <a:t>[짚을 곳] 메시지의 요청(「긴급한 경보는 빨리 처리되게 해 주세요」) → 질문 → 보기 넷. 15초 기다린다</a:t>
+            </a:r>
+          </a:p>
+          <a:p>
+            <a:r>
+              <a:t>· 묻는 것: 이 요청을 명세로 옮길 때 수용 기준으로 알맞은 문장</a:t>
+            </a:r>
+          </a:p>
+          <a:p>
+            <a:r>
+              <a:t>· 생각할 점: 보기마다 무엇을 세거나 대조하면 참 · 거짓이 정해지는가</a:t>
+            </a:r>
+          </a:p>
+          <a:p>
+            <a:r>
+              <a:t>· 1 일반보다 눈에 띄게 빨리, 2 상황에 맞는 조치를 담음, 3 같은 입력 · 조회 자료에서 일반 경보의 기존 항목이 정한 기대값과 같음, 4 승인 절차가 알맞게 간소화</a:t>
+            </a:r>
+          </a:p>
+          <a:p>
+            <a:r>
+              <a:t>· 앞의 판정할 수 있는 문장 · 없는 문장, 금지 조건을 함께 떠올리게 한다</a:t>
+            </a:r>
+          </a:p>
+          <a:p>
+            <a:r>
+              <a:t>[다음] 정답과 판단 기준</a:t>
+            </a:r>
+          </a:p>
+        </p:txBody>
+      </p:sp>
+      <p:sp>
+        <p:nvSpPr>
+          <p:cNvPr id="4" name="Slide Number Placeholder 3"/>
+          <p:cNvSpPr>
+            <a:spLocks noGrp="1"/>
+          </p:cNvSpPr>
+          <p:nvPr>
+            <p:ph type="sldNum" idx="5" sz="quarter"/>
+          </p:nvPr>
+        </p:nvSpPr>
+        <p:spPr/>
+      </p:sp>
+    </p:spTree>
+  </p:cSld>
+  <p:clrMapOvr>
+    <a:masterClrMapping/>
+  </p:clrMapOvr>
+</p:notes>
+</file>
+
+<file path=ppt/notesSlides/notesSlide36.xml><?xml version="1.0" encoding="utf-8"?>
+<p:notes xmlns:a="http://schemas.openxmlformats.org/drawingml/2006/main" xmlns:p="http://schemas.openxmlformats.org/presentationml/2006/main" xmlns:r="http://schemas.openxmlformats.org/officeDocument/2006/relationships">
+  <p:cSld>
+    <p:spTree>
+      <p:nvGrpSpPr>
+        <p:cNvPr id="1" name=""/>
+        <p:cNvGrpSpPr/>
+        <p:nvPr/>
+      </p:nvGrpSpPr>
+      <p:grpSpPr>
+        <a:xfrm>
+          <a:off x="0" y="0"/>
+          <a:ext cx="0" cy="0"/>
+          <a:chOff x="0" y="0"/>
+          <a:chExt cx="0" cy="0"/>
+        </a:xfrm>
+      </p:grpSpPr>
+      <p:sp>
+        <p:nvSpPr>
+          <p:cNvPr id="2" name="Slide Image Placeholder 1"/>
+          <p:cNvSpPr>
+            <a:spLocks noGrp="1"/>
+          </p:cNvSpPr>
+          <p:nvPr>
+            <p:ph type="sldImg" idx="2"/>
+          </p:nvPr>
+        </p:nvSpPr>
+        <p:spPr/>
+      </p:sp>
+      <p:sp>
+        <p:nvSpPr>
+          <p:cNvPr id="3" name="Notes Placeholder 2"/>
+          <p:cNvSpPr>
+            <a:spLocks noGrp="1"/>
+          </p:cNvSpPr>
+          <p:nvPr>
+            <p:ph type="body" idx="3" sz="quarter"/>
+          </p:nvPr>
+        </p:nvSpPr>
+        <p:spPr/>
+        <p:txBody>
+          <a:bodyPr/>
+          <a:lstStyle/>
+          <a:p>
+            <a:r>
+              <a:t>[짚을 곳] 표 세 줄, 문항 → 판단 기준 → 정답 열. 고른 답과 까닭을 같이 대조하게 한다</a:t>
+            </a:r>
+          </a:p>
+          <a:p>
+            <a:r>
+              <a:t>· Q1 정답 1번. 판단 번호는 출력 계약이 정한 항목이라 빠지면 계약 위반. 설명의 의미 · 근거가 맞고 순서도 필요한 조건을 지켰으니 그 차이는 실패가 아니다. 순서가 권한이나 선행 조건을 어겼다면 판단이 달라진다</a:t>
+            </a:r>
+          </a:p>
+          <a:p>
+            <a:r>
+              <a:t>· Q2 정답 4번. 답이 채울 수 있는 건 빠진 업무 정보뿐, 답변은 실행 권한을 바꾸지 않는다. 1번은 답을 승인으로 바꿔 씀, 3번은 시스템만 적는 칸을 에이전트가 채움, 2번은 받은 수량까지 버리고 짐작 — 질문한 의미가 없어진다</a:t>
+            </a:r>
+          </a:p>
+          <a:p>
+            <a:r>
+              <a:t>· Q3 정답 3번. 입력 · 조회 자료를 같게 두고 기존 결과 항목을 미리 정한 기대값과 대조하면 참 · 거짓이 갈린다. 1번 「눈에 띄게」는 얼마인지 없음, 2번 「상황에 맞는다」는 판정 불가, 4번은 판정 기준도 없지만 먼저 금지 조건(승인 전 실행 금지)에 어긋남</a:t>
+            </a:r>
+          </a:p>
+          <a:p>
+            <a:r>
+              <a:t>· 이어지는 실습: 포털의 승인 · 거절 상태를 확인한 뒤 점검 요청 시작본에서 도구로 읽을 수 있는 것은 먼저 읽고 부족한 것만 묻고 같은 요청의 답으로 재개한다. 작성 · 검토 시작본에 원자료 대조 기준을 적용해 AI 검토와 사람 승인을 가른다</a:t>
+            </a:r>
+          </a:p>
+          <a:p>
+            <a:r>
+              <a:t>· 긴급 표시의 입력 · 조건 · 출력 · 금지 사항을 spec.md로 정해 구현하고, 정상 · 정보 누락 · 변경 요구의 Given · When · Then을 실제 출력과 비교한 뒤 센서 · 정비 · 부품 자료로 인수인계 결과를 만든다 — 진행은 핸즈온 가이드</a:t>
+            </a:r>
+          </a:p>
+          <a:p>
+            <a:r>
+              <a:t>· 다음 회차: 검증한 작업을 사람의 승인과 함께 BPMN으로 그린다</a:t>
             </a:r>
           </a:p>
           <a:p>
@@ -2891,7 +3487,7 @@
           </a:p>
           <a:p>
             <a:r>
-              <a:t>· 2교시에 점검 요청이 부족한 정보만 묻고 같은 요청의 답으로 다시 이어지게 만든다</a:t>
+              <a:t>· 실습에서 점검 요청이 부족한 정보만 묻고 같은 요청의 답으로 다시 이어지게 만든다</a:t>
             </a:r>
           </a:p>
           <a:p>
@@ -7932,7 +8528,7 @@
       </p:sp>
       <p:pic>
         <p:nvPicPr>
-          <p:cNvPr id="6" name="삽화:세해석.svg" descr="illust_6362061650539690005_1793113376.png"/>
+          <p:cNvPr id="6" name="삽화:세해석.svg" descr="illust_3380066889389731305_1793113376.png"/>
           <p:cNvPicPr>
             <a:picLocks noChangeAspect="1"/>
           </p:cNvPicPr>
@@ -9857,7 +10453,7 @@
       </p:sp>
       <p:pic>
         <p:nvPicPr>
-          <p:cNvPr id="6" name="삽화:명세문서.svg" descr="illust_5612708498467531620_1793113376.png"/>
+          <p:cNvPr id="6" name="삽화:명세문서.svg" descr="illust_6855670524677779462_1793113376.png"/>
           <p:cNvPicPr>
             <a:picLocks noChangeAspect="1"/>
           </p:cNvPicPr>
@@ -13842,7 +14438,7 @@
       </p:sp>
       <p:pic>
         <p:nvPicPr>
-          <p:cNvPr id="6" name="삽화:세부분.svg" descr="illust_2046639521865658387_1793113376.png"/>
+          <p:cNvPr id="6" name="삽화:세부분.svg" descr="illust_8429173867990618835_1793113376.png"/>
           <p:cNvPicPr>
             <a:picLocks noChangeAspect="1"/>
           </p:cNvPicPr>
@@ -21287,7 +21883,7 @@
       </p:sp>
       <p:pic>
         <p:nvPicPr>
-          <p:cNvPr id="6" name="삽화:경계값.svg" descr="illust_5386190771411207218_1793113376.png"/>
+          <p:cNvPr id="6" name="삽화:경계값.svg" descr="illust_71074534985612163_1793113376.png"/>
           <p:cNvPicPr>
             <a:picLocks noChangeAspect="1"/>
           </p:cNvPicPr>
@@ -21882,7 +22478,7 @@
       </p:sp>
       <p:pic>
         <p:nvPicPr>
-          <p:cNvPr id="6" name="삽화:회귀.svg" descr="illust_3902056013269034575_1793113376.png"/>
+          <p:cNvPr id="6" name="삽화:회귀.svg" descr="illust_7506574040064455395_1793113376.png"/>
           <p:cNvPicPr>
             <a:picLocks noChangeAspect="1"/>
           </p:cNvPicPr>
@@ -23887,7 +24483,7 @@
                 <a:ea typeface="맑은 고딕"/>
                 <a:cs typeface="맑은 고딕"/>
               </a:rPr>
-              <a:t>오늘의 실습과 남길 결과</a:t>
+              <a:t>복습: 결정의 자리와 바뀐 요구의 확인</a:t>
             </a:r>
           </a:p>
         </p:txBody>
@@ -23926,7 +24522,7 @@
                 <a:ea typeface="맑은 고딕"/>
                 <a:cs typeface="맑은 고딕"/>
               </a:rPr>
-              <a:t>이론 뒤 세 교시는 질문 · 답변 · 재개를 구현하고, 변경을 명세해 구현한 뒤, 행동을 검증하고 인수인계 결과를 만든다.</a:t>
+              <a:t>사람의 대기, 거절의 결과, 계약의 변경, 경계의 시험, 변경의 확인은 서로 다른 판단이며 각각 확인할 근거가 다르다.</a:t>
             </a:r>
           </a:p>
         </p:txBody>
@@ -24007,7 +24603,7 @@
         </p:nvSpPr>
         <p:spPr>
           <a:xfrm>
-            <a:off x="548640" y="2418587"/>
+            <a:off x="548640" y="1627632"/>
             <a:ext cx="11094415" cy="347472"/>
           </a:xfrm>
           <a:prstGeom prst="roundRect">
@@ -24038,7 +24634,7 @@
         </p:nvSpPr>
         <p:spPr>
           <a:xfrm>
-            <a:off x="685800" y="2418587"/>
+            <a:off x="685800" y="1627632"/>
             <a:ext cx="2514600" cy="347472"/>
           </a:xfrm>
           <a:prstGeom prst="rect">
@@ -24064,7 +24660,7 @@
                 <a:ea typeface="맑은 고딕"/>
                 <a:cs typeface="맑은 고딕"/>
               </a:rPr>
-              <a:t>교시</a:t>
+              <a:t>상황</a:t>
             </a:r>
           </a:p>
         </p:txBody>
@@ -24077,7 +24673,7 @@
         </p:nvSpPr>
         <p:spPr>
           <a:xfrm>
-            <a:off x="3200400" y="2418587"/>
+            <a:off x="3200400" y="1627632"/>
             <a:ext cx="6248095" cy="347472"/>
           </a:xfrm>
           <a:prstGeom prst="rect">
@@ -24103,7 +24699,7 @@
                 <a:ea typeface="맑은 고딕"/>
                 <a:cs typeface="맑은 고딕"/>
               </a:rPr>
-              <a:t>실습</a:t>
+              <a:t>먼저 가를 것</a:t>
             </a:r>
           </a:p>
         </p:txBody>
@@ -24116,7 +24712,7 @@
         </p:nvSpPr>
         <p:spPr>
           <a:xfrm>
-            <a:off x="9448495" y="2418587"/>
+            <a:off x="9448495" y="1627632"/>
             <a:ext cx="2194560" cy="347472"/>
           </a:xfrm>
           <a:prstGeom prst="rect">
@@ -24142,7 +24738,7 @@
                 <a:ea typeface="맑은 고딕"/>
                 <a:cs typeface="맑은 고딕"/>
               </a:rPr>
-              <a:t>남길 결과</a:t>
+              <a:t>확인할 근거</a:t>
             </a:r>
           </a:p>
         </p:txBody>
@@ -24155,8 +24751,8 @@
         </p:nvSpPr>
         <p:spPr>
           <a:xfrm>
-            <a:off x="548640" y="2852927"/>
-            <a:ext cx="11094415" cy="850392"/>
+            <a:off x="548640" y="2061972"/>
+            <a:ext cx="11094415" cy="801014"/>
           </a:xfrm>
           <a:prstGeom prst="roundRect">
             <a:avLst>
@@ -24186,8 +24782,8 @@
         </p:nvSpPr>
         <p:spPr>
           <a:xfrm>
-            <a:off x="685800" y="2820923"/>
-            <a:ext cx="2514600" cy="914400"/>
+            <a:off x="685800" y="2029968"/>
+            <a:ext cx="2514600" cy="865022"/>
           </a:xfrm>
           <a:prstGeom prst="rect">
             <a:avLst/>
@@ -24212,7 +24808,7 @@
                 <a:ea typeface="맑은 고딕"/>
                 <a:cs typeface="맑은 고딕"/>
               </a:rPr>
-              <a:t>2교시</a:t>
+              <a:t>추천안이 올라왔는데 담당자의 응답이 없다</a:t>
             </a:r>
           </a:p>
         </p:txBody>
@@ -24225,8 +24821,8 @@
         </p:nvSpPr>
         <p:spPr>
           <a:xfrm>
-            <a:off x="3200400" y="2820923"/>
-            <a:ext cx="6156655" cy="914400"/>
+            <a:off x="3200400" y="2029968"/>
+            <a:ext cx="6156655" cy="865022"/>
           </a:xfrm>
           <a:prstGeom prst="rect">
             <a:avLst/>
@@ -24251,7 +24847,7 @@
                 <a:ea typeface="맑은 고딕"/>
                 <a:cs typeface="맑은 고딕"/>
               </a:rPr>
-              <a:t>질문 · 답변 · 재개를 구현하고</a:t>
+              <a:t>사람의 대기인가,</a:t>
             </a:r>
           </a:p>
           <a:p>
@@ -24269,7 +24865,7 @@
                 <a:ea typeface="맑은 고딕"/>
                 <a:cs typeface="맑은 고딕"/>
               </a:rPr>
-              <a:t>작성 · 검토 결과 비교하기</a:t>
+              <a:t>에이전트의 멈춤인가</a:t>
             </a:r>
           </a:p>
         </p:txBody>
@@ -24282,8 +24878,8 @@
         </p:nvSpPr>
         <p:spPr>
           <a:xfrm>
-            <a:off x="9448495" y="2820923"/>
-            <a:ext cx="2103120" cy="914400"/>
+            <a:off x="9448495" y="2029968"/>
+            <a:ext cx="2103120" cy="865022"/>
           </a:xfrm>
           <a:prstGeom prst="rect">
             <a:avLst/>
@@ -24308,7 +24904,7 @@
                 <a:ea typeface="맑은 고딕"/>
                 <a:cs typeface="맑은 고딕"/>
               </a:rPr>
-              <a:t>같은 요청으로 재개,</a:t>
+              <a:t>응답 없음은 담당자의 몫,</a:t>
             </a:r>
           </a:p>
           <a:p>
@@ -24326,7 +24922,7 @@
                 <a:ea typeface="맑은 고딕"/>
                 <a:cs typeface="맑은 고딕"/>
               </a:rPr>
-              <a:t>AI 검토와 승인의 구분</a:t>
+              <a:t>승인하거나 거절한다</a:t>
             </a:r>
           </a:p>
         </p:txBody>
@@ -24339,8 +24935,8 @@
         </p:nvSpPr>
         <p:spPr>
           <a:xfrm>
-            <a:off x="548640" y="3767327"/>
-            <a:ext cx="11094415" cy="850392"/>
+            <a:off x="548640" y="2926994"/>
+            <a:ext cx="11094415" cy="801014"/>
           </a:xfrm>
           <a:prstGeom prst="roundRect">
             <a:avLst>
@@ -24370,8 +24966,8 @@
         </p:nvSpPr>
         <p:spPr>
           <a:xfrm>
-            <a:off x="685800" y="3735323"/>
-            <a:ext cx="2514600" cy="914400"/>
+            <a:off x="685800" y="2894990"/>
+            <a:ext cx="2514600" cy="865022"/>
           </a:xfrm>
           <a:prstGeom prst="rect">
             <a:avLst/>
@@ -24396,7 +24992,7 @@
                 <a:ea typeface="맑은 고딕"/>
                 <a:cs typeface="맑은 고딕"/>
               </a:rPr>
-              <a:t>3교시</a:t>
+              <a:t>담당자가 쿨러 추천안을 거절했다</a:t>
             </a:r>
           </a:p>
         </p:txBody>
@@ -24409,8 +25005,8 @@
         </p:nvSpPr>
         <p:spPr>
           <a:xfrm>
-            <a:off x="3200400" y="3735323"/>
-            <a:ext cx="6156655" cy="914400"/>
+            <a:off x="3200400" y="2894990"/>
+            <a:ext cx="6156655" cy="865022"/>
           </a:xfrm>
           <a:prstGeom prst="rect">
             <a:avLst/>
@@ -24435,7 +25031,25 @@
                 <a:ea typeface="맑은 고딕"/>
                 <a:cs typeface="맑은 고딕"/>
               </a:rPr>
-              <a:t>변경 요구를 명세하고 기능 구현하기</a:t>
+              <a:t>명령이 나갔나,</a:t>
+            </a:r>
+          </a:p>
+          <a:p>
+            <a:pPr algn="l" eaLnBrk="0">
+              <a:lnSpc>
+                <a:spcPct val="110000"/>
+              </a:lnSpc>
+            </a:pPr>
+            <a:r>
+              <a:rPr sz="1400" b="0">
+                <a:solidFill>
+                  <a:srgbClr val="1F2A3A"/>
+                </a:solidFill>
+                <a:latin typeface="맑은 고딕"/>
+                <a:ea typeface="맑은 고딕"/>
+                <a:cs typeface="맑은 고딕"/>
+              </a:rPr>
+              <a:t>기록이 남았나</a:t>
             </a:r>
           </a:p>
         </p:txBody>
@@ -24448,8 +25062,8 @@
         </p:nvSpPr>
         <p:spPr>
           <a:xfrm>
-            <a:off x="9448495" y="3735323"/>
-            <a:ext cx="2103120" cy="914400"/>
+            <a:off x="9448495" y="2894990"/>
+            <a:ext cx="2103120" cy="865022"/>
           </a:xfrm>
           <a:prstGeom prst="rect">
             <a:avLst/>
@@ -24474,7 +25088,7 @@
                 <a:ea typeface="맑은 고딕"/>
                 <a:cs typeface="맑은 고딕"/>
               </a:rPr>
-              <a:t>spec.md와 구현,</a:t>
+              <a:t>명령 · 메일은 0건,</a:t>
             </a:r>
           </a:p>
           <a:p>
@@ -24492,7 +25106,7 @@
                 <a:ea typeface="맑은 고딕"/>
                 <a:cs typeface="맑은 고딕"/>
               </a:rPr>
-              <a:t>기존 조건 유지 확인</a:t>
+              <a:t>사유와 상태는 기록</a:t>
             </a:r>
           </a:p>
         </p:txBody>
@@ -24505,8 +25119,376 @@
         </p:nvSpPr>
         <p:spPr>
           <a:xfrm>
-            <a:off x="548640" y="4681727"/>
-            <a:ext cx="11094415" cy="850392"/>
+            <a:off x="548640" y="3792016"/>
+            <a:ext cx="11094415" cy="801014"/>
+          </a:xfrm>
+          <a:prstGeom prst="roundRect">
+            <a:avLst>
+              <a:gd name="adj" fmla="val 8000"/>
+            </a:avLst>
+          </a:prstGeom>
+          <a:solidFill>
+            <a:srgbClr val="F3F6F9"/>
+          </a:solidFill>
+          <a:ln>
+            <a:noFill/>
+          </a:ln>
+        </p:spPr>
+        <p:txBody>
+          <a:bodyPr rtlCol="0" anchor="ctr"/>
+          <a:lstStyle/>
+          <a:p>
+            <a:pPr algn="ctr"/>
+          </a:p>
+        </p:txBody>
+      </p:sp>
+      <p:sp>
+        <p:nvSpPr>
+          <p:cNvPr id="19" name="TextBox 18"/>
+          <p:cNvSpPr txBox="1"/>
+          <p:nvPr/>
+        </p:nvSpPr>
+        <p:spPr>
+          <a:xfrm>
+            <a:off x="685800" y="3760012"/>
+            <a:ext cx="2514600" cy="865022"/>
+          </a:xfrm>
+          <a:prstGeom prst="rect">
+            <a:avLst/>
+          </a:prstGeom>
+          <a:noFill/>
+        </p:spPr>
+        <p:txBody>
+          <a:bodyPr wrap="square" anchor="ctr"/>
+          <a:lstStyle/>
+          <a:p>
+            <a:pPr algn="l" eaLnBrk="0">
+              <a:lnSpc>
+                <a:spcPct val="110000"/>
+              </a:lnSpc>
+            </a:pPr>
+            <a:r>
+              <a:rPr sz="1500" b="1">
+                <a:solidFill>
+                  <a:srgbClr val="13294B"/>
+                </a:solidFill>
+                <a:latin typeface="맑은 고딕"/>
+                <a:ea typeface="맑은 고딕"/>
+                <a:cs typeface="맑은 고딕"/>
+              </a:rPr>
+              <a:t>긴급 표시를 넣으며 추천 항목의 이름을 바꾸려 한다</a:t>
+            </a:r>
+          </a:p>
+        </p:txBody>
+      </p:sp>
+      <p:sp>
+        <p:nvSpPr>
+          <p:cNvPr id="20" name="TextBox 19"/>
+          <p:cNvSpPr txBox="1"/>
+          <p:nvPr/>
+        </p:nvSpPr>
+        <p:spPr>
+          <a:xfrm>
+            <a:off x="3200400" y="3760012"/>
+            <a:ext cx="6156655" cy="865022"/>
+          </a:xfrm>
+          <a:prstGeom prst="rect">
+            <a:avLst/>
+          </a:prstGeom>
+          <a:noFill/>
+        </p:spPr>
+        <p:txBody>
+          <a:bodyPr wrap="square" anchor="ctr"/>
+          <a:lstStyle/>
+          <a:p>
+            <a:pPr algn="l" eaLnBrk="0">
+              <a:lnSpc>
+                <a:spcPct val="110000"/>
+              </a:lnSpc>
+            </a:pPr>
+            <a:r>
+              <a:rPr sz="1400" b="0">
+                <a:solidFill>
+                  <a:srgbClr val="1F2A3A"/>
+                </a:solidFill>
+                <a:latin typeface="맑은 고딕"/>
+                <a:ea typeface="맑은 고딕"/>
+                <a:cs typeface="맑은 고딕"/>
+              </a:rPr>
+              <a:t>계약을 넓히는가,</a:t>
+            </a:r>
+          </a:p>
+          <a:p>
+            <a:pPr algn="l" eaLnBrk="0">
+              <a:lnSpc>
+                <a:spcPct val="110000"/>
+              </a:lnSpc>
+            </a:pPr>
+            <a:r>
+              <a:rPr sz="1400" b="0">
+                <a:solidFill>
+                  <a:srgbClr val="1F2A3A"/>
+                </a:solidFill>
+                <a:latin typeface="맑은 고딕"/>
+                <a:ea typeface="맑은 고딕"/>
+                <a:cs typeface="맑은 고딕"/>
+              </a:rPr>
+              <a:t>깨는가</a:t>
+            </a:r>
+          </a:p>
+        </p:txBody>
+      </p:sp>
+      <p:sp>
+        <p:nvSpPr>
+          <p:cNvPr id="21" name="TextBox 20"/>
+          <p:cNvSpPr txBox="1"/>
+          <p:nvPr/>
+        </p:nvSpPr>
+        <p:spPr>
+          <a:xfrm>
+            <a:off x="9448495" y="3760012"/>
+            <a:ext cx="2103120" cy="865022"/>
+          </a:xfrm>
+          <a:prstGeom prst="rect">
+            <a:avLst/>
+          </a:prstGeom>
+          <a:noFill/>
+        </p:spPr>
+        <p:txBody>
+          <a:bodyPr wrap="square" anchor="ctr"/>
+          <a:lstStyle/>
+          <a:p>
+            <a:pPr algn="l" eaLnBrk="0">
+              <a:lnSpc>
+                <a:spcPct val="110000"/>
+              </a:lnSpc>
+            </a:pPr>
+            <a:r>
+              <a:rPr sz="1250" b="1">
+                <a:solidFill>
+                  <a:srgbClr val="556175"/>
+                </a:solidFill>
+                <a:latin typeface="맑은 고딕"/>
+                <a:ea typeface="맑은 고딕"/>
+                <a:cs typeface="맑은 고딕"/>
+              </a:rPr>
+              <a:t>출력 계약의</a:t>
+            </a:r>
+          </a:p>
+          <a:p>
+            <a:pPr algn="l" eaLnBrk="0">
+              <a:lnSpc>
+                <a:spcPct val="110000"/>
+              </a:lnSpc>
+            </a:pPr>
+            <a:r>
+              <a:rPr sz="1250" b="1">
+                <a:solidFill>
+                  <a:srgbClr val="556175"/>
+                </a:solidFill>
+                <a:latin typeface="맑은 고딕"/>
+                <a:ea typeface="맑은 고딕"/>
+                <a:cs typeface="맑은 고딕"/>
+              </a:rPr>
+              <a:t>이름 · 형식 · 뜻</a:t>
+            </a:r>
+          </a:p>
+        </p:txBody>
+      </p:sp>
+      <p:sp>
+        <p:nvSpPr>
+          <p:cNvPr id="22" name="Rounded Rectangle 21"/>
+          <p:cNvSpPr/>
+          <p:nvPr/>
+        </p:nvSpPr>
+        <p:spPr>
+          <a:xfrm>
+            <a:off x="548640" y="4657039"/>
+            <a:ext cx="11094415" cy="801014"/>
+          </a:xfrm>
+          <a:prstGeom prst="roundRect">
+            <a:avLst>
+              <a:gd name="adj" fmla="val 8000"/>
+            </a:avLst>
+          </a:prstGeom>
+          <a:solidFill>
+            <a:srgbClr val="F3F6F9"/>
+          </a:solidFill>
+          <a:ln>
+            <a:noFill/>
+          </a:ln>
+        </p:spPr>
+        <p:txBody>
+          <a:bodyPr rtlCol="0" anchor="ctr"/>
+          <a:lstStyle/>
+          <a:p>
+            <a:pPr algn="ctr"/>
+          </a:p>
+        </p:txBody>
+      </p:sp>
+      <p:sp>
+        <p:nvSpPr>
+          <p:cNvPr id="23" name="TextBox 22"/>
+          <p:cNvSpPr txBox="1"/>
+          <p:nvPr/>
+        </p:nvSpPr>
+        <p:spPr>
+          <a:xfrm>
+            <a:off x="685800" y="4625035"/>
+            <a:ext cx="2514600" cy="865022"/>
+          </a:xfrm>
+          <a:prstGeom prst="rect">
+            <a:avLst/>
+          </a:prstGeom>
+          <a:noFill/>
+        </p:spPr>
+        <p:txBody>
+          <a:bodyPr wrap="square" anchor="ctr"/>
+          <a:lstStyle/>
+          <a:p>
+            <a:pPr algn="l" eaLnBrk="0">
+              <a:lnSpc>
+                <a:spcPct val="110000"/>
+              </a:lnSpc>
+            </a:pPr>
+            <a:r>
+              <a:rPr sz="1600" b="1">
+                <a:solidFill>
+                  <a:srgbClr val="13294B"/>
+                </a:solidFill>
+                <a:latin typeface="맑은 고딕"/>
+                <a:ea typeface="맑은 고딕"/>
+                <a:cs typeface="맑은 고딕"/>
+              </a:rPr>
+              <a:t>회복 기준 55 ℃ 미만을 시험할 입력을 고른다</a:t>
+            </a:r>
+          </a:p>
+        </p:txBody>
+      </p:sp>
+      <p:sp>
+        <p:nvSpPr>
+          <p:cNvPr id="24" name="TextBox 23"/>
+          <p:cNvSpPr txBox="1"/>
+          <p:nvPr/>
+        </p:nvSpPr>
+        <p:spPr>
+          <a:xfrm>
+            <a:off x="3200400" y="4625035"/>
+            <a:ext cx="6156655" cy="865022"/>
+          </a:xfrm>
+          <a:prstGeom prst="rect">
+            <a:avLst/>
+          </a:prstGeom>
+          <a:noFill/>
+        </p:spPr>
+        <p:txBody>
+          <a:bodyPr wrap="square" anchor="ctr"/>
+          <a:lstStyle/>
+          <a:p>
+            <a:pPr algn="l" eaLnBrk="0">
+              <a:lnSpc>
+                <a:spcPct val="110000"/>
+              </a:lnSpc>
+            </a:pPr>
+            <a:r>
+              <a:rPr sz="1400" b="0">
+                <a:solidFill>
+                  <a:srgbClr val="1F2A3A"/>
+                </a:solidFill>
+                <a:latin typeface="맑은 고딕"/>
+                <a:ea typeface="맑은 고딕"/>
+                <a:cs typeface="맑은 고딕"/>
+              </a:rPr>
+              <a:t>실제 사건 값 하나로 되는가,</a:t>
+            </a:r>
+          </a:p>
+          <a:p>
+            <a:pPr algn="l" eaLnBrk="0">
+              <a:lnSpc>
+                <a:spcPct val="110000"/>
+              </a:lnSpc>
+            </a:pPr>
+            <a:r>
+              <a:rPr sz="1400" b="0">
+                <a:solidFill>
+                  <a:srgbClr val="1F2A3A"/>
+                </a:solidFill>
+                <a:latin typeface="맑은 고딕"/>
+                <a:ea typeface="맑은 고딕"/>
+                <a:cs typeface="맑은 고딕"/>
+              </a:rPr>
+              <a:t>기준의 바로 안팎인가</a:t>
+            </a:r>
+          </a:p>
+        </p:txBody>
+      </p:sp>
+      <p:sp>
+        <p:nvSpPr>
+          <p:cNvPr id="25" name="TextBox 24"/>
+          <p:cNvSpPr txBox="1"/>
+          <p:nvPr/>
+        </p:nvSpPr>
+        <p:spPr>
+          <a:xfrm>
+            <a:off x="9448495" y="4625035"/>
+            <a:ext cx="2103120" cy="865022"/>
+          </a:xfrm>
+          <a:prstGeom prst="rect">
+            <a:avLst/>
+          </a:prstGeom>
+          <a:noFill/>
+        </p:spPr>
+        <p:txBody>
+          <a:bodyPr wrap="square" anchor="ctr"/>
+          <a:lstStyle/>
+          <a:p>
+            <a:pPr algn="l" eaLnBrk="0">
+              <a:lnSpc>
+                <a:spcPct val="110000"/>
+              </a:lnSpc>
+            </a:pPr>
+            <a:r>
+              <a:rPr sz="1250" b="1">
+                <a:solidFill>
+                  <a:srgbClr val="556175"/>
+                </a:solidFill>
+                <a:latin typeface="맑은 고딕"/>
+                <a:ea typeface="맑은 고딕"/>
+                <a:cs typeface="맑은 고딕"/>
+              </a:rPr>
+              <a:t>54.9 · 55.0 · 55.1 ℃로</a:t>
+            </a:r>
+          </a:p>
+          <a:p>
+            <a:pPr algn="l" eaLnBrk="0">
+              <a:lnSpc>
+                <a:spcPct val="110000"/>
+              </a:lnSpc>
+            </a:pPr>
+            <a:r>
+              <a:rPr sz="1250" b="1">
+                <a:solidFill>
+                  <a:srgbClr val="556175"/>
+                </a:solidFill>
+                <a:latin typeface="맑은 고딕"/>
+                <a:ea typeface="맑은 고딕"/>
+                <a:cs typeface="맑은 고딕"/>
+              </a:rPr>
+              <a:t>등호의 오류까지 가른다</a:t>
+            </a:r>
+          </a:p>
+        </p:txBody>
+      </p:sp>
+      <p:sp>
+        <p:nvSpPr>
+          <p:cNvPr id="26" name="Rounded Rectangle 25"/>
+          <p:cNvSpPr/>
+          <p:nvPr/>
+        </p:nvSpPr>
+        <p:spPr>
+          <a:xfrm>
+            <a:off x="548640" y="5522061"/>
+            <a:ext cx="11094415" cy="801014"/>
           </a:xfrm>
           <a:prstGeom prst="roundRect">
             <a:avLst>
@@ -24530,6 +25512,4784 @@
       </p:sp>
       <p:sp>
         <p:nvSpPr>
+          <p:cNvPr id="27" name="TextBox 26"/>
+          <p:cNvSpPr txBox="1"/>
+          <p:nvPr/>
+        </p:nvSpPr>
+        <p:spPr>
+          <a:xfrm>
+            <a:off x="685800" y="5490057"/>
+            <a:ext cx="2514600" cy="865022"/>
+          </a:xfrm>
+          <a:prstGeom prst="rect">
+            <a:avLst/>
+          </a:prstGeom>
+          <a:noFill/>
+        </p:spPr>
+        <p:txBody>
+          <a:bodyPr wrap="square" anchor="ctr"/>
+          <a:lstStyle/>
+          <a:p>
+            <a:pPr algn="l" eaLnBrk="0">
+              <a:lnSpc>
+                <a:spcPct val="110000"/>
+              </a:lnSpc>
+            </a:pPr>
+            <a:r>
+              <a:rPr sz="1600" b="1">
+                <a:solidFill>
+                  <a:srgbClr val="13294B"/>
+                </a:solidFill>
+                <a:latin typeface="맑은 고딕"/>
+                <a:ea typeface="맑은 고딕"/>
+                <a:cs typeface="맑은 고딕"/>
+              </a:rPr>
+              <a:t>고친 뒤 긴급 경보 한 건만 실행해 보았다</a:t>
+            </a:r>
+          </a:p>
+        </p:txBody>
+      </p:sp>
+      <p:sp>
+        <p:nvSpPr>
+          <p:cNvPr id="28" name="TextBox 27"/>
+          <p:cNvSpPr txBox="1"/>
+          <p:nvPr/>
+        </p:nvSpPr>
+        <p:spPr>
+          <a:xfrm>
+            <a:off x="3200400" y="5490057"/>
+            <a:ext cx="6156655" cy="865022"/>
+          </a:xfrm>
+          <a:prstGeom prst="rect">
+            <a:avLst/>
+          </a:prstGeom>
+          <a:noFill/>
+        </p:spPr>
+        <p:txBody>
+          <a:bodyPr wrap="square" anchor="ctr"/>
+          <a:lstStyle/>
+          <a:p>
+            <a:pPr algn="l" eaLnBrk="0">
+              <a:lnSpc>
+                <a:spcPct val="110000"/>
+              </a:lnSpc>
+            </a:pPr>
+            <a:r>
+              <a:rPr sz="1400" b="0">
+                <a:solidFill>
+                  <a:srgbClr val="1F2A3A"/>
+                </a:solidFill>
+                <a:latin typeface="맑은 고딕"/>
+                <a:ea typeface="맑은 고딕"/>
+                <a:cs typeface="맑은 고딕"/>
+              </a:rPr>
+              <a:t>새 기능의 확인인가,</a:t>
+            </a:r>
+          </a:p>
+          <a:p>
+            <a:pPr algn="l" eaLnBrk="0">
+              <a:lnSpc>
+                <a:spcPct val="110000"/>
+              </a:lnSpc>
+            </a:pPr>
+            <a:r>
+              <a:rPr sz="1400" b="0">
+                <a:solidFill>
+                  <a:srgbClr val="1F2A3A"/>
+                </a:solidFill>
+                <a:latin typeface="맑은 고딕"/>
+                <a:ea typeface="맑은 고딕"/>
+                <a:cs typeface="맑은 고딕"/>
+              </a:rPr>
+              <a:t>기존 기능의 확인인가</a:t>
+            </a:r>
+          </a:p>
+        </p:txBody>
+      </p:sp>
+      <p:sp>
+        <p:nvSpPr>
+          <p:cNvPr id="29" name="TextBox 28"/>
+          <p:cNvSpPr txBox="1"/>
+          <p:nvPr/>
+        </p:nvSpPr>
+        <p:spPr>
+          <a:xfrm>
+            <a:off x="9448495" y="5490057"/>
+            <a:ext cx="2103120" cy="865022"/>
+          </a:xfrm>
+          <a:prstGeom prst="rect">
+            <a:avLst/>
+          </a:prstGeom>
+          <a:noFill/>
+        </p:spPr>
+        <p:txBody>
+          <a:bodyPr wrap="square" anchor="ctr"/>
+          <a:lstStyle/>
+          <a:p>
+            <a:pPr algn="l" eaLnBrk="0">
+              <a:lnSpc>
+                <a:spcPct val="110000"/>
+              </a:lnSpc>
+            </a:pPr>
+            <a:r>
+              <a:rPr sz="1200" b="1">
+                <a:solidFill>
+                  <a:srgbClr val="1A6FC4"/>
+                </a:solidFill>
+                <a:latin typeface="맑은 고딕"/>
+                <a:ea typeface="맑은 고딕"/>
+                <a:cs typeface="맑은 고딕"/>
+              </a:rPr>
+              <a:t>기존 · 긴급 · 보류 요청의</a:t>
+            </a:r>
+          </a:p>
+          <a:p>
+            <a:pPr algn="l" eaLnBrk="0">
+              <a:lnSpc>
+                <a:spcPct val="110000"/>
+              </a:lnSpc>
+            </a:pPr>
+            <a:r>
+              <a:rPr sz="1200" b="1">
+                <a:solidFill>
+                  <a:srgbClr val="1A6FC4"/>
+                </a:solidFill>
+                <a:latin typeface="맑은 고딕"/>
+                <a:ea typeface="맑은 고딕"/>
+                <a:cs typeface="맑은 고딕"/>
+              </a:rPr>
+              <a:t>수용 기준</a:t>
+            </a:r>
+          </a:p>
+        </p:txBody>
+      </p:sp>
+    </p:spTree>
+  </p:cSld>
+  <p:clrMapOvr>
+    <a:masterClrMapping/>
+  </p:clrMapOvr>
+</p:sld>
+</file>
+
+<file path=ppt/slides/slide31.xml><?xml version="1.0" encoding="utf-8"?>
+<p:sld xmlns:a="http://schemas.openxmlformats.org/drawingml/2006/main" xmlns:p="http://schemas.openxmlformats.org/presentationml/2006/main" xmlns:r="http://schemas.openxmlformats.org/officeDocument/2006/relationships">
+  <p:cSld>
+    <p:bg>
+      <p:bgPr>
+        <a:solidFill>
+          <a:srgbClr val="FFFFFF"/>
+        </a:solidFill>
+        <a:effectLst/>
+      </p:bgPr>
+    </p:bg>
+    <p:spTree>
+      <p:nvGrpSpPr>
+        <p:cNvPr id="1" name=""/>
+        <p:cNvGrpSpPr/>
+        <p:nvPr/>
+      </p:nvGrpSpPr>
+      <p:grpSpPr/>
+      <p:sp>
+        <p:nvSpPr>
+          <p:cNvPr id="2" name="TextBox 1"/>
+          <p:cNvSpPr txBox="1"/>
+          <p:nvPr/>
+        </p:nvSpPr>
+        <p:spPr>
+          <a:xfrm>
+            <a:off x="457200" y="329184"/>
+            <a:ext cx="11277295" cy="603504"/>
+          </a:xfrm>
+          <a:prstGeom prst="rect">
+            <a:avLst/>
+          </a:prstGeom>
+          <a:noFill/>
+        </p:spPr>
+        <p:txBody>
+          <a:bodyPr wrap="square" anchor="ctr"/>
+          <a:lstStyle/>
+          <a:p>
+            <a:pPr algn="l" eaLnBrk="0">
+              <a:lnSpc>
+                <a:spcPct val="110000"/>
+              </a:lnSpc>
+            </a:pPr>
+            <a:r>
+              <a:rPr sz="2800" b="1">
+                <a:solidFill>
+                  <a:srgbClr val="13294B"/>
+                </a:solidFill>
+                <a:latin typeface="맑은 고딕"/>
+                <a:ea typeface="맑은 고딕"/>
+                <a:cs typeface="맑은 고딕"/>
+              </a:rPr>
+              <a:t>오늘 다룬 핵심 개념과 주요 용어 정리</a:t>
+            </a:r>
+          </a:p>
+        </p:txBody>
+      </p:sp>
+      <p:sp>
+        <p:nvSpPr>
+          <p:cNvPr id="3" name="TextBox 2"/>
+          <p:cNvSpPr txBox="1"/>
+          <p:nvPr/>
+        </p:nvSpPr>
+        <p:spPr>
+          <a:xfrm>
+            <a:off x="457200" y="932688"/>
+            <a:ext cx="11277295" cy="420624"/>
+          </a:xfrm>
+          <a:prstGeom prst="rect">
+            <a:avLst/>
+          </a:prstGeom>
+          <a:noFill/>
+        </p:spPr>
+        <p:txBody>
+          <a:bodyPr wrap="square" anchor="ctr"/>
+          <a:lstStyle/>
+          <a:p>
+            <a:pPr algn="l" eaLnBrk="0">
+              <a:lnSpc>
+                <a:spcPct val="110000"/>
+              </a:lnSpc>
+            </a:pPr>
+            <a:r>
+              <a:rPr sz="1600" b="0">
+                <a:solidFill>
+                  <a:srgbClr val="556175"/>
+                </a:solidFill>
+                <a:latin typeface="맑은 고딕"/>
+                <a:ea typeface="맑은 고딕"/>
+                <a:cs typeface="맑은 고딕"/>
+              </a:rPr>
+              <a:t>사람의 결정, 명세, 행동 검증에 관한 핵심 용어의 정식 명칭과 뜻을 한곳에 모은다.</a:t>
+            </a:r>
+          </a:p>
+        </p:txBody>
+      </p:sp>
+      <p:sp>
+        <p:nvSpPr>
+          <p:cNvPr id="4" name="Rectangle 3"/>
+          <p:cNvSpPr/>
+          <p:nvPr/>
+        </p:nvSpPr>
+        <p:spPr>
+          <a:xfrm>
+            <a:off x="548640" y="1408176"/>
+            <a:ext cx="11094415" cy="18288"/>
+          </a:xfrm>
+          <a:prstGeom prst="rect">
+            <a:avLst/>
+          </a:prstGeom>
+          <a:solidFill>
+            <a:srgbClr val="D3D9E1"/>
+          </a:solidFill>
+          <a:ln>
+            <a:noFill/>
+          </a:ln>
+        </p:spPr>
+        <p:txBody>
+          <a:bodyPr rtlCol="0" anchor="ctr"/>
+          <a:lstStyle/>
+          <a:p>
+            <a:pPr algn="ctr"/>
+          </a:p>
+        </p:txBody>
+      </p:sp>
+      <p:sp>
+        <p:nvSpPr>
+          <p:cNvPr id="5" name="TextBox 4"/>
+          <p:cNvSpPr txBox="1"/>
+          <p:nvPr/>
+        </p:nvSpPr>
+        <p:spPr>
+          <a:xfrm>
+            <a:off x="10911535" y="6473952"/>
+            <a:ext cx="822960" cy="274320"/>
+          </a:xfrm>
+          <a:prstGeom prst="rect">
+            <a:avLst/>
+          </a:prstGeom>
+          <a:noFill/>
+        </p:spPr>
+        <p:txBody>
+          <a:bodyPr wrap="square" anchor="t"/>
+          <a:lstStyle/>
+          <a:p>
+            <a:pPr algn="r" eaLnBrk="0">
+              <a:lnSpc>
+                <a:spcPct val="110000"/>
+              </a:lnSpc>
+            </a:pPr>
+            <a:r>
+              <a:rPr sz="1000" b="0">
+                <a:solidFill>
+                  <a:srgbClr val="556175"/>
+                </a:solidFill>
+                <a:latin typeface="맑은 고딕"/>
+                <a:ea typeface="맑은 고딕"/>
+                <a:cs typeface="맑은 고딕"/>
+              </a:rPr>
+              <a:t>31</a:t>
+            </a:r>
+          </a:p>
+        </p:txBody>
+      </p:sp>
+      <p:sp>
+        <p:nvSpPr>
+          <p:cNvPr id="6" name="Rounded Rectangle 5"/>
+          <p:cNvSpPr/>
+          <p:nvPr/>
+        </p:nvSpPr>
+        <p:spPr>
+          <a:xfrm>
+            <a:off x="548640" y="1627631"/>
+            <a:ext cx="11094415" cy="347472"/>
+          </a:xfrm>
+          <a:prstGeom prst="roundRect">
+            <a:avLst>
+              <a:gd name="adj" fmla="val 12000"/>
+            </a:avLst>
+          </a:prstGeom>
+          <a:solidFill>
+            <a:srgbClr val="13294B"/>
+          </a:solidFill>
+          <a:ln>
+            <a:noFill/>
+          </a:ln>
+        </p:spPr>
+        <p:txBody>
+          <a:bodyPr rtlCol="0" anchor="ctr"/>
+          <a:lstStyle/>
+          <a:p>
+            <a:pPr algn="ctr"/>
+          </a:p>
+        </p:txBody>
+      </p:sp>
+      <p:sp>
+        <p:nvSpPr>
+          <p:cNvPr id="7" name="TextBox 6"/>
+          <p:cNvSpPr txBox="1"/>
+          <p:nvPr/>
+        </p:nvSpPr>
+        <p:spPr>
+          <a:xfrm>
+            <a:off x="685800" y="1627631"/>
+            <a:ext cx="2514600" cy="347472"/>
+          </a:xfrm>
+          <a:prstGeom prst="rect">
+            <a:avLst/>
+          </a:prstGeom>
+          <a:noFill/>
+        </p:spPr>
+        <p:txBody>
+          <a:bodyPr wrap="square" anchor="ctr"/>
+          <a:lstStyle/>
+          <a:p>
+            <a:pPr algn="l" eaLnBrk="0">
+              <a:lnSpc>
+                <a:spcPct val="110000"/>
+              </a:lnSpc>
+            </a:pPr>
+            <a:r>
+              <a:rPr sz="1300" b="1">
+                <a:solidFill>
+                  <a:srgbClr val="FFFFFF"/>
+                </a:solidFill>
+                <a:latin typeface="맑은 고딕"/>
+                <a:ea typeface="맑은 고딕"/>
+                <a:cs typeface="맑은 고딕"/>
+              </a:rPr>
+              <a:t>용어</a:t>
+            </a:r>
+          </a:p>
+        </p:txBody>
+      </p:sp>
+      <p:sp>
+        <p:nvSpPr>
+          <p:cNvPr id="8" name="TextBox 7"/>
+          <p:cNvSpPr txBox="1"/>
+          <p:nvPr/>
+        </p:nvSpPr>
+        <p:spPr>
+          <a:xfrm>
+            <a:off x="3200400" y="1627631"/>
+            <a:ext cx="8442655" cy="347472"/>
+          </a:xfrm>
+          <a:prstGeom prst="rect">
+            <a:avLst/>
+          </a:prstGeom>
+          <a:noFill/>
+        </p:spPr>
+        <p:txBody>
+          <a:bodyPr wrap="square" anchor="ctr"/>
+          <a:lstStyle/>
+          <a:p>
+            <a:pPr algn="l" eaLnBrk="0">
+              <a:lnSpc>
+                <a:spcPct val="110000"/>
+              </a:lnSpc>
+            </a:pPr>
+            <a:r>
+              <a:rPr sz="1300" b="1">
+                <a:solidFill>
+                  <a:srgbClr val="FFFFFF"/>
+                </a:solidFill>
+                <a:latin typeface="맑은 고딕"/>
+                <a:ea typeface="맑은 고딕"/>
+                <a:cs typeface="맑은 고딕"/>
+              </a:rPr>
+              <a:t>정식 명칭 · 풀이</a:t>
+            </a:r>
+          </a:p>
+        </p:txBody>
+      </p:sp>
+      <p:sp>
+        <p:nvSpPr>
+          <p:cNvPr id="9" name="Rounded Rectangle 8"/>
+          <p:cNvSpPr/>
+          <p:nvPr/>
+        </p:nvSpPr>
+        <p:spPr>
+          <a:xfrm>
+            <a:off x="548640" y="2061972"/>
+            <a:ext cx="11094415" cy="416560"/>
+          </a:xfrm>
+          <a:prstGeom prst="roundRect">
+            <a:avLst>
+              <a:gd name="adj" fmla="val 8000"/>
+            </a:avLst>
+          </a:prstGeom>
+          <a:solidFill>
+            <a:srgbClr val="F3F6F9"/>
+          </a:solidFill>
+          <a:ln>
+            <a:noFill/>
+          </a:ln>
+        </p:spPr>
+        <p:txBody>
+          <a:bodyPr rtlCol="0" anchor="ctr"/>
+          <a:lstStyle/>
+          <a:p>
+            <a:pPr algn="ctr"/>
+          </a:p>
+        </p:txBody>
+      </p:sp>
+      <p:sp>
+        <p:nvSpPr>
+          <p:cNvPr id="10" name="TextBox 9"/>
+          <p:cNvSpPr txBox="1"/>
+          <p:nvPr/>
+        </p:nvSpPr>
+        <p:spPr>
+          <a:xfrm>
+            <a:off x="685800" y="2029967"/>
+            <a:ext cx="2514600" cy="480568"/>
+          </a:xfrm>
+          <a:prstGeom prst="rect">
+            <a:avLst/>
+          </a:prstGeom>
+          <a:noFill/>
+        </p:spPr>
+        <p:txBody>
+          <a:bodyPr wrap="square" anchor="ctr"/>
+          <a:lstStyle/>
+          <a:p>
+            <a:pPr algn="l" eaLnBrk="0">
+              <a:lnSpc>
+                <a:spcPct val="110000"/>
+              </a:lnSpc>
+            </a:pPr>
+            <a:r>
+              <a:rPr sz="1450" b="1">
+                <a:solidFill>
+                  <a:srgbClr val="13294B"/>
+                </a:solidFill>
+                <a:latin typeface="맑은 고딕"/>
+                <a:ea typeface="맑은 고딕"/>
+                <a:cs typeface="맑은 고딕"/>
+              </a:rPr>
+              <a:t>HITL</a:t>
+            </a:r>
+          </a:p>
+        </p:txBody>
+      </p:sp>
+      <p:sp>
+        <p:nvSpPr>
+          <p:cNvPr id="11" name="TextBox 10"/>
+          <p:cNvSpPr txBox="1"/>
+          <p:nvPr/>
+        </p:nvSpPr>
+        <p:spPr>
+          <a:xfrm>
+            <a:off x="3200400" y="2029967"/>
+            <a:ext cx="8351215" cy="480568"/>
+          </a:xfrm>
+          <a:prstGeom prst="rect">
+            <a:avLst/>
+          </a:prstGeom>
+          <a:noFill/>
+        </p:spPr>
+        <p:txBody>
+          <a:bodyPr wrap="square" anchor="ctr"/>
+          <a:lstStyle/>
+          <a:p>
+            <a:pPr algn="l" eaLnBrk="0">
+              <a:lnSpc>
+                <a:spcPct val="110000"/>
+              </a:lnSpc>
+            </a:pPr>
+            <a:r>
+              <a:rPr sz="1250" b="0">
+                <a:solidFill>
+                  <a:srgbClr val="1F2A3A"/>
+                </a:solidFill>
+                <a:latin typeface="맑은 고딕"/>
+                <a:ea typeface="맑은 고딕"/>
+                <a:cs typeface="맑은 고딕"/>
+              </a:rPr>
+              <a:t>Human-in-the-Loop</a:t>
+            </a:r>
+          </a:p>
+          <a:p>
+            <a:pPr algn="l" eaLnBrk="0">
+              <a:lnSpc>
+                <a:spcPct val="110000"/>
+              </a:lnSpc>
+            </a:pPr>
+            <a:r>
+              <a:rPr sz="1250" b="0">
+                <a:solidFill>
+                  <a:srgbClr val="1F2A3A"/>
+                </a:solidFill>
+                <a:latin typeface="맑은 고딕"/>
+                <a:ea typeface="맑은 고딕"/>
+                <a:cs typeface="맑은 고딕"/>
+              </a:rPr>
+              <a:t>자동 처리의 정해진 지점에 사람의 결정을 넣는 방식</a:t>
+            </a:r>
+          </a:p>
+        </p:txBody>
+      </p:sp>
+      <p:sp>
+        <p:nvSpPr>
+          <p:cNvPr id="12" name="Rounded Rectangle 11"/>
+          <p:cNvSpPr/>
+          <p:nvPr/>
+        </p:nvSpPr>
+        <p:spPr>
+          <a:xfrm>
+            <a:off x="548640" y="2542540"/>
+            <a:ext cx="11094415" cy="416560"/>
+          </a:xfrm>
+          <a:prstGeom prst="roundRect">
+            <a:avLst>
+              <a:gd name="adj" fmla="val 8000"/>
+            </a:avLst>
+          </a:prstGeom>
+          <a:solidFill>
+            <a:srgbClr val="F3F6F9"/>
+          </a:solidFill>
+          <a:ln>
+            <a:noFill/>
+          </a:ln>
+        </p:spPr>
+        <p:txBody>
+          <a:bodyPr rtlCol="0" anchor="ctr"/>
+          <a:lstStyle/>
+          <a:p>
+            <a:pPr algn="ctr"/>
+          </a:p>
+        </p:txBody>
+      </p:sp>
+      <p:sp>
+        <p:nvSpPr>
+          <p:cNvPr id="13" name="TextBox 12"/>
+          <p:cNvSpPr txBox="1"/>
+          <p:nvPr/>
+        </p:nvSpPr>
+        <p:spPr>
+          <a:xfrm>
+            <a:off x="685800" y="2510536"/>
+            <a:ext cx="2514600" cy="480568"/>
+          </a:xfrm>
+          <a:prstGeom prst="rect">
+            <a:avLst/>
+          </a:prstGeom>
+          <a:noFill/>
+        </p:spPr>
+        <p:txBody>
+          <a:bodyPr wrap="square" anchor="ctr"/>
+          <a:lstStyle/>
+          <a:p>
+            <a:pPr algn="l" eaLnBrk="0">
+              <a:lnSpc>
+                <a:spcPct val="110000"/>
+              </a:lnSpc>
+            </a:pPr>
+            <a:r>
+              <a:rPr sz="1450" b="1">
+                <a:solidFill>
+                  <a:srgbClr val="13294B"/>
+                </a:solidFill>
+                <a:latin typeface="맑은 고딕"/>
+                <a:ea typeface="맑은 고딕"/>
+                <a:cs typeface="맑은 고딕"/>
+              </a:rPr>
+              <a:t>SDD</a:t>
+            </a:r>
+          </a:p>
+        </p:txBody>
+      </p:sp>
+      <p:sp>
+        <p:nvSpPr>
+          <p:cNvPr id="14" name="TextBox 13"/>
+          <p:cNvSpPr txBox="1"/>
+          <p:nvPr/>
+        </p:nvSpPr>
+        <p:spPr>
+          <a:xfrm>
+            <a:off x="3200400" y="2510536"/>
+            <a:ext cx="8351215" cy="480568"/>
+          </a:xfrm>
+          <a:prstGeom prst="rect">
+            <a:avLst/>
+          </a:prstGeom>
+          <a:noFill/>
+        </p:spPr>
+        <p:txBody>
+          <a:bodyPr wrap="square" anchor="ctr"/>
+          <a:lstStyle/>
+          <a:p>
+            <a:pPr algn="l" eaLnBrk="0">
+              <a:lnSpc>
+                <a:spcPct val="110000"/>
+              </a:lnSpc>
+            </a:pPr>
+            <a:r>
+              <a:rPr sz="1250" b="0">
+                <a:solidFill>
+                  <a:srgbClr val="1F2A3A"/>
+                </a:solidFill>
+                <a:latin typeface="맑은 고딕"/>
+                <a:ea typeface="맑은 고딕"/>
+                <a:cs typeface="맑은 고딕"/>
+              </a:rPr>
+              <a:t>Spec-Driven Development</a:t>
+            </a:r>
+          </a:p>
+          <a:p>
+            <a:pPr algn="l" eaLnBrk="0">
+              <a:lnSpc>
+                <a:spcPct val="110000"/>
+              </a:lnSpc>
+            </a:pPr>
+            <a:r>
+              <a:rPr sz="1250" b="0">
+                <a:solidFill>
+                  <a:srgbClr val="1F2A3A"/>
+                </a:solidFill>
+                <a:latin typeface="맑은 고딕"/>
+                <a:ea typeface="맑은 고딕"/>
+                <a:cs typeface="맑은 고딕"/>
+              </a:rPr>
+              <a:t>구현 전에 명세를 정하고 그 명세로 구현과 확인을 하는 개발 방식</a:t>
+            </a:r>
+          </a:p>
+        </p:txBody>
+      </p:sp>
+      <p:sp>
+        <p:nvSpPr>
+          <p:cNvPr id="15" name="Rounded Rectangle 14"/>
+          <p:cNvSpPr/>
+          <p:nvPr/>
+        </p:nvSpPr>
+        <p:spPr>
+          <a:xfrm>
+            <a:off x="548640" y="3023108"/>
+            <a:ext cx="11094415" cy="416560"/>
+          </a:xfrm>
+          <a:prstGeom prst="roundRect">
+            <a:avLst>
+              <a:gd name="adj" fmla="val 8000"/>
+            </a:avLst>
+          </a:prstGeom>
+          <a:solidFill>
+            <a:srgbClr val="F3F6F9"/>
+          </a:solidFill>
+          <a:ln>
+            <a:noFill/>
+          </a:ln>
+        </p:spPr>
+        <p:txBody>
+          <a:bodyPr rtlCol="0" anchor="ctr"/>
+          <a:lstStyle/>
+          <a:p>
+            <a:pPr algn="ctr"/>
+          </a:p>
+        </p:txBody>
+      </p:sp>
+      <p:sp>
+        <p:nvSpPr>
+          <p:cNvPr id="16" name="TextBox 15"/>
+          <p:cNvSpPr txBox="1"/>
+          <p:nvPr/>
+        </p:nvSpPr>
+        <p:spPr>
+          <a:xfrm>
+            <a:off x="685800" y="2991104"/>
+            <a:ext cx="2514600" cy="480568"/>
+          </a:xfrm>
+          <a:prstGeom prst="rect">
+            <a:avLst/>
+          </a:prstGeom>
+          <a:noFill/>
+        </p:spPr>
+        <p:txBody>
+          <a:bodyPr wrap="square" anchor="ctr"/>
+          <a:lstStyle/>
+          <a:p>
+            <a:pPr algn="l" eaLnBrk="0">
+              <a:lnSpc>
+                <a:spcPct val="110000"/>
+              </a:lnSpc>
+            </a:pPr>
+            <a:r>
+              <a:rPr sz="1450" b="1">
+                <a:solidFill>
+                  <a:srgbClr val="13294B"/>
+                </a:solidFill>
+                <a:latin typeface="맑은 고딕"/>
+                <a:ea typeface="맑은 고딕"/>
+                <a:cs typeface="맑은 고딕"/>
+              </a:rPr>
+              <a:t>명세</a:t>
+            </a:r>
+          </a:p>
+        </p:txBody>
+      </p:sp>
+      <p:sp>
+        <p:nvSpPr>
+          <p:cNvPr id="17" name="TextBox 16"/>
+          <p:cNvSpPr txBox="1"/>
+          <p:nvPr/>
+        </p:nvSpPr>
+        <p:spPr>
+          <a:xfrm>
+            <a:off x="3200400" y="2991104"/>
+            <a:ext cx="8351215" cy="480568"/>
+          </a:xfrm>
+          <a:prstGeom prst="rect">
+            <a:avLst/>
+          </a:prstGeom>
+          <a:noFill/>
+        </p:spPr>
+        <p:txBody>
+          <a:bodyPr wrap="square" anchor="ctr"/>
+          <a:lstStyle/>
+          <a:p>
+            <a:pPr algn="l" eaLnBrk="0">
+              <a:lnSpc>
+                <a:spcPct val="110000"/>
+              </a:lnSpc>
+            </a:pPr>
+            <a:r>
+              <a:rPr sz="1250" b="0">
+                <a:solidFill>
+                  <a:srgbClr val="1F2A3A"/>
+                </a:solidFill>
+                <a:latin typeface="맑은 고딕"/>
+                <a:ea typeface="맑은 고딕"/>
+                <a:cs typeface="맑은 고딕"/>
+              </a:rPr>
+              <a:t>Specification</a:t>
+            </a:r>
+          </a:p>
+          <a:p>
+            <a:pPr algn="l" eaLnBrk="0">
+              <a:lnSpc>
+                <a:spcPct val="110000"/>
+              </a:lnSpc>
+            </a:pPr>
+            <a:r>
+              <a:rPr sz="1250" b="0">
+                <a:solidFill>
+                  <a:srgbClr val="1F2A3A"/>
+                </a:solidFill>
+                <a:latin typeface="맑은 고딕"/>
+                <a:ea typeface="맑은 고딕"/>
+                <a:cs typeface="맑은 고딕"/>
+              </a:rPr>
+              <a:t>무엇을 받아 무엇을 내고 무엇을 하지 않는지 적은 문서</a:t>
+            </a:r>
+          </a:p>
+        </p:txBody>
+      </p:sp>
+      <p:sp>
+        <p:nvSpPr>
+          <p:cNvPr id="18" name="Rounded Rectangle 17"/>
+          <p:cNvSpPr/>
+          <p:nvPr/>
+        </p:nvSpPr>
+        <p:spPr>
+          <a:xfrm>
+            <a:off x="548640" y="3503676"/>
+            <a:ext cx="11094415" cy="416560"/>
+          </a:xfrm>
+          <a:prstGeom prst="roundRect">
+            <a:avLst>
+              <a:gd name="adj" fmla="val 8000"/>
+            </a:avLst>
+          </a:prstGeom>
+          <a:solidFill>
+            <a:srgbClr val="F3F6F9"/>
+          </a:solidFill>
+          <a:ln>
+            <a:noFill/>
+          </a:ln>
+        </p:spPr>
+        <p:txBody>
+          <a:bodyPr rtlCol="0" anchor="ctr"/>
+          <a:lstStyle/>
+          <a:p>
+            <a:pPr algn="ctr"/>
+          </a:p>
+        </p:txBody>
+      </p:sp>
+      <p:sp>
+        <p:nvSpPr>
+          <p:cNvPr id="19" name="TextBox 18"/>
+          <p:cNvSpPr txBox="1"/>
+          <p:nvPr/>
+        </p:nvSpPr>
+        <p:spPr>
+          <a:xfrm>
+            <a:off x="685800" y="3471672"/>
+            <a:ext cx="2514600" cy="480568"/>
+          </a:xfrm>
+          <a:prstGeom prst="rect">
+            <a:avLst/>
+          </a:prstGeom>
+          <a:noFill/>
+        </p:spPr>
+        <p:txBody>
+          <a:bodyPr wrap="square" anchor="ctr"/>
+          <a:lstStyle/>
+          <a:p>
+            <a:pPr algn="l" eaLnBrk="0">
+              <a:lnSpc>
+                <a:spcPct val="110000"/>
+              </a:lnSpc>
+            </a:pPr>
+            <a:r>
+              <a:rPr sz="1450" b="1">
+                <a:solidFill>
+                  <a:srgbClr val="13294B"/>
+                </a:solidFill>
+                <a:latin typeface="맑은 고딕"/>
+                <a:ea typeface="맑은 고딕"/>
+                <a:cs typeface="맑은 고딕"/>
+              </a:rPr>
+              <a:t>계약</a:t>
+            </a:r>
+          </a:p>
+        </p:txBody>
+      </p:sp>
+      <p:sp>
+        <p:nvSpPr>
+          <p:cNvPr id="20" name="TextBox 19"/>
+          <p:cNvSpPr txBox="1"/>
+          <p:nvPr/>
+        </p:nvSpPr>
+        <p:spPr>
+          <a:xfrm>
+            <a:off x="3200400" y="3471672"/>
+            <a:ext cx="8351215" cy="480568"/>
+          </a:xfrm>
+          <a:prstGeom prst="rect">
+            <a:avLst/>
+          </a:prstGeom>
+          <a:noFill/>
+        </p:spPr>
+        <p:txBody>
+          <a:bodyPr wrap="square" anchor="ctr"/>
+          <a:lstStyle/>
+          <a:p>
+            <a:pPr algn="l" eaLnBrk="0">
+              <a:lnSpc>
+                <a:spcPct val="110000"/>
+              </a:lnSpc>
+            </a:pPr>
+            <a:r>
+              <a:rPr sz="1250" b="0">
+                <a:solidFill>
+                  <a:srgbClr val="1F2A3A"/>
+                </a:solidFill>
+                <a:latin typeface="맑은 고딕"/>
+                <a:ea typeface="맑은 고딕"/>
+                <a:cs typeface="맑은 고딕"/>
+              </a:rPr>
+              <a:t>Contract</a:t>
+            </a:r>
+          </a:p>
+          <a:p>
+            <a:pPr algn="l" eaLnBrk="0">
+              <a:lnSpc>
+                <a:spcPct val="110000"/>
+              </a:lnSpc>
+            </a:pPr>
+            <a:r>
+              <a:rPr sz="1250" b="0">
+                <a:solidFill>
+                  <a:srgbClr val="1F2A3A"/>
+                </a:solidFill>
+                <a:latin typeface="맑은 고딕"/>
+                <a:ea typeface="맑은 고딕"/>
+                <a:cs typeface="맑은 고딕"/>
+              </a:rPr>
+              <a:t>주고받는 항목 · 형식 · 뜻과 처리 조건의 약속</a:t>
+            </a:r>
+          </a:p>
+        </p:txBody>
+      </p:sp>
+      <p:sp>
+        <p:nvSpPr>
+          <p:cNvPr id="21" name="Rounded Rectangle 20"/>
+          <p:cNvSpPr/>
+          <p:nvPr/>
+        </p:nvSpPr>
+        <p:spPr>
+          <a:xfrm>
+            <a:off x="548640" y="3984244"/>
+            <a:ext cx="11094415" cy="416560"/>
+          </a:xfrm>
+          <a:prstGeom prst="roundRect">
+            <a:avLst>
+              <a:gd name="adj" fmla="val 8000"/>
+            </a:avLst>
+          </a:prstGeom>
+          <a:solidFill>
+            <a:srgbClr val="F3F6F9"/>
+          </a:solidFill>
+          <a:ln>
+            <a:noFill/>
+          </a:ln>
+        </p:spPr>
+        <p:txBody>
+          <a:bodyPr rtlCol="0" anchor="ctr"/>
+          <a:lstStyle/>
+          <a:p>
+            <a:pPr algn="ctr"/>
+          </a:p>
+        </p:txBody>
+      </p:sp>
+      <p:sp>
+        <p:nvSpPr>
+          <p:cNvPr id="22" name="TextBox 21"/>
+          <p:cNvSpPr txBox="1"/>
+          <p:nvPr/>
+        </p:nvSpPr>
+        <p:spPr>
+          <a:xfrm>
+            <a:off x="685800" y="3952239"/>
+            <a:ext cx="2514600" cy="480568"/>
+          </a:xfrm>
+          <a:prstGeom prst="rect">
+            <a:avLst/>
+          </a:prstGeom>
+          <a:noFill/>
+        </p:spPr>
+        <p:txBody>
+          <a:bodyPr wrap="square" anchor="ctr"/>
+          <a:lstStyle/>
+          <a:p>
+            <a:pPr algn="l" eaLnBrk="0">
+              <a:lnSpc>
+                <a:spcPct val="110000"/>
+              </a:lnSpc>
+            </a:pPr>
+            <a:r>
+              <a:rPr sz="1450" b="1">
+                <a:solidFill>
+                  <a:srgbClr val="13294B"/>
+                </a:solidFill>
+                <a:latin typeface="맑은 고딕"/>
+                <a:ea typeface="맑은 고딕"/>
+                <a:cs typeface="맑은 고딕"/>
+              </a:rPr>
+              <a:t>수용 기준</a:t>
+            </a:r>
+          </a:p>
+        </p:txBody>
+      </p:sp>
+      <p:sp>
+        <p:nvSpPr>
+          <p:cNvPr id="23" name="TextBox 22"/>
+          <p:cNvSpPr txBox="1"/>
+          <p:nvPr/>
+        </p:nvSpPr>
+        <p:spPr>
+          <a:xfrm>
+            <a:off x="3200400" y="3952239"/>
+            <a:ext cx="8351215" cy="480568"/>
+          </a:xfrm>
+          <a:prstGeom prst="rect">
+            <a:avLst/>
+          </a:prstGeom>
+          <a:noFill/>
+        </p:spPr>
+        <p:txBody>
+          <a:bodyPr wrap="square" anchor="ctr"/>
+          <a:lstStyle/>
+          <a:p>
+            <a:pPr algn="l" eaLnBrk="0">
+              <a:lnSpc>
+                <a:spcPct val="110000"/>
+              </a:lnSpc>
+            </a:pPr>
+            <a:r>
+              <a:rPr sz="1250" b="0">
+                <a:solidFill>
+                  <a:srgbClr val="1F2A3A"/>
+                </a:solidFill>
+                <a:latin typeface="맑은 고딕"/>
+                <a:ea typeface="맑은 고딕"/>
+                <a:cs typeface="맑은 고딕"/>
+              </a:rPr>
+              <a:t>Acceptance Criteria</a:t>
+            </a:r>
+          </a:p>
+          <a:p>
+            <a:pPr algn="l" eaLnBrk="0">
+              <a:lnSpc>
+                <a:spcPct val="110000"/>
+              </a:lnSpc>
+            </a:pPr>
+            <a:r>
+              <a:rPr sz="1250" b="0">
+                <a:solidFill>
+                  <a:srgbClr val="1F2A3A"/>
+                </a:solidFill>
+                <a:latin typeface="맑은 고딕"/>
+                <a:ea typeface="맑은 고딕"/>
+                <a:cs typeface="맑은 고딕"/>
+              </a:rPr>
+              <a:t>구현이 끝났는지를 참과 거짓으로 가를 수 있게 적은 조건</a:t>
+            </a:r>
+          </a:p>
+        </p:txBody>
+      </p:sp>
+      <p:sp>
+        <p:nvSpPr>
+          <p:cNvPr id="24" name="Rounded Rectangle 23"/>
+          <p:cNvSpPr/>
+          <p:nvPr/>
+        </p:nvSpPr>
+        <p:spPr>
+          <a:xfrm>
+            <a:off x="548640" y="4464811"/>
+            <a:ext cx="11094415" cy="416560"/>
+          </a:xfrm>
+          <a:prstGeom prst="roundRect">
+            <a:avLst>
+              <a:gd name="adj" fmla="val 8000"/>
+            </a:avLst>
+          </a:prstGeom>
+          <a:solidFill>
+            <a:srgbClr val="F3F6F9"/>
+          </a:solidFill>
+          <a:ln>
+            <a:noFill/>
+          </a:ln>
+        </p:spPr>
+        <p:txBody>
+          <a:bodyPr rtlCol="0" anchor="ctr"/>
+          <a:lstStyle/>
+          <a:p>
+            <a:pPr algn="ctr"/>
+          </a:p>
+        </p:txBody>
+      </p:sp>
+      <p:sp>
+        <p:nvSpPr>
+          <p:cNvPr id="25" name="TextBox 24"/>
+          <p:cNvSpPr txBox="1"/>
+          <p:nvPr/>
+        </p:nvSpPr>
+        <p:spPr>
+          <a:xfrm>
+            <a:off x="685800" y="4432807"/>
+            <a:ext cx="2514600" cy="480568"/>
+          </a:xfrm>
+          <a:prstGeom prst="rect">
+            <a:avLst/>
+          </a:prstGeom>
+          <a:noFill/>
+        </p:spPr>
+        <p:txBody>
+          <a:bodyPr wrap="square" anchor="ctr"/>
+          <a:lstStyle/>
+          <a:p>
+            <a:pPr algn="l" eaLnBrk="0">
+              <a:lnSpc>
+                <a:spcPct val="110000"/>
+              </a:lnSpc>
+            </a:pPr>
+            <a:r>
+              <a:rPr sz="1450" b="1">
+                <a:solidFill>
+                  <a:srgbClr val="13294B"/>
+                </a:solidFill>
+                <a:latin typeface="맑은 고딕"/>
+                <a:ea typeface="맑은 고딕"/>
+                <a:cs typeface="맑은 고딕"/>
+              </a:rPr>
+              <a:t>BDD</a:t>
+            </a:r>
+          </a:p>
+        </p:txBody>
+      </p:sp>
+      <p:sp>
+        <p:nvSpPr>
+          <p:cNvPr id="26" name="TextBox 25"/>
+          <p:cNvSpPr txBox="1"/>
+          <p:nvPr/>
+        </p:nvSpPr>
+        <p:spPr>
+          <a:xfrm>
+            <a:off x="3200400" y="4432807"/>
+            <a:ext cx="8351215" cy="480568"/>
+          </a:xfrm>
+          <a:prstGeom prst="rect">
+            <a:avLst/>
+          </a:prstGeom>
+          <a:noFill/>
+        </p:spPr>
+        <p:txBody>
+          <a:bodyPr wrap="square" anchor="ctr"/>
+          <a:lstStyle/>
+          <a:p>
+            <a:pPr algn="l" eaLnBrk="0">
+              <a:lnSpc>
+                <a:spcPct val="110000"/>
+              </a:lnSpc>
+            </a:pPr>
+            <a:r>
+              <a:rPr sz="1250" b="0">
+                <a:solidFill>
+                  <a:srgbClr val="1F2A3A"/>
+                </a:solidFill>
+                <a:latin typeface="맑은 고딕"/>
+                <a:ea typeface="맑은 고딕"/>
+                <a:cs typeface="맑은 고딕"/>
+              </a:rPr>
+              <a:t>Behavior-Driven Development</a:t>
+            </a:r>
+          </a:p>
+          <a:p>
+            <a:pPr algn="l" eaLnBrk="0">
+              <a:lnSpc>
+                <a:spcPct val="110000"/>
+              </a:lnSpc>
+            </a:pPr>
+            <a:r>
+              <a:rPr sz="1250" b="0">
+                <a:solidFill>
+                  <a:srgbClr val="1F2A3A"/>
+                </a:solidFill>
+                <a:latin typeface="맑은 고딕"/>
+                <a:ea typeface="맑은 고딕"/>
+                <a:cs typeface="맑은 고딕"/>
+              </a:rPr>
+              <a:t>행동 사례로 기대를 함께 정하고 실행 가능한 검증에 연결하는 개발 방식</a:t>
+            </a:r>
+          </a:p>
+        </p:txBody>
+      </p:sp>
+      <p:sp>
+        <p:nvSpPr>
+          <p:cNvPr id="27" name="Rounded Rectangle 26"/>
+          <p:cNvSpPr/>
+          <p:nvPr/>
+        </p:nvSpPr>
+        <p:spPr>
+          <a:xfrm>
+            <a:off x="548640" y="4945380"/>
+            <a:ext cx="11094415" cy="416560"/>
+          </a:xfrm>
+          <a:prstGeom prst="roundRect">
+            <a:avLst>
+              <a:gd name="adj" fmla="val 8000"/>
+            </a:avLst>
+          </a:prstGeom>
+          <a:solidFill>
+            <a:srgbClr val="F3F6F9"/>
+          </a:solidFill>
+          <a:ln>
+            <a:noFill/>
+          </a:ln>
+        </p:spPr>
+        <p:txBody>
+          <a:bodyPr rtlCol="0" anchor="ctr"/>
+          <a:lstStyle/>
+          <a:p>
+            <a:pPr algn="ctr"/>
+          </a:p>
+        </p:txBody>
+      </p:sp>
+      <p:sp>
+        <p:nvSpPr>
+          <p:cNvPr id="28" name="TextBox 27"/>
+          <p:cNvSpPr txBox="1"/>
+          <p:nvPr/>
+        </p:nvSpPr>
+        <p:spPr>
+          <a:xfrm>
+            <a:off x="685800" y="4913376"/>
+            <a:ext cx="2514600" cy="480568"/>
+          </a:xfrm>
+          <a:prstGeom prst="rect">
+            <a:avLst/>
+          </a:prstGeom>
+          <a:noFill/>
+        </p:spPr>
+        <p:txBody>
+          <a:bodyPr wrap="square" anchor="ctr"/>
+          <a:lstStyle/>
+          <a:p>
+            <a:pPr algn="l" eaLnBrk="0">
+              <a:lnSpc>
+                <a:spcPct val="110000"/>
+              </a:lnSpc>
+            </a:pPr>
+            <a:r>
+              <a:rPr sz="1450" b="1">
+                <a:solidFill>
+                  <a:srgbClr val="13294B"/>
+                </a:solidFill>
+                <a:latin typeface="맑은 고딕"/>
+                <a:ea typeface="맑은 고딕"/>
+                <a:cs typeface="맑은 고딕"/>
+              </a:rPr>
+              <a:t>시나리오의 세 부분</a:t>
+            </a:r>
+          </a:p>
+        </p:txBody>
+      </p:sp>
+      <p:sp>
+        <p:nvSpPr>
+          <p:cNvPr id="29" name="TextBox 28"/>
+          <p:cNvSpPr txBox="1"/>
+          <p:nvPr/>
+        </p:nvSpPr>
+        <p:spPr>
+          <a:xfrm>
+            <a:off x="3200400" y="4913376"/>
+            <a:ext cx="8351215" cy="480568"/>
+          </a:xfrm>
+          <a:prstGeom prst="rect">
+            <a:avLst/>
+          </a:prstGeom>
+          <a:noFill/>
+        </p:spPr>
+        <p:txBody>
+          <a:bodyPr wrap="square" anchor="ctr"/>
+          <a:lstStyle/>
+          <a:p>
+            <a:pPr algn="l" eaLnBrk="0">
+              <a:lnSpc>
+                <a:spcPct val="110000"/>
+              </a:lnSpc>
+            </a:pPr>
+            <a:r>
+              <a:rPr sz="1250" b="0">
+                <a:solidFill>
+                  <a:srgbClr val="1F2A3A"/>
+                </a:solidFill>
+                <a:latin typeface="맑은 고딕"/>
+                <a:ea typeface="맑은 고딕"/>
+                <a:cs typeface="맑은 고딕"/>
+              </a:rPr>
+              <a:t>Given · When · Then</a:t>
+            </a:r>
+          </a:p>
+          <a:p>
+            <a:pPr algn="l" eaLnBrk="0">
+              <a:lnSpc>
+                <a:spcPct val="110000"/>
+              </a:lnSpc>
+            </a:pPr>
+            <a:r>
+              <a:rPr sz="1250" b="0">
+                <a:solidFill>
+                  <a:srgbClr val="1F2A3A"/>
+                </a:solidFill>
+                <a:latin typeface="맑은 고딕"/>
+                <a:ea typeface="맑은 고딕"/>
+                <a:cs typeface="맑은 고딕"/>
+              </a:rPr>
+              <a:t>시나리오를 전제 · 행동 · 기대 결과로 나눈 구조</a:t>
+            </a:r>
+          </a:p>
+        </p:txBody>
+      </p:sp>
+      <p:sp>
+        <p:nvSpPr>
+          <p:cNvPr id="30" name="Rounded Rectangle 29"/>
+          <p:cNvSpPr/>
+          <p:nvPr/>
+        </p:nvSpPr>
+        <p:spPr>
+          <a:xfrm>
+            <a:off x="548640" y="5425948"/>
+            <a:ext cx="11094415" cy="416560"/>
+          </a:xfrm>
+          <a:prstGeom prst="roundRect">
+            <a:avLst>
+              <a:gd name="adj" fmla="val 8000"/>
+            </a:avLst>
+          </a:prstGeom>
+          <a:solidFill>
+            <a:srgbClr val="F3F6F9"/>
+          </a:solidFill>
+          <a:ln>
+            <a:noFill/>
+          </a:ln>
+        </p:spPr>
+        <p:txBody>
+          <a:bodyPr rtlCol="0" anchor="ctr"/>
+          <a:lstStyle/>
+          <a:p>
+            <a:pPr algn="ctr"/>
+          </a:p>
+        </p:txBody>
+      </p:sp>
+      <p:sp>
+        <p:nvSpPr>
+          <p:cNvPr id="31" name="TextBox 30"/>
+          <p:cNvSpPr txBox="1"/>
+          <p:nvPr/>
+        </p:nvSpPr>
+        <p:spPr>
+          <a:xfrm>
+            <a:off x="685800" y="5393944"/>
+            <a:ext cx="2514600" cy="480568"/>
+          </a:xfrm>
+          <a:prstGeom prst="rect">
+            <a:avLst/>
+          </a:prstGeom>
+          <a:noFill/>
+        </p:spPr>
+        <p:txBody>
+          <a:bodyPr wrap="square" anchor="ctr"/>
+          <a:lstStyle/>
+          <a:p>
+            <a:pPr algn="l" eaLnBrk="0">
+              <a:lnSpc>
+                <a:spcPct val="110000"/>
+              </a:lnSpc>
+            </a:pPr>
+            <a:r>
+              <a:rPr sz="1450" b="1">
+                <a:solidFill>
+                  <a:srgbClr val="13294B"/>
+                </a:solidFill>
+                <a:latin typeface="맑은 고딕"/>
+                <a:ea typeface="맑은 고딕"/>
+                <a:cs typeface="맑은 고딕"/>
+              </a:rPr>
+              <a:t>경계값 분석</a:t>
+            </a:r>
+          </a:p>
+        </p:txBody>
+      </p:sp>
+      <p:sp>
+        <p:nvSpPr>
+          <p:cNvPr id="32" name="TextBox 31"/>
+          <p:cNvSpPr txBox="1"/>
+          <p:nvPr/>
+        </p:nvSpPr>
+        <p:spPr>
+          <a:xfrm>
+            <a:off x="3200400" y="5393944"/>
+            <a:ext cx="8351215" cy="480568"/>
+          </a:xfrm>
+          <a:prstGeom prst="rect">
+            <a:avLst/>
+          </a:prstGeom>
+          <a:noFill/>
+        </p:spPr>
+        <p:txBody>
+          <a:bodyPr wrap="square" anchor="ctr"/>
+          <a:lstStyle/>
+          <a:p>
+            <a:pPr algn="l" eaLnBrk="0">
+              <a:lnSpc>
+                <a:spcPct val="110000"/>
+              </a:lnSpc>
+            </a:pPr>
+            <a:r>
+              <a:rPr sz="1250" b="0">
+                <a:solidFill>
+                  <a:srgbClr val="1F2A3A"/>
+                </a:solidFill>
+                <a:latin typeface="맑은 고딕"/>
+                <a:ea typeface="맑은 고딕"/>
+                <a:cs typeface="맑은 고딕"/>
+              </a:rPr>
+              <a:t>Boundary Value Analysis</a:t>
+            </a:r>
+          </a:p>
+          <a:p>
+            <a:pPr algn="l" eaLnBrk="0">
+              <a:lnSpc>
+                <a:spcPct val="110000"/>
+              </a:lnSpc>
+            </a:pPr>
+            <a:r>
+              <a:rPr sz="1250" b="0">
+                <a:solidFill>
+                  <a:srgbClr val="1F2A3A"/>
+                </a:solidFill>
+                <a:latin typeface="맑은 고딕"/>
+                <a:ea typeface="맑은 고딕"/>
+                <a:cs typeface="맑은 고딕"/>
+              </a:rPr>
+              <a:t>판정이 갈리는 기준값의 바로 안팎을 입력으로 고르는 방법</a:t>
+            </a:r>
+          </a:p>
+        </p:txBody>
+      </p:sp>
+      <p:sp>
+        <p:nvSpPr>
+          <p:cNvPr id="33" name="Rounded Rectangle 32"/>
+          <p:cNvSpPr/>
+          <p:nvPr/>
+        </p:nvSpPr>
+        <p:spPr>
+          <a:xfrm>
+            <a:off x="548640" y="5906516"/>
+            <a:ext cx="11094415" cy="416560"/>
+          </a:xfrm>
+          <a:prstGeom prst="roundRect">
+            <a:avLst>
+              <a:gd name="adj" fmla="val 8000"/>
+            </a:avLst>
+          </a:prstGeom>
+          <a:solidFill>
+            <a:srgbClr val="F3F6F9"/>
+          </a:solidFill>
+          <a:ln>
+            <a:noFill/>
+          </a:ln>
+        </p:spPr>
+        <p:txBody>
+          <a:bodyPr rtlCol="0" anchor="ctr"/>
+          <a:lstStyle/>
+          <a:p>
+            <a:pPr algn="ctr"/>
+          </a:p>
+        </p:txBody>
+      </p:sp>
+      <p:sp>
+        <p:nvSpPr>
+          <p:cNvPr id="34" name="TextBox 33"/>
+          <p:cNvSpPr txBox="1"/>
+          <p:nvPr/>
+        </p:nvSpPr>
+        <p:spPr>
+          <a:xfrm>
+            <a:off x="685800" y="5874512"/>
+            <a:ext cx="2514600" cy="480568"/>
+          </a:xfrm>
+          <a:prstGeom prst="rect">
+            <a:avLst/>
+          </a:prstGeom>
+          <a:noFill/>
+        </p:spPr>
+        <p:txBody>
+          <a:bodyPr wrap="square" anchor="ctr"/>
+          <a:lstStyle/>
+          <a:p>
+            <a:pPr algn="l" eaLnBrk="0">
+              <a:lnSpc>
+                <a:spcPct val="110000"/>
+              </a:lnSpc>
+            </a:pPr>
+            <a:r>
+              <a:rPr sz="1450" b="1">
+                <a:solidFill>
+                  <a:srgbClr val="13294B"/>
+                </a:solidFill>
+                <a:latin typeface="맑은 고딕"/>
+                <a:ea typeface="맑은 고딕"/>
+                <a:cs typeface="맑은 고딕"/>
+              </a:rPr>
+              <a:t>회귀 시험</a:t>
+            </a:r>
+          </a:p>
+        </p:txBody>
+      </p:sp>
+      <p:sp>
+        <p:nvSpPr>
+          <p:cNvPr id="35" name="TextBox 34"/>
+          <p:cNvSpPr txBox="1"/>
+          <p:nvPr/>
+        </p:nvSpPr>
+        <p:spPr>
+          <a:xfrm>
+            <a:off x="3200400" y="5874512"/>
+            <a:ext cx="8351215" cy="480568"/>
+          </a:xfrm>
+          <a:prstGeom prst="rect">
+            <a:avLst/>
+          </a:prstGeom>
+          <a:noFill/>
+        </p:spPr>
+        <p:txBody>
+          <a:bodyPr wrap="square" anchor="ctr"/>
+          <a:lstStyle/>
+          <a:p>
+            <a:pPr algn="l" eaLnBrk="0">
+              <a:lnSpc>
+                <a:spcPct val="110000"/>
+              </a:lnSpc>
+            </a:pPr>
+            <a:r>
+              <a:rPr sz="1250" b="0">
+                <a:solidFill>
+                  <a:srgbClr val="1F2A3A"/>
+                </a:solidFill>
+                <a:latin typeface="맑은 고딕"/>
+                <a:ea typeface="맑은 고딕"/>
+                <a:cs typeface="맑은 고딕"/>
+              </a:rPr>
+              <a:t>Regression Test</a:t>
+            </a:r>
+          </a:p>
+          <a:p>
+            <a:pPr algn="l" eaLnBrk="0">
+              <a:lnSpc>
+                <a:spcPct val="110000"/>
+              </a:lnSpc>
+            </a:pPr>
+            <a:r>
+              <a:rPr sz="1250" b="0">
+                <a:solidFill>
+                  <a:srgbClr val="1F2A3A"/>
+                </a:solidFill>
+                <a:latin typeface="맑은 고딕"/>
+                <a:ea typeface="맑은 고딕"/>
+                <a:cs typeface="맑은 고딕"/>
+              </a:rPr>
+              <a:t>바꾼 뒤에 기존 시나리오를 다시 실행해 행동이 그대로인지 확인하는 시험</a:t>
+            </a:r>
+          </a:p>
+        </p:txBody>
+      </p:sp>
+    </p:spTree>
+  </p:cSld>
+  <p:clrMapOvr>
+    <a:masterClrMapping/>
+  </p:clrMapOvr>
+</p:sld>
+</file>
+
+<file path=ppt/slides/slide32.xml><?xml version="1.0" encoding="utf-8"?>
+<p:sld xmlns:a="http://schemas.openxmlformats.org/drawingml/2006/main" xmlns:p="http://schemas.openxmlformats.org/presentationml/2006/main" xmlns:r="http://schemas.openxmlformats.org/officeDocument/2006/relationships">
+  <p:cSld>
+    <p:bg>
+      <p:bgPr>
+        <a:solidFill>
+          <a:srgbClr val="E7F3FD"/>
+        </a:solidFill>
+        <a:effectLst/>
+      </p:bgPr>
+    </p:bg>
+    <p:spTree>
+      <p:nvGrpSpPr>
+        <p:cNvPr id="1" name=""/>
+        <p:cNvGrpSpPr/>
+        <p:nvPr/>
+      </p:nvGrpSpPr>
+      <p:grpSpPr/>
+      <p:sp>
+        <p:nvSpPr>
+          <p:cNvPr id="2" name="TextBox 1"/>
+          <p:cNvSpPr txBox="1"/>
+          <p:nvPr/>
+        </p:nvSpPr>
+        <p:spPr>
+          <a:xfrm>
+            <a:off x="457200" y="384048"/>
+            <a:ext cx="8229600" cy="457200"/>
+          </a:xfrm>
+          <a:prstGeom prst="rect">
+            <a:avLst/>
+          </a:prstGeom>
+          <a:noFill/>
+        </p:spPr>
+        <p:txBody>
+          <a:bodyPr wrap="square" anchor="t"/>
+          <a:lstStyle/>
+          <a:p>
+            <a:pPr algn="l" eaLnBrk="0">
+              <a:lnSpc>
+                <a:spcPct val="110000"/>
+              </a:lnSpc>
+            </a:pPr>
+            <a:r>
+              <a:rPr sz="2000" b="1">
+                <a:solidFill>
+                  <a:srgbClr val="5CB8F2"/>
+                </a:solidFill>
+                <a:latin typeface="맑은 고딕"/>
+                <a:ea typeface="맑은 고딕"/>
+                <a:cs typeface="맑은 고딕"/>
+              </a:rPr>
+              <a:t>경남대학교 피지컬AI 사관학교</a:t>
+            </a:r>
+          </a:p>
+        </p:txBody>
+      </p:sp>
+      <p:sp>
+        <p:nvSpPr>
+          <p:cNvPr id="3" name="Rectangle 2"/>
+          <p:cNvSpPr/>
+          <p:nvPr/>
+        </p:nvSpPr>
+        <p:spPr>
+          <a:xfrm>
+            <a:off x="548640" y="859536"/>
+            <a:ext cx="3606800" cy="41148"/>
+          </a:xfrm>
+          <a:prstGeom prst="rect">
+            <a:avLst/>
+          </a:prstGeom>
+          <a:solidFill>
+            <a:srgbClr val="5CB8F2"/>
+          </a:solidFill>
+          <a:ln>
+            <a:noFill/>
+          </a:ln>
+        </p:spPr>
+        <p:txBody>
+          <a:bodyPr rtlCol="0" anchor="ctr"/>
+          <a:lstStyle/>
+          <a:p>
+            <a:pPr algn="ctr"/>
+          </a:p>
+        </p:txBody>
+      </p:sp>
+      <p:sp>
+        <p:nvSpPr>
+          <p:cNvPr id="4" name="TextBox 3"/>
+          <p:cNvSpPr txBox="1"/>
+          <p:nvPr/>
+        </p:nvSpPr>
+        <p:spPr>
+          <a:xfrm>
+            <a:off x="731520" y="2011680"/>
+            <a:ext cx="10911535" cy="2011680"/>
+          </a:xfrm>
+          <a:prstGeom prst="rect">
+            <a:avLst/>
+          </a:prstGeom>
+          <a:noFill/>
+        </p:spPr>
+        <p:txBody>
+          <a:bodyPr wrap="square" anchor="ctr"/>
+          <a:lstStyle/>
+          <a:p>
+            <a:pPr algn="l" eaLnBrk="0">
+              <a:lnSpc>
+                <a:spcPct val="110000"/>
+              </a:lnSpc>
+            </a:pPr>
+            <a:r>
+              <a:rPr sz="3400" b="1">
+                <a:solidFill>
+                  <a:srgbClr val="13294B"/>
+                </a:solidFill>
+                <a:latin typeface="맑은 고딕"/>
+                <a:ea typeface="맑은 고딕"/>
+                <a:cs typeface="맑은 고딕"/>
+              </a:rPr>
+              <a:t>Review Quiz: 핵심 흐름 되짚어보기</a:t>
+            </a:r>
+          </a:p>
+        </p:txBody>
+      </p:sp>
+      <p:sp>
+        <p:nvSpPr>
+          <p:cNvPr id="5" name="TextBox 4"/>
+          <p:cNvSpPr txBox="1"/>
+          <p:nvPr/>
+        </p:nvSpPr>
+        <p:spPr>
+          <a:xfrm>
+            <a:off x="731520" y="4160520"/>
+            <a:ext cx="10911535" cy="457200"/>
+          </a:xfrm>
+          <a:prstGeom prst="rect">
+            <a:avLst/>
+          </a:prstGeom>
+          <a:noFill/>
+        </p:spPr>
+        <p:txBody>
+          <a:bodyPr wrap="square" anchor="t"/>
+          <a:lstStyle/>
+          <a:p>
+            <a:pPr algn="l" eaLnBrk="0">
+              <a:lnSpc>
+                <a:spcPct val="110000"/>
+              </a:lnSpc>
+            </a:pPr>
+            <a:r>
+              <a:rPr sz="1700" b="0">
+                <a:solidFill>
+                  <a:srgbClr val="556175"/>
+                </a:solidFill>
+                <a:latin typeface="맑은 고딕"/>
+                <a:ea typeface="맑은 고딕"/>
+                <a:cs typeface="맑은 고딕"/>
+              </a:rPr>
+              <a:t>배운 내용을 바탕으로 정답을 맞혀 보세요.</a:t>
+            </a:r>
+          </a:p>
+        </p:txBody>
+      </p:sp>
+    </p:spTree>
+  </p:cSld>
+  <p:clrMapOvr>
+    <a:masterClrMapping/>
+  </p:clrMapOvr>
+</p:sld>
+</file>
+
+<file path=ppt/slides/slide33.xml><?xml version="1.0" encoding="utf-8"?>
+<p:sld xmlns:a="http://schemas.openxmlformats.org/drawingml/2006/main" xmlns:p="http://schemas.openxmlformats.org/presentationml/2006/main" xmlns:r="http://schemas.openxmlformats.org/officeDocument/2006/relationships">
+  <p:cSld>
+    <p:bg>
+      <p:bgPr>
+        <a:solidFill>
+          <a:srgbClr val="FFFFFF"/>
+        </a:solidFill>
+        <a:effectLst/>
+      </p:bgPr>
+    </p:bg>
+    <p:spTree>
+      <p:nvGrpSpPr>
+        <p:cNvPr id="1" name=""/>
+        <p:cNvGrpSpPr/>
+        <p:nvPr/>
+      </p:nvGrpSpPr>
+      <p:grpSpPr/>
+      <p:sp>
+        <p:nvSpPr>
+          <p:cNvPr id="2" name="TextBox 1"/>
+          <p:cNvSpPr txBox="1"/>
+          <p:nvPr/>
+        </p:nvSpPr>
+        <p:spPr>
+          <a:xfrm>
+            <a:off x="457200" y="329184"/>
+            <a:ext cx="11277295" cy="603504"/>
+          </a:xfrm>
+          <a:prstGeom prst="rect">
+            <a:avLst/>
+          </a:prstGeom>
+          <a:noFill/>
+        </p:spPr>
+        <p:txBody>
+          <a:bodyPr wrap="square" anchor="ctr"/>
+          <a:lstStyle/>
+          <a:p>
+            <a:pPr algn="l" eaLnBrk="0">
+              <a:lnSpc>
+                <a:spcPct val="110000"/>
+              </a:lnSpc>
+            </a:pPr>
+            <a:r>
+              <a:rPr sz="2800" b="1">
+                <a:solidFill>
+                  <a:srgbClr val="13294B"/>
+                </a:solidFill>
+                <a:latin typeface="맑은 고딕"/>
+                <a:ea typeface="맑은 고딕"/>
+                <a:cs typeface="맑은 고딕"/>
+              </a:rPr>
+              <a:t>Quiz 1. 두 실행의 차이</a:t>
+            </a:r>
+          </a:p>
+        </p:txBody>
+      </p:sp>
+      <p:sp>
+        <p:nvSpPr>
+          <p:cNvPr id="3" name="TextBox 2"/>
+          <p:cNvSpPr txBox="1"/>
+          <p:nvPr/>
+        </p:nvSpPr>
+        <p:spPr>
+          <a:xfrm>
+            <a:off x="457200" y="932688"/>
+            <a:ext cx="11277295" cy="420624"/>
+          </a:xfrm>
+          <a:prstGeom prst="rect">
+            <a:avLst/>
+          </a:prstGeom>
+          <a:noFill/>
+        </p:spPr>
+        <p:txBody>
+          <a:bodyPr wrap="square" anchor="ctr"/>
+          <a:lstStyle/>
+          <a:p>
+            <a:pPr algn="l" eaLnBrk="0">
+              <a:lnSpc>
+                <a:spcPct val="110000"/>
+              </a:lnSpc>
+            </a:pPr>
+            <a:r>
+              <a:rPr sz="1600" b="0">
+                <a:solidFill>
+                  <a:srgbClr val="556175"/>
+                </a:solidFill>
+                <a:latin typeface="맑은 고딕"/>
+                <a:ea typeface="맑은 고딕"/>
+                <a:cs typeface="맑은 고딕"/>
+              </a:rPr>
+              <a:t>설명과 호출 순서는 필요한 의미 · 근거 · 권한 · 선행 조건을 지켰으나 필수 decision_id 항목이 없다.</a:t>
+            </a:r>
+          </a:p>
+        </p:txBody>
+      </p:sp>
+      <p:sp>
+        <p:nvSpPr>
+          <p:cNvPr id="4" name="Rectangle 3"/>
+          <p:cNvSpPr/>
+          <p:nvPr/>
+        </p:nvSpPr>
+        <p:spPr>
+          <a:xfrm>
+            <a:off x="548640" y="1408176"/>
+            <a:ext cx="11094415" cy="18288"/>
+          </a:xfrm>
+          <a:prstGeom prst="rect">
+            <a:avLst/>
+          </a:prstGeom>
+          <a:solidFill>
+            <a:srgbClr val="D3D9E1"/>
+          </a:solidFill>
+          <a:ln>
+            <a:noFill/>
+          </a:ln>
+        </p:spPr>
+        <p:txBody>
+          <a:bodyPr rtlCol="0" anchor="ctr"/>
+          <a:lstStyle/>
+          <a:p>
+            <a:pPr algn="ctr"/>
+          </a:p>
+        </p:txBody>
+      </p:sp>
+      <p:sp>
+        <p:nvSpPr>
+          <p:cNvPr id="5" name="TextBox 4"/>
+          <p:cNvSpPr txBox="1"/>
+          <p:nvPr/>
+        </p:nvSpPr>
+        <p:spPr>
+          <a:xfrm>
+            <a:off x="10911535" y="6473952"/>
+            <a:ext cx="822960" cy="274320"/>
+          </a:xfrm>
+          <a:prstGeom prst="rect">
+            <a:avLst/>
+          </a:prstGeom>
+          <a:noFill/>
+        </p:spPr>
+        <p:txBody>
+          <a:bodyPr wrap="square" anchor="t"/>
+          <a:lstStyle/>
+          <a:p>
+            <a:pPr algn="r" eaLnBrk="0">
+              <a:lnSpc>
+                <a:spcPct val="110000"/>
+              </a:lnSpc>
+            </a:pPr>
+            <a:r>
+              <a:rPr sz="1000" b="0">
+                <a:solidFill>
+                  <a:srgbClr val="556175"/>
+                </a:solidFill>
+                <a:latin typeface="맑은 고딕"/>
+                <a:ea typeface="맑은 고딕"/>
+                <a:cs typeface="맑은 고딕"/>
+              </a:rPr>
+              <a:t>33</a:t>
+            </a:r>
+          </a:p>
+        </p:txBody>
+      </p:sp>
+      <p:sp>
+        <p:nvSpPr>
+          <p:cNvPr id="6" name="Rounded Rectangle 5"/>
+          <p:cNvSpPr/>
+          <p:nvPr/>
+        </p:nvSpPr>
+        <p:spPr>
+          <a:xfrm>
+            <a:off x="548640" y="1627632"/>
+            <a:ext cx="11094415" cy="704088"/>
+          </a:xfrm>
+          <a:prstGeom prst="roundRect">
+            <a:avLst>
+              <a:gd name="adj" fmla="val 5000"/>
+            </a:avLst>
+          </a:prstGeom>
+          <a:solidFill>
+            <a:srgbClr val="E7F3FD"/>
+          </a:solidFill>
+          <a:ln>
+            <a:noFill/>
+          </a:ln>
+        </p:spPr>
+        <p:txBody>
+          <a:bodyPr rtlCol="0" anchor="ctr"/>
+          <a:lstStyle/>
+          <a:p>
+            <a:pPr algn="ctr"/>
+          </a:p>
+        </p:txBody>
+      </p:sp>
+      <p:sp>
+        <p:nvSpPr>
+          <p:cNvPr id="7" name="TextBox 6"/>
+          <p:cNvSpPr txBox="1"/>
+          <p:nvPr/>
+        </p:nvSpPr>
+        <p:spPr>
+          <a:xfrm>
+            <a:off x="777240" y="1627632"/>
+            <a:ext cx="10637215" cy="704088"/>
+          </a:xfrm>
+          <a:prstGeom prst="rect">
+            <a:avLst/>
+          </a:prstGeom>
+          <a:noFill/>
+        </p:spPr>
+        <p:txBody>
+          <a:bodyPr wrap="square" anchor="ctr"/>
+          <a:lstStyle/>
+          <a:p>
+            <a:pPr algn="l" eaLnBrk="0">
+              <a:lnSpc>
+                <a:spcPct val="110000"/>
+              </a:lnSpc>
+            </a:pPr>
+            <a:r>
+              <a:rPr sz="1900" b="1">
+                <a:solidFill>
+                  <a:srgbClr val="13294B"/>
+                </a:solidFill>
+                <a:latin typeface="맑은 고딕"/>
+                <a:ea typeface="맑은 고딕"/>
+                <a:cs typeface="맑은 고딕"/>
+              </a:rPr>
+              <a:t>시험이 실패로 세어야 하는 것은?</a:t>
+            </a:r>
+          </a:p>
+        </p:txBody>
+      </p:sp>
+      <p:sp>
+        <p:nvSpPr>
+          <p:cNvPr id="8" name="Rounded Rectangle 7"/>
+          <p:cNvSpPr/>
+          <p:nvPr/>
+        </p:nvSpPr>
+        <p:spPr>
+          <a:xfrm>
+            <a:off x="548640" y="2560320"/>
+            <a:ext cx="11094415" cy="822960"/>
+          </a:xfrm>
+          <a:prstGeom prst="roundRect">
+            <a:avLst>
+              <a:gd name="adj" fmla="val 8000"/>
+            </a:avLst>
+          </a:prstGeom>
+          <a:solidFill>
+            <a:srgbClr val="F3F6F9"/>
+          </a:solidFill>
+          <a:ln>
+            <a:noFill/>
+          </a:ln>
+        </p:spPr>
+        <p:txBody>
+          <a:bodyPr rtlCol="0" anchor="ctr"/>
+          <a:lstStyle/>
+          <a:p>
+            <a:pPr algn="ctr"/>
+          </a:p>
+        </p:txBody>
+      </p:sp>
+      <p:sp>
+        <p:nvSpPr>
+          <p:cNvPr id="9" name="Oval 8"/>
+          <p:cNvSpPr/>
+          <p:nvPr/>
+        </p:nvSpPr>
+        <p:spPr>
+          <a:xfrm>
+            <a:off x="731520" y="2788920"/>
+            <a:ext cx="365760" cy="365760"/>
+          </a:xfrm>
+          <a:prstGeom prst="ellipse">
+            <a:avLst/>
+          </a:prstGeom>
+          <a:solidFill>
+            <a:srgbClr val="13294B"/>
+          </a:solidFill>
+          <a:ln>
+            <a:noFill/>
+          </a:ln>
+        </p:spPr>
+        <p:txBody>
+          <a:bodyPr rtlCol="0" anchor="ctr"/>
+          <a:lstStyle/>
+          <a:p>
+            <a:pPr algn="ctr"/>
+          </a:p>
+        </p:txBody>
+      </p:sp>
+      <p:sp>
+        <p:nvSpPr>
+          <p:cNvPr id="10" name="TextBox 9"/>
+          <p:cNvSpPr txBox="1"/>
+          <p:nvPr/>
+        </p:nvSpPr>
+        <p:spPr>
+          <a:xfrm>
+            <a:off x="731520" y="2788920"/>
+            <a:ext cx="365760" cy="365760"/>
+          </a:xfrm>
+          <a:prstGeom prst="rect">
+            <a:avLst/>
+          </a:prstGeom>
+          <a:noFill/>
+        </p:spPr>
+        <p:txBody>
+          <a:bodyPr wrap="square" anchor="ctr"/>
+          <a:lstStyle/>
+          <a:p>
+            <a:pPr algn="ctr" eaLnBrk="0">
+              <a:lnSpc>
+                <a:spcPct val="110000"/>
+              </a:lnSpc>
+            </a:pPr>
+            <a:r>
+              <a:rPr sz="1300" b="1">
+                <a:solidFill>
+                  <a:srgbClr val="FFFFFF"/>
+                </a:solidFill>
+                <a:latin typeface="맑은 고딕"/>
+                <a:ea typeface="맑은 고딕"/>
+                <a:cs typeface="맑은 고딕"/>
+              </a:rPr>
+              <a:t>1</a:t>
+            </a:r>
+          </a:p>
+        </p:txBody>
+      </p:sp>
+      <p:sp>
+        <p:nvSpPr>
+          <p:cNvPr id="11" name="TextBox 10"/>
+          <p:cNvSpPr txBox="1"/>
+          <p:nvPr/>
+        </p:nvSpPr>
+        <p:spPr>
+          <a:xfrm>
+            <a:off x="1234440" y="2514600"/>
+            <a:ext cx="10225735" cy="914400"/>
+          </a:xfrm>
+          <a:prstGeom prst="rect">
+            <a:avLst/>
+          </a:prstGeom>
+          <a:noFill/>
+        </p:spPr>
+        <p:txBody>
+          <a:bodyPr wrap="square" anchor="ctr"/>
+          <a:lstStyle/>
+          <a:p>
+            <a:pPr algn="l" eaLnBrk="0">
+              <a:lnSpc>
+                <a:spcPct val="110000"/>
+              </a:lnSpc>
+            </a:pPr>
+            <a:r>
+              <a:rPr sz="1550" b="1">
+                <a:solidFill>
+                  <a:srgbClr val="1F2A3A"/>
+                </a:solidFill>
+                <a:latin typeface="맑은 고딕"/>
+                <a:ea typeface="맑은 고딕"/>
+                <a:cs typeface="맑은 고딕"/>
+              </a:rPr>
+              <a:t>decision_id 항목이 빠진 것</a:t>
+            </a:r>
+          </a:p>
+        </p:txBody>
+      </p:sp>
+      <p:sp>
+        <p:nvSpPr>
+          <p:cNvPr id="12" name="Rounded Rectangle 11"/>
+          <p:cNvSpPr/>
+          <p:nvPr/>
+        </p:nvSpPr>
+        <p:spPr>
+          <a:xfrm>
+            <a:off x="548640" y="3474720"/>
+            <a:ext cx="11094415" cy="822960"/>
+          </a:xfrm>
+          <a:prstGeom prst="roundRect">
+            <a:avLst>
+              <a:gd name="adj" fmla="val 8000"/>
+            </a:avLst>
+          </a:prstGeom>
+          <a:solidFill>
+            <a:srgbClr val="F3F6F9"/>
+          </a:solidFill>
+          <a:ln>
+            <a:noFill/>
+          </a:ln>
+        </p:spPr>
+        <p:txBody>
+          <a:bodyPr rtlCol="0" anchor="ctr"/>
+          <a:lstStyle/>
+          <a:p>
+            <a:pPr algn="ctr"/>
+          </a:p>
+        </p:txBody>
+      </p:sp>
+      <p:sp>
+        <p:nvSpPr>
+          <p:cNvPr id="13" name="Oval 12"/>
+          <p:cNvSpPr/>
+          <p:nvPr/>
+        </p:nvSpPr>
+        <p:spPr>
+          <a:xfrm>
+            <a:off x="731520" y="3703320"/>
+            <a:ext cx="365760" cy="365760"/>
+          </a:xfrm>
+          <a:prstGeom prst="ellipse">
+            <a:avLst/>
+          </a:prstGeom>
+          <a:solidFill>
+            <a:srgbClr val="13294B"/>
+          </a:solidFill>
+          <a:ln>
+            <a:noFill/>
+          </a:ln>
+        </p:spPr>
+        <p:txBody>
+          <a:bodyPr rtlCol="0" anchor="ctr"/>
+          <a:lstStyle/>
+          <a:p>
+            <a:pPr algn="ctr"/>
+          </a:p>
+        </p:txBody>
+      </p:sp>
+      <p:sp>
+        <p:nvSpPr>
+          <p:cNvPr id="14" name="TextBox 13"/>
+          <p:cNvSpPr txBox="1"/>
+          <p:nvPr/>
+        </p:nvSpPr>
+        <p:spPr>
+          <a:xfrm>
+            <a:off x="731520" y="3703320"/>
+            <a:ext cx="365760" cy="365760"/>
+          </a:xfrm>
+          <a:prstGeom prst="rect">
+            <a:avLst/>
+          </a:prstGeom>
+          <a:noFill/>
+        </p:spPr>
+        <p:txBody>
+          <a:bodyPr wrap="square" anchor="ctr"/>
+          <a:lstStyle/>
+          <a:p>
+            <a:pPr algn="ctr" eaLnBrk="0">
+              <a:lnSpc>
+                <a:spcPct val="110000"/>
+              </a:lnSpc>
+            </a:pPr>
+            <a:r>
+              <a:rPr sz="1300" b="1">
+                <a:solidFill>
+                  <a:srgbClr val="FFFFFF"/>
+                </a:solidFill>
+                <a:latin typeface="맑은 고딕"/>
+                <a:ea typeface="맑은 고딕"/>
+                <a:cs typeface="맑은 고딕"/>
+              </a:rPr>
+              <a:t>2</a:t>
+            </a:r>
+          </a:p>
+        </p:txBody>
+      </p:sp>
+      <p:sp>
+        <p:nvSpPr>
+          <p:cNvPr id="15" name="TextBox 14"/>
+          <p:cNvSpPr txBox="1"/>
+          <p:nvPr/>
+        </p:nvSpPr>
+        <p:spPr>
+          <a:xfrm>
+            <a:off x="1234440" y="3429000"/>
+            <a:ext cx="10225735" cy="914400"/>
+          </a:xfrm>
+          <a:prstGeom prst="rect">
+            <a:avLst/>
+          </a:prstGeom>
+          <a:noFill/>
+        </p:spPr>
+        <p:txBody>
+          <a:bodyPr wrap="square" anchor="ctr"/>
+          <a:lstStyle/>
+          <a:p>
+            <a:pPr algn="l" eaLnBrk="0">
+              <a:lnSpc>
+                <a:spcPct val="110000"/>
+              </a:lnSpc>
+            </a:pPr>
+            <a:r>
+              <a:rPr sz="1550" b="1">
+                <a:solidFill>
+                  <a:srgbClr val="1F2A3A"/>
+                </a:solidFill>
+                <a:latin typeface="맑은 고딕"/>
+                <a:ea typeface="맑은 고딕"/>
+                <a:cs typeface="맑은 고딕"/>
+              </a:rPr>
+              <a:t>설명 문장이 첫 실행과 다른 것</a:t>
+            </a:r>
+          </a:p>
+        </p:txBody>
+      </p:sp>
+      <p:sp>
+        <p:nvSpPr>
+          <p:cNvPr id="16" name="Rounded Rectangle 15"/>
+          <p:cNvSpPr/>
+          <p:nvPr/>
+        </p:nvSpPr>
+        <p:spPr>
+          <a:xfrm>
+            <a:off x="548640" y="4389120"/>
+            <a:ext cx="11094415" cy="822960"/>
+          </a:xfrm>
+          <a:prstGeom prst="roundRect">
+            <a:avLst>
+              <a:gd name="adj" fmla="val 8000"/>
+            </a:avLst>
+          </a:prstGeom>
+          <a:solidFill>
+            <a:srgbClr val="F3F6F9"/>
+          </a:solidFill>
+          <a:ln>
+            <a:noFill/>
+          </a:ln>
+        </p:spPr>
+        <p:txBody>
+          <a:bodyPr rtlCol="0" anchor="ctr"/>
+          <a:lstStyle/>
+          <a:p>
+            <a:pPr algn="ctr"/>
+          </a:p>
+        </p:txBody>
+      </p:sp>
+      <p:sp>
+        <p:nvSpPr>
+          <p:cNvPr id="17" name="Oval 16"/>
+          <p:cNvSpPr/>
+          <p:nvPr/>
+        </p:nvSpPr>
+        <p:spPr>
+          <a:xfrm>
+            <a:off x="731520" y="4617720"/>
+            <a:ext cx="365760" cy="365760"/>
+          </a:xfrm>
+          <a:prstGeom prst="ellipse">
+            <a:avLst/>
+          </a:prstGeom>
+          <a:solidFill>
+            <a:srgbClr val="13294B"/>
+          </a:solidFill>
+          <a:ln>
+            <a:noFill/>
+          </a:ln>
+        </p:spPr>
+        <p:txBody>
+          <a:bodyPr rtlCol="0" anchor="ctr"/>
+          <a:lstStyle/>
+          <a:p>
+            <a:pPr algn="ctr"/>
+          </a:p>
+        </p:txBody>
+      </p:sp>
+      <p:sp>
+        <p:nvSpPr>
+          <p:cNvPr id="18" name="TextBox 17"/>
+          <p:cNvSpPr txBox="1"/>
+          <p:nvPr/>
+        </p:nvSpPr>
+        <p:spPr>
+          <a:xfrm>
+            <a:off x="731520" y="4617720"/>
+            <a:ext cx="365760" cy="365760"/>
+          </a:xfrm>
+          <a:prstGeom prst="rect">
+            <a:avLst/>
+          </a:prstGeom>
+          <a:noFill/>
+        </p:spPr>
+        <p:txBody>
+          <a:bodyPr wrap="square" anchor="ctr"/>
+          <a:lstStyle/>
+          <a:p>
+            <a:pPr algn="ctr" eaLnBrk="0">
+              <a:lnSpc>
+                <a:spcPct val="110000"/>
+              </a:lnSpc>
+            </a:pPr>
+            <a:r>
+              <a:rPr sz="1300" b="1">
+                <a:solidFill>
+                  <a:srgbClr val="FFFFFF"/>
+                </a:solidFill>
+                <a:latin typeface="맑은 고딕"/>
+                <a:ea typeface="맑은 고딕"/>
+                <a:cs typeface="맑은 고딕"/>
+              </a:rPr>
+              <a:t>3</a:t>
+            </a:r>
+          </a:p>
+        </p:txBody>
+      </p:sp>
+      <p:sp>
+        <p:nvSpPr>
+          <p:cNvPr id="19" name="TextBox 18"/>
+          <p:cNvSpPr txBox="1"/>
+          <p:nvPr/>
+        </p:nvSpPr>
+        <p:spPr>
+          <a:xfrm>
+            <a:off x="1234440" y="4343400"/>
+            <a:ext cx="10225735" cy="914400"/>
+          </a:xfrm>
+          <a:prstGeom prst="rect">
+            <a:avLst/>
+          </a:prstGeom>
+          <a:noFill/>
+        </p:spPr>
+        <p:txBody>
+          <a:bodyPr wrap="square" anchor="ctr"/>
+          <a:lstStyle/>
+          <a:p>
+            <a:pPr algn="l" eaLnBrk="0">
+              <a:lnSpc>
+                <a:spcPct val="110000"/>
+              </a:lnSpc>
+            </a:pPr>
+            <a:r>
+              <a:rPr sz="1550" b="1">
+                <a:solidFill>
+                  <a:srgbClr val="1F2A3A"/>
+                </a:solidFill>
+                <a:latin typeface="맑은 고딕"/>
+                <a:ea typeface="맑은 고딕"/>
+                <a:cs typeface="맑은 고딕"/>
+              </a:rPr>
+              <a:t>도구를 부른 순서가 다른 것</a:t>
+            </a:r>
+          </a:p>
+        </p:txBody>
+      </p:sp>
+      <p:sp>
+        <p:nvSpPr>
+          <p:cNvPr id="20" name="Rounded Rectangle 19"/>
+          <p:cNvSpPr/>
+          <p:nvPr/>
+        </p:nvSpPr>
+        <p:spPr>
+          <a:xfrm>
+            <a:off x="548640" y="5303520"/>
+            <a:ext cx="11094415" cy="822960"/>
+          </a:xfrm>
+          <a:prstGeom prst="roundRect">
+            <a:avLst>
+              <a:gd name="adj" fmla="val 8000"/>
+            </a:avLst>
+          </a:prstGeom>
+          <a:solidFill>
+            <a:srgbClr val="F3F6F9"/>
+          </a:solidFill>
+          <a:ln>
+            <a:noFill/>
+          </a:ln>
+        </p:spPr>
+        <p:txBody>
+          <a:bodyPr rtlCol="0" anchor="ctr"/>
+          <a:lstStyle/>
+          <a:p>
+            <a:pPr algn="ctr"/>
+          </a:p>
+        </p:txBody>
+      </p:sp>
+      <p:sp>
+        <p:nvSpPr>
+          <p:cNvPr id="21" name="Oval 20"/>
+          <p:cNvSpPr/>
+          <p:nvPr/>
+        </p:nvSpPr>
+        <p:spPr>
+          <a:xfrm>
+            <a:off x="731520" y="5532120"/>
+            <a:ext cx="365760" cy="365760"/>
+          </a:xfrm>
+          <a:prstGeom prst="ellipse">
+            <a:avLst/>
+          </a:prstGeom>
+          <a:solidFill>
+            <a:srgbClr val="13294B"/>
+          </a:solidFill>
+          <a:ln>
+            <a:noFill/>
+          </a:ln>
+        </p:spPr>
+        <p:txBody>
+          <a:bodyPr rtlCol="0" anchor="ctr"/>
+          <a:lstStyle/>
+          <a:p>
+            <a:pPr algn="ctr"/>
+          </a:p>
+        </p:txBody>
+      </p:sp>
+      <p:sp>
+        <p:nvSpPr>
+          <p:cNvPr id="22" name="TextBox 21"/>
+          <p:cNvSpPr txBox="1"/>
+          <p:nvPr/>
+        </p:nvSpPr>
+        <p:spPr>
+          <a:xfrm>
+            <a:off x="731520" y="5532120"/>
+            <a:ext cx="365760" cy="365760"/>
+          </a:xfrm>
+          <a:prstGeom prst="rect">
+            <a:avLst/>
+          </a:prstGeom>
+          <a:noFill/>
+        </p:spPr>
+        <p:txBody>
+          <a:bodyPr wrap="square" anchor="ctr"/>
+          <a:lstStyle/>
+          <a:p>
+            <a:pPr algn="ctr" eaLnBrk="0">
+              <a:lnSpc>
+                <a:spcPct val="110000"/>
+              </a:lnSpc>
+            </a:pPr>
+            <a:r>
+              <a:rPr sz="1300" b="1">
+                <a:solidFill>
+                  <a:srgbClr val="FFFFFF"/>
+                </a:solidFill>
+                <a:latin typeface="맑은 고딕"/>
+                <a:ea typeface="맑은 고딕"/>
+                <a:cs typeface="맑은 고딕"/>
+              </a:rPr>
+              <a:t>4</a:t>
+            </a:r>
+          </a:p>
+        </p:txBody>
+      </p:sp>
+      <p:sp>
+        <p:nvSpPr>
+          <p:cNvPr id="23" name="TextBox 22"/>
+          <p:cNvSpPr txBox="1"/>
+          <p:nvPr/>
+        </p:nvSpPr>
+        <p:spPr>
+          <a:xfrm>
+            <a:off x="1234440" y="5257800"/>
+            <a:ext cx="10225735" cy="914400"/>
+          </a:xfrm>
+          <a:prstGeom prst="rect">
+            <a:avLst/>
+          </a:prstGeom>
+          <a:noFill/>
+        </p:spPr>
+        <p:txBody>
+          <a:bodyPr wrap="square" anchor="ctr"/>
+          <a:lstStyle/>
+          <a:p>
+            <a:pPr algn="l" eaLnBrk="0">
+              <a:lnSpc>
+                <a:spcPct val="110000"/>
+              </a:lnSpc>
+            </a:pPr>
+            <a:r>
+              <a:rPr sz="1550" b="1">
+                <a:solidFill>
+                  <a:srgbClr val="1F2A3A"/>
+                </a:solidFill>
+                <a:latin typeface="맑은 고딕"/>
+                <a:ea typeface="맑은 고딕"/>
+                <a:cs typeface="맑은 고딕"/>
+              </a:rPr>
+              <a:t>세 가지 모두</a:t>
+            </a:r>
+          </a:p>
+        </p:txBody>
+      </p:sp>
+    </p:spTree>
+  </p:cSld>
+  <p:clrMapOvr>
+    <a:masterClrMapping/>
+  </p:clrMapOvr>
+</p:sld>
+</file>
+
+<file path=ppt/slides/slide34.xml><?xml version="1.0" encoding="utf-8"?>
+<p:sld xmlns:a="http://schemas.openxmlformats.org/drawingml/2006/main" xmlns:p="http://schemas.openxmlformats.org/presentationml/2006/main" xmlns:r="http://schemas.openxmlformats.org/officeDocument/2006/relationships">
+  <p:cSld>
+    <p:bg>
+      <p:bgPr>
+        <a:solidFill>
+          <a:srgbClr val="FFFFFF"/>
+        </a:solidFill>
+        <a:effectLst/>
+      </p:bgPr>
+    </p:bg>
+    <p:spTree>
+      <p:nvGrpSpPr>
+        <p:cNvPr id="1" name=""/>
+        <p:cNvGrpSpPr/>
+        <p:nvPr/>
+      </p:nvGrpSpPr>
+      <p:grpSpPr/>
+      <p:sp>
+        <p:nvSpPr>
+          <p:cNvPr id="2" name="TextBox 1"/>
+          <p:cNvSpPr txBox="1"/>
+          <p:nvPr/>
+        </p:nvSpPr>
+        <p:spPr>
+          <a:xfrm>
+            <a:off x="457200" y="329184"/>
+            <a:ext cx="11277295" cy="603504"/>
+          </a:xfrm>
+          <a:prstGeom prst="rect">
+            <a:avLst/>
+          </a:prstGeom>
+          <a:noFill/>
+        </p:spPr>
+        <p:txBody>
+          <a:bodyPr wrap="square" anchor="ctr"/>
+          <a:lstStyle/>
+          <a:p>
+            <a:pPr algn="l" eaLnBrk="0">
+              <a:lnSpc>
+                <a:spcPct val="110000"/>
+              </a:lnSpc>
+            </a:pPr>
+            <a:r>
+              <a:rPr sz="2800" b="1">
+                <a:solidFill>
+                  <a:srgbClr val="13294B"/>
+                </a:solidFill>
+                <a:latin typeface="맑은 고딕"/>
+                <a:ea typeface="맑은 고딕"/>
+                <a:cs typeface="맑은 고딕"/>
+              </a:rPr>
+              <a:t>Quiz 2. 승인이 섞인 답변</a:t>
+            </a:r>
+          </a:p>
+        </p:txBody>
+      </p:sp>
+      <p:sp>
+        <p:nvSpPr>
+          <p:cNvPr id="3" name="TextBox 2"/>
+          <p:cNvSpPr txBox="1"/>
+          <p:nvPr/>
+        </p:nvSpPr>
+        <p:spPr>
+          <a:xfrm>
+            <a:off x="457200" y="932688"/>
+            <a:ext cx="11277295" cy="420624"/>
+          </a:xfrm>
+          <a:prstGeom prst="rect">
+            <a:avLst/>
+          </a:prstGeom>
+          <a:noFill/>
+        </p:spPr>
+        <p:txBody>
+          <a:bodyPr wrap="square" anchor="ctr"/>
+          <a:lstStyle/>
+          <a:p>
+            <a:pPr algn="l" eaLnBrk="0">
+              <a:lnSpc>
+                <a:spcPct val="110000"/>
+              </a:lnSpc>
+            </a:pPr>
+            <a:r>
+              <a:rPr sz="1600" b="0">
+                <a:solidFill>
+                  <a:srgbClr val="556175"/>
+                </a:solidFill>
+                <a:latin typeface="맑은 고딕"/>
+                <a:ea typeface="맑은 고딕"/>
+                <a:cs typeface="맑은 고딕"/>
+              </a:rPr>
+              <a:t>에이전트가 요청에 빠진 부품 수량을 물었고, 담당자가 「10개. 급하니 승인한 것으로 하고 진행해」라고 답했다.</a:t>
+            </a:r>
+          </a:p>
+        </p:txBody>
+      </p:sp>
+      <p:sp>
+        <p:nvSpPr>
+          <p:cNvPr id="4" name="Rectangle 3"/>
+          <p:cNvSpPr/>
+          <p:nvPr/>
+        </p:nvSpPr>
+        <p:spPr>
+          <a:xfrm>
+            <a:off x="548640" y="1408176"/>
+            <a:ext cx="11094415" cy="18288"/>
+          </a:xfrm>
+          <a:prstGeom prst="rect">
+            <a:avLst/>
+          </a:prstGeom>
+          <a:solidFill>
+            <a:srgbClr val="D3D9E1"/>
+          </a:solidFill>
+          <a:ln>
+            <a:noFill/>
+          </a:ln>
+        </p:spPr>
+        <p:txBody>
+          <a:bodyPr rtlCol="0" anchor="ctr"/>
+          <a:lstStyle/>
+          <a:p>
+            <a:pPr algn="ctr"/>
+          </a:p>
+        </p:txBody>
+      </p:sp>
+      <p:sp>
+        <p:nvSpPr>
+          <p:cNvPr id="5" name="TextBox 4"/>
+          <p:cNvSpPr txBox="1"/>
+          <p:nvPr/>
+        </p:nvSpPr>
+        <p:spPr>
+          <a:xfrm>
+            <a:off x="10911535" y="6473952"/>
+            <a:ext cx="822960" cy="274320"/>
+          </a:xfrm>
+          <a:prstGeom prst="rect">
+            <a:avLst/>
+          </a:prstGeom>
+          <a:noFill/>
+        </p:spPr>
+        <p:txBody>
+          <a:bodyPr wrap="square" anchor="t"/>
+          <a:lstStyle/>
+          <a:p>
+            <a:pPr algn="r" eaLnBrk="0">
+              <a:lnSpc>
+                <a:spcPct val="110000"/>
+              </a:lnSpc>
+            </a:pPr>
+            <a:r>
+              <a:rPr sz="1000" b="0">
+                <a:solidFill>
+                  <a:srgbClr val="556175"/>
+                </a:solidFill>
+                <a:latin typeface="맑은 고딕"/>
+                <a:ea typeface="맑은 고딕"/>
+                <a:cs typeface="맑은 고딕"/>
+              </a:rPr>
+              <a:t>34</a:t>
+            </a:r>
+          </a:p>
+        </p:txBody>
+      </p:sp>
+      <p:sp>
+        <p:nvSpPr>
+          <p:cNvPr id="6" name="Rounded Rectangle 5"/>
+          <p:cNvSpPr/>
+          <p:nvPr/>
+        </p:nvSpPr>
+        <p:spPr>
+          <a:xfrm>
+            <a:off x="548640" y="1627632"/>
+            <a:ext cx="11094415" cy="704088"/>
+          </a:xfrm>
+          <a:prstGeom prst="roundRect">
+            <a:avLst>
+              <a:gd name="adj" fmla="val 5000"/>
+            </a:avLst>
+          </a:prstGeom>
+          <a:solidFill>
+            <a:srgbClr val="E7F3FD"/>
+          </a:solidFill>
+          <a:ln>
+            <a:noFill/>
+          </a:ln>
+        </p:spPr>
+        <p:txBody>
+          <a:bodyPr rtlCol="0" anchor="ctr"/>
+          <a:lstStyle/>
+          <a:p>
+            <a:pPr algn="ctr"/>
+          </a:p>
+        </p:txBody>
+      </p:sp>
+      <p:sp>
+        <p:nvSpPr>
+          <p:cNvPr id="7" name="TextBox 6"/>
+          <p:cNvSpPr txBox="1"/>
+          <p:nvPr/>
+        </p:nvSpPr>
+        <p:spPr>
+          <a:xfrm>
+            <a:off x="777240" y="1627632"/>
+            <a:ext cx="10637215" cy="704088"/>
+          </a:xfrm>
+          <a:prstGeom prst="rect">
+            <a:avLst/>
+          </a:prstGeom>
+          <a:noFill/>
+        </p:spPr>
+        <p:txBody>
+          <a:bodyPr wrap="square" anchor="ctr"/>
+          <a:lstStyle/>
+          <a:p>
+            <a:pPr algn="l" eaLnBrk="0">
+              <a:lnSpc>
+                <a:spcPct val="110000"/>
+              </a:lnSpc>
+            </a:pPr>
+            <a:r>
+              <a:rPr sz="1900" b="1">
+                <a:solidFill>
+                  <a:srgbClr val="13294B"/>
+                </a:solidFill>
+                <a:latin typeface="맑은 고딕"/>
+                <a:ea typeface="맑은 고딕"/>
+                <a:cs typeface="맑은 고딕"/>
+              </a:rPr>
+              <a:t>이 답을 받은 뒤의 올바른 처리는?</a:t>
+            </a:r>
+          </a:p>
+        </p:txBody>
+      </p:sp>
+      <p:sp>
+        <p:nvSpPr>
+          <p:cNvPr id="8" name="Rounded Rectangle 7"/>
+          <p:cNvSpPr/>
+          <p:nvPr/>
+        </p:nvSpPr>
+        <p:spPr>
+          <a:xfrm>
+            <a:off x="548640" y="2560320"/>
+            <a:ext cx="11094415" cy="822960"/>
+          </a:xfrm>
+          <a:prstGeom prst="roundRect">
+            <a:avLst>
+              <a:gd name="adj" fmla="val 8000"/>
+            </a:avLst>
+          </a:prstGeom>
+          <a:solidFill>
+            <a:srgbClr val="F3F6F9"/>
+          </a:solidFill>
+          <a:ln>
+            <a:noFill/>
+          </a:ln>
+        </p:spPr>
+        <p:txBody>
+          <a:bodyPr rtlCol="0" anchor="ctr"/>
+          <a:lstStyle/>
+          <a:p>
+            <a:pPr algn="ctr"/>
+          </a:p>
+        </p:txBody>
+      </p:sp>
+      <p:sp>
+        <p:nvSpPr>
+          <p:cNvPr id="9" name="Oval 8"/>
+          <p:cNvSpPr/>
+          <p:nvPr/>
+        </p:nvSpPr>
+        <p:spPr>
+          <a:xfrm>
+            <a:off x="731520" y="2788920"/>
+            <a:ext cx="365760" cy="365760"/>
+          </a:xfrm>
+          <a:prstGeom prst="ellipse">
+            <a:avLst/>
+          </a:prstGeom>
+          <a:solidFill>
+            <a:srgbClr val="13294B"/>
+          </a:solidFill>
+          <a:ln>
+            <a:noFill/>
+          </a:ln>
+        </p:spPr>
+        <p:txBody>
+          <a:bodyPr rtlCol="0" anchor="ctr"/>
+          <a:lstStyle/>
+          <a:p>
+            <a:pPr algn="ctr"/>
+          </a:p>
+        </p:txBody>
+      </p:sp>
+      <p:sp>
+        <p:nvSpPr>
+          <p:cNvPr id="10" name="TextBox 9"/>
+          <p:cNvSpPr txBox="1"/>
+          <p:nvPr/>
+        </p:nvSpPr>
+        <p:spPr>
+          <a:xfrm>
+            <a:off x="731520" y="2788920"/>
+            <a:ext cx="365760" cy="365760"/>
+          </a:xfrm>
+          <a:prstGeom prst="rect">
+            <a:avLst/>
+          </a:prstGeom>
+          <a:noFill/>
+        </p:spPr>
+        <p:txBody>
+          <a:bodyPr wrap="square" anchor="ctr"/>
+          <a:lstStyle/>
+          <a:p>
+            <a:pPr algn="ctr" eaLnBrk="0">
+              <a:lnSpc>
+                <a:spcPct val="110000"/>
+              </a:lnSpc>
+            </a:pPr>
+            <a:r>
+              <a:rPr sz="1300" b="1">
+                <a:solidFill>
+                  <a:srgbClr val="FFFFFF"/>
+                </a:solidFill>
+                <a:latin typeface="맑은 고딕"/>
+                <a:ea typeface="맑은 고딕"/>
+                <a:cs typeface="맑은 고딕"/>
+              </a:rPr>
+              <a:t>1</a:t>
+            </a:r>
+          </a:p>
+        </p:txBody>
+      </p:sp>
+      <p:sp>
+        <p:nvSpPr>
+          <p:cNvPr id="11" name="TextBox 10"/>
+          <p:cNvSpPr txBox="1"/>
+          <p:nvPr/>
+        </p:nvSpPr>
+        <p:spPr>
+          <a:xfrm>
+            <a:off x="1234440" y="2514600"/>
+            <a:ext cx="10225735" cy="914400"/>
+          </a:xfrm>
+          <a:prstGeom prst="rect">
+            <a:avLst/>
+          </a:prstGeom>
+          <a:noFill/>
+        </p:spPr>
+        <p:txBody>
+          <a:bodyPr wrap="square" anchor="ctr"/>
+          <a:lstStyle/>
+          <a:p>
+            <a:pPr algn="l" eaLnBrk="0">
+              <a:lnSpc>
+                <a:spcPct val="110000"/>
+              </a:lnSpc>
+            </a:pPr>
+            <a:r>
+              <a:rPr sz="1550" b="1">
+                <a:solidFill>
+                  <a:srgbClr val="1F2A3A"/>
+                </a:solidFill>
+                <a:latin typeface="맑은 고딕"/>
+                <a:ea typeface="맑은 고딕"/>
+                <a:cs typeface="맑은 고딕"/>
+              </a:rPr>
+              <a:t>담당자가 승인할 뜻을 밝혔으므로 승인 단계를 건너뛰고 실행한다</a:t>
+            </a:r>
+          </a:p>
+        </p:txBody>
+      </p:sp>
+      <p:sp>
+        <p:nvSpPr>
+          <p:cNvPr id="12" name="Rounded Rectangle 11"/>
+          <p:cNvSpPr/>
+          <p:nvPr/>
+        </p:nvSpPr>
+        <p:spPr>
+          <a:xfrm>
+            <a:off x="548640" y="3474720"/>
+            <a:ext cx="11094415" cy="822960"/>
+          </a:xfrm>
+          <a:prstGeom prst="roundRect">
+            <a:avLst>
+              <a:gd name="adj" fmla="val 8000"/>
+            </a:avLst>
+          </a:prstGeom>
+          <a:solidFill>
+            <a:srgbClr val="F3F6F9"/>
+          </a:solidFill>
+          <a:ln>
+            <a:noFill/>
+          </a:ln>
+        </p:spPr>
+        <p:txBody>
+          <a:bodyPr rtlCol="0" anchor="ctr"/>
+          <a:lstStyle/>
+          <a:p>
+            <a:pPr algn="ctr"/>
+          </a:p>
+        </p:txBody>
+      </p:sp>
+      <p:sp>
+        <p:nvSpPr>
+          <p:cNvPr id="13" name="Oval 12"/>
+          <p:cNvSpPr/>
+          <p:nvPr/>
+        </p:nvSpPr>
+        <p:spPr>
+          <a:xfrm>
+            <a:off x="731520" y="3703320"/>
+            <a:ext cx="365760" cy="365760"/>
+          </a:xfrm>
+          <a:prstGeom prst="ellipse">
+            <a:avLst/>
+          </a:prstGeom>
+          <a:solidFill>
+            <a:srgbClr val="13294B"/>
+          </a:solidFill>
+          <a:ln>
+            <a:noFill/>
+          </a:ln>
+        </p:spPr>
+        <p:txBody>
+          <a:bodyPr rtlCol="0" anchor="ctr"/>
+          <a:lstStyle/>
+          <a:p>
+            <a:pPr algn="ctr"/>
+          </a:p>
+        </p:txBody>
+      </p:sp>
+      <p:sp>
+        <p:nvSpPr>
+          <p:cNvPr id="14" name="TextBox 13"/>
+          <p:cNvSpPr txBox="1"/>
+          <p:nvPr/>
+        </p:nvSpPr>
+        <p:spPr>
+          <a:xfrm>
+            <a:off x="731520" y="3703320"/>
+            <a:ext cx="365760" cy="365760"/>
+          </a:xfrm>
+          <a:prstGeom prst="rect">
+            <a:avLst/>
+          </a:prstGeom>
+          <a:noFill/>
+        </p:spPr>
+        <p:txBody>
+          <a:bodyPr wrap="square" anchor="ctr"/>
+          <a:lstStyle/>
+          <a:p>
+            <a:pPr algn="ctr" eaLnBrk="0">
+              <a:lnSpc>
+                <a:spcPct val="110000"/>
+              </a:lnSpc>
+            </a:pPr>
+            <a:r>
+              <a:rPr sz="1300" b="1">
+                <a:solidFill>
+                  <a:srgbClr val="FFFFFF"/>
+                </a:solidFill>
+                <a:latin typeface="맑은 고딕"/>
+                <a:ea typeface="맑은 고딕"/>
+                <a:cs typeface="맑은 고딕"/>
+              </a:rPr>
+              <a:t>2</a:t>
+            </a:r>
+          </a:p>
+        </p:txBody>
+      </p:sp>
+      <p:sp>
+        <p:nvSpPr>
+          <p:cNvPr id="15" name="TextBox 14"/>
+          <p:cNvSpPr txBox="1"/>
+          <p:nvPr/>
+        </p:nvSpPr>
+        <p:spPr>
+          <a:xfrm>
+            <a:off x="1234440" y="3429000"/>
+            <a:ext cx="10225735" cy="914400"/>
+          </a:xfrm>
+          <a:prstGeom prst="rect">
+            <a:avLst/>
+          </a:prstGeom>
+          <a:noFill/>
+        </p:spPr>
+        <p:txBody>
+          <a:bodyPr wrap="square" anchor="ctr"/>
+          <a:lstStyle/>
+          <a:p>
+            <a:pPr algn="l" eaLnBrk="0">
+              <a:lnSpc>
+                <a:spcPct val="110000"/>
+              </a:lnSpc>
+            </a:pPr>
+            <a:r>
+              <a:rPr sz="1550" b="1">
+                <a:solidFill>
+                  <a:srgbClr val="1F2A3A"/>
+                </a:solidFill>
+                <a:latin typeface="맑은 고딕"/>
+                <a:ea typeface="맑은 고딕"/>
+                <a:cs typeface="맑은 고딕"/>
+              </a:rPr>
+              <a:t>답에 승인이 섞였으므로 답을 버리고 수량을 짐작해 채운다</a:t>
+            </a:r>
+          </a:p>
+        </p:txBody>
+      </p:sp>
+      <p:sp>
+        <p:nvSpPr>
+          <p:cNvPr id="16" name="Rounded Rectangle 15"/>
+          <p:cNvSpPr/>
+          <p:nvPr/>
+        </p:nvSpPr>
+        <p:spPr>
+          <a:xfrm>
+            <a:off x="548640" y="4389120"/>
+            <a:ext cx="11094415" cy="822960"/>
+          </a:xfrm>
+          <a:prstGeom prst="roundRect">
+            <a:avLst>
+              <a:gd name="adj" fmla="val 8000"/>
+            </a:avLst>
+          </a:prstGeom>
+          <a:solidFill>
+            <a:srgbClr val="F3F6F9"/>
+          </a:solidFill>
+          <a:ln>
+            <a:noFill/>
+          </a:ln>
+        </p:spPr>
+        <p:txBody>
+          <a:bodyPr rtlCol="0" anchor="ctr"/>
+          <a:lstStyle/>
+          <a:p>
+            <a:pPr algn="ctr"/>
+          </a:p>
+        </p:txBody>
+      </p:sp>
+      <p:sp>
+        <p:nvSpPr>
+          <p:cNvPr id="17" name="Oval 16"/>
+          <p:cNvSpPr/>
+          <p:nvPr/>
+        </p:nvSpPr>
+        <p:spPr>
+          <a:xfrm>
+            <a:off x="731520" y="4617720"/>
+            <a:ext cx="365760" cy="365760"/>
+          </a:xfrm>
+          <a:prstGeom prst="ellipse">
+            <a:avLst/>
+          </a:prstGeom>
+          <a:solidFill>
+            <a:srgbClr val="13294B"/>
+          </a:solidFill>
+          <a:ln>
+            <a:noFill/>
+          </a:ln>
+        </p:spPr>
+        <p:txBody>
+          <a:bodyPr rtlCol="0" anchor="ctr"/>
+          <a:lstStyle/>
+          <a:p>
+            <a:pPr algn="ctr"/>
+          </a:p>
+        </p:txBody>
+      </p:sp>
+      <p:sp>
+        <p:nvSpPr>
+          <p:cNvPr id="18" name="TextBox 17"/>
+          <p:cNvSpPr txBox="1"/>
+          <p:nvPr/>
+        </p:nvSpPr>
+        <p:spPr>
+          <a:xfrm>
+            <a:off x="731520" y="4617720"/>
+            <a:ext cx="365760" cy="365760"/>
+          </a:xfrm>
+          <a:prstGeom prst="rect">
+            <a:avLst/>
+          </a:prstGeom>
+          <a:noFill/>
+        </p:spPr>
+        <p:txBody>
+          <a:bodyPr wrap="square" anchor="ctr"/>
+          <a:lstStyle/>
+          <a:p>
+            <a:pPr algn="ctr" eaLnBrk="0">
+              <a:lnSpc>
+                <a:spcPct val="110000"/>
+              </a:lnSpc>
+            </a:pPr>
+            <a:r>
+              <a:rPr sz="1300" b="1">
+                <a:solidFill>
+                  <a:srgbClr val="FFFFFF"/>
+                </a:solidFill>
+                <a:latin typeface="맑은 고딕"/>
+                <a:ea typeface="맑은 고딕"/>
+                <a:cs typeface="맑은 고딕"/>
+              </a:rPr>
+              <a:t>3</a:t>
+            </a:r>
+          </a:p>
+        </p:txBody>
+      </p:sp>
+      <p:sp>
+        <p:nvSpPr>
+          <p:cNvPr id="19" name="TextBox 18"/>
+          <p:cNvSpPr txBox="1"/>
+          <p:nvPr/>
+        </p:nvSpPr>
+        <p:spPr>
+          <a:xfrm>
+            <a:off x="1234440" y="4343400"/>
+            <a:ext cx="10225735" cy="914400"/>
+          </a:xfrm>
+          <a:prstGeom prst="rect">
+            <a:avLst/>
+          </a:prstGeom>
+          <a:noFill/>
+        </p:spPr>
+        <p:txBody>
+          <a:bodyPr wrap="square" anchor="ctr"/>
+          <a:lstStyle/>
+          <a:p>
+            <a:pPr algn="l" eaLnBrk="0">
+              <a:lnSpc>
+                <a:spcPct val="110000"/>
+              </a:lnSpc>
+            </a:pPr>
+            <a:r>
+              <a:rPr sz="1550" b="1">
+                <a:solidFill>
+                  <a:srgbClr val="1F2A3A"/>
+                </a:solidFill>
+                <a:latin typeface="맑은 고딕"/>
+                <a:ea typeface="맑은 고딕"/>
+                <a:cs typeface="맑은 고딕"/>
+              </a:rPr>
+              <a:t>결정 기록의 승인한 사람 칸에 담당자를 에이전트가 적어 넣는다</a:t>
+            </a:r>
+          </a:p>
+        </p:txBody>
+      </p:sp>
+      <p:sp>
+        <p:nvSpPr>
+          <p:cNvPr id="20" name="Rounded Rectangle 19"/>
+          <p:cNvSpPr/>
+          <p:nvPr/>
+        </p:nvSpPr>
+        <p:spPr>
+          <a:xfrm>
+            <a:off x="548640" y="5303520"/>
+            <a:ext cx="11094415" cy="822960"/>
+          </a:xfrm>
+          <a:prstGeom prst="roundRect">
+            <a:avLst>
+              <a:gd name="adj" fmla="val 8000"/>
+            </a:avLst>
+          </a:prstGeom>
+          <a:solidFill>
+            <a:srgbClr val="F3F6F9"/>
+          </a:solidFill>
+          <a:ln>
+            <a:noFill/>
+          </a:ln>
+        </p:spPr>
+        <p:txBody>
+          <a:bodyPr rtlCol="0" anchor="ctr"/>
+          <a:lstStyle/>
+          <a:p>
+            <a:pPr algn="ctr"/>
+          </a:p>
+        </p:txBody>
+      </p:sp>
+      <p:sp>
+        <p:nvSpPr>
+          <p:cNvPr id="21" name="Oval 20"/>
+          <p:cNvSpPr/>
+          <p:nvPr/>
+        </p:nvSpPr>
+        <p:spPr>
+          <a:xfrm>
+            <a:off x="731520" y="5532120"/>
+            <a:ext cx="365760" cy="365760"/>
+          </a:xfrm>
+          <a:prstGeom prst="ellipse">
+            <a:avLst/>
+          </a:prstGeom>
+          <a:solidFill>
+            <a:srgbClr val="13294B"/>
+          </a:solidFill>
+          <a:ln>
+            <a:noFill/>
+          </a:ln>
+        </p:spPr>
+        <p:txBody>
+          <a:bodyPr rtlCol="0" anchor="ctr"/>
+          <a:lstStyle/>
+          <a:p>
+            <a:pPr algn="ctr"/>
+          </a:p>
+        </p:txBody>
+      </p:sp>
+      <p:sp>
+        <p:nvSpPr>
+          <p:cNvPr id="22" name="TextBox 21"/>
+          <p:cNvSpPr txBox="1"/>
+          <p:nvPr/>
+        </p:nvSpPr>
+        <p:spPr>
+          <a:xfrm>
+            <a:off x="731520" y="5532120"/>
+            <a:ext cx="365760" cy="365760"/>
+          </a:xfrm>
+          <a:prstGeom prst="rect">
+            <a:avLst/>
+          </a:prstGeom>
+          <a:noFill/>
+        </p:spPr>
+        <p:txBody>
+          <a:bodyPr wrap="square" anchor="ctr"/>
+          <a:lstStyle/>
+          <a:p>
+            <a:pPr algn="ctr" eaLnBrk="0">
+              <a:lnSpc>
+                <a:spcPct val="110000"/>
+              </a:lnSpc>
+            </a:pPr>
+            <a:r>
+              <a:rPr sz="1300" b="1">
+                <a:solidFill>
+                  <a:srgbClr val="FFFFFF"/>
+                </a:solidFill>
+                <a:latin typeface="맑은 고딕"/>
+                <a:ea typeface="맑은 고딕"/>
+                <a:cs typeface="맑은 고딕"/>
+              </a:rPr>
+              <a:t>4</a:t>
+            </a:r>
+          </a:p>
+        </p:txBody>
+      </p:sp>
+      <p:sp>
+        <p:nvSpPr>
+          <p:cNvPr id="23" name="TextBox 22"/>
+          <p:cNvSpPr txBox="1"/>
+          <p:nvPr/>
+        </p:nvSpPr>
+        <p:spPr>
+          <a:xfrm>
+            <a:off x="1234440" y="5257800"/>
+            <a:ext cx="10225735" cy="914400"/>
+          </a:xfrm>
+          <a:prstGeom prst="rect">
+            <a:avLst/>
+          </a:prstGeom>
+          <a:noFill/>
+        </p:spPr>
+        <p:txBody>
+          <a:bodyPr wrap="square" anchor="ctr"/>
+          <a:lstStyle/>
+          <a:p>
+            <a:pPr algn="l" eaLnBrk="0">
+              <a:lnSpc>
+                <a:spcPct val="110000"/>
+              </a:lnSpc>
+            </a:pPr>
+            <a:r>
+              <a:rPr sz="1550" b="1">
+                <a:solidFill>
+                  <a:srgbClr val="1F2A3A"/>
+                </a:solidFill>
+                <a:latin typeface="맑은 고딕"/>
+                <a:ea typeface="맑은 고딕"/>
+                <a:cs typeface="맑은 고딕"/>
+              </a:rPr>
+              <a:t>수량만 업무 정보로 받아 이어 가고, 승인은 승인 단계에서 받는다</a:t>
+            </a:r>
+          </a:p>
+        </p:txBody>
+      </p:sp>
+    </p:spTree>
+  </p:cSld>
+  <p:clrMapOvr>
+    <a:masterClrMapping/>
+  </p:clrMapOvr>
+</p:sld>
+</file>
+
+<file path=ppt/slides/slide35.xml><?xml version="1.0" encoding="utf-8"?>
+<p:sld xmlns:a="http://schemas.openxmlformats.org/drawingml/2006/main" xmlns:p="http://schemas.openxmlformats.org/presentationml/2006/main" xmlns:r="http://schemas.openxmlformats.org/officeDocument/2006/relationships">
+  <p:cSld>
+    <p:bg>
+      <p:bgPr>
+        <a:solidFill>
+          <a:srgbClr val="FFFFFF"/>
+        </a:solidFill>
+        <a:effectLst/>
+      </p:bgPr>
+    </p:bg>
+    <p:spTree>
+      <p:nvGrpSpPr>
+        <p:cNvPr id="1" name=""/>
+        <p:cNvGrpSpPr/>
+        <p:nvPr/>
+      </p:nvGrpSpPr>
+      <p:grpSpPr/>
+      <p:sp>
+        <p:nvSpPr>
+          <p:cNvPr id="2" name="TextBox 1"/>
+          <p:cNvSpPr txBox="1"/>
+          <p:nvPr/>
+        </p:nvSpPr>
+        <p:spPr>
+          <a:xfrm>
+            <a:off x="457200" y="329184"/>
+            <a:ext cx="11277295" cy="603504"/>
+          </a:xfrm>
+          <a:prstGeom prst="rect">
+            <a:avLst/>
+          </a:prstGeom>
+          <a:noFill/>
+        </p:spPr>
+        <p:txBody>
+          <a:bodyPr wrap="square" anchor="ctr"/>
+          <a:lstStyle/>
+          <a:p>
+            <a:pPr algn="l" eaLnBrk="0">
+              <a:lnSpc>
+                <a:spcPct val="110000"/>
+              </a:lnSpc>
+            </a:pPr>
+            <a:r>
+              <a:rPr sz="2800" b="1">
+                <a:solidFill>
+                  <a:srgbClr val="13294B"/>
+                </a:solidFill>
+                <a:latin typeface="맑은 고딕"/>
+                <a:ea typeface="맑은 고딕"/>
+                <a:cs typeface="맑은 고딕"/>
+              </a:rPr>
+              <a:t>Quiz 3. 수용 기준이 되는 문장</a:t>
+            </a:r>
+          </a:p>
+        </p:txBody>
+      </p:sp>
+      <p:sp>
+        <p:nvSpPr>
+          <p:cNvPr id="3" name="TextBox 2"/>
+          <p:cNvSpPr txBox="1"/>
+          <p:nvPr/>
+        </p:nvSpPr>
+        <p:spPr>
+          <a:xfrm>
+            <a:off x="457200" y="932688"/>
+            <a:ext cx="11277295" cy="420624"/>
+          </a:xfrm>
+          <a:prstGeom prst="rect">
+            <a:avLst/>
+          </a:prstGeom>
+          <a:noFill/>
+        </p:spPr>
+        <p:txBody>
+          <a:bodyPr wrap="square" anchor="ctr"/>
+          <a:lstStyle/>
+          <a:p>
+            <a:pPr algn="l" eaLnBrk="0">
+              <a:lnSpc>
+                <a:spcPct val="110000"/>
+              </a:lnSpc>
+            </a:pPr>
+            <a:r>
+              <a:rPr sz="1600" b="0">
+                <a:solidFill>
+                  <a:srgbClr val="556175"/>
+                </a:solidFill>
+                <a:latin typeface="맑은 고딕"/>
+                <a:ea typeface="맑은 고딕"/>
+                <a:cs typeface="맑은 고딕"/>
+              </a:rPr>
+              <a:t>「긴급한 경보는 빨리 처리되게 해 주세요」라는 요청을 명세로 옮기면서 수용 기준을 적으려 한다.</a:t>
+            </a:r>
+          </a:p>
+        </p:txBody>
+      </p:sp>
+      <p:sp>
+        <p:nvSpPr>
+          <p:cNvPr id="4" name="Rectangle 3"/>
+          <p:cNvSpPr/>
+          <p:nvPr/>
+        </p:nvSpPr>
+        <p:spPr>
+          <a:xfrm>
+            <a:off x="548640" y="1408176"/>
+            <a:ext cx="11094415" cy="18288"/>
+          </a:xfrm>
+          <a:prstGeom prst="rect">
+            <a:avLst/>
+          </a:prstGeom>
+          <a:solidFill>
+            <a:srgbClr val="D3D9E1"/>
+          </a:solidFill>
+          <a:ln>
+            <a:noFill/>
+          </a:ln>
+        </p:spPr>
+        <p:txBody>
+          <a:bodyPr rtlCol="0" anchor="ctr"/>
+          <a:lstStyle/>
+          <a:p>
+            <a:pPr algn="ctr"/>
+          </a:p>
+        </p:txBody>
+      </p:sp>
+      <p:sp>
+        <p:nvSpPr>
+          <p:cNvPr id="5" name="TextBox 4"/>
+          <p:cNvSpPr txBox="1"/>
+          <p:nvPr/>
+        </p:nvSpPr>
+        <p:spPr>
+          <a:xfrm>
+            <a:off x="10911535" y="6473952"/>
+            <a:ext cx="822960" cy="274320"/>
+          </a:xfrm>
+          <a:prstGeom prst="rect">
+            <a:avLst/>
+          </a:prstGeom>
+          <a:noFill/>
+        </p:spPr>
+        <p:txBody>
+          <a:bodyPr wrap="square" anchor="t"/>
+          <a:lstStyle/>
+          <a:p>
+            <a:pPr algn="r" eaLnBrk="0">
+              <a:lnSpc>
+                <a:spcPct val="110000"/>
+              </a:lnSpc>
+            </a:pPr>
+            <a:r>
+              <a:rPr sz="1000" b="0">
+                <a:solidFill>
+                  <a:srgbClr val="556175"/>
+                </a:solidFill>
+                <a:latin typeface="맑은 고딕"/>
+                <a:ea typeface="맑은 고딕"/>
+                <a:cs typeface="맑은 고딕"/>
+              </a:rPr>
+              <a:t>35</a:t>
+            </a:r>
+          </a:p>
+        </p:txBody>
+      </p:sp>
+      <p:sp>
+        <p:nvSpPr>
+          <p:cNvPr id="6" name="Rounded Rectangle 5"/>
+          <p:cNvSpPr/>
+          <p:nvPr/>
+        </p:nvSpPr>
+        <p:spPr>
+          <a:xfrm>
+            <a:off x="548640" y="1627632"/>
+            <a:ext cx="11094415" cy="704088"/>
+          </a:xfrm>
+          <a:prstGeom prst="roundRect">
+            <a:avLst>
+              <a:gd name="adj" fmla="val 5000"/>
+            </a:avLst>
+          </a:prstGeom>
+          <a:solidFill>
+            <a:srgbClr val="E7F3FD"/>
+          </a:solidFill>
+          <a:ln>
+            <a:noFill/>
+          </a:ln>
+        </p:spPr>
+        <p:txBody>
+          <a:bodyPr rtlCol="0" anchor="ctr"/>
+          <a:lstStyle/>
+          <a:p>
+            <a:pPr algn="ctr"/>
+          </a:p>
+        </p:txBody>
+      </p:sp>
+      <p:sp>
+        <p:nvSpPr>
+          <p:cNvPr id="7" name="TextBox 6"/>
+          <p:cNvSpPr txBox="1"/>
+          <p:nvPr/>
+        </p:nvSpPr>
+        <p:spPr>
+          <a:xfrm>
+            <a:off x="777240" y="1627632"/>
+            <a:ext cx="10637215" cy="704088"/>
+          </a:xfrm>
+          <a:prstGeom prst="rect">
+            <a:avLst/>
+          </a:prstGeom>
+          <a:noFill/>
+        </p:spPr>
+        <p:txBody>
+          <a:bodyPr wrap="square" anchor="ctr"/>
+          <a:lstStyle/>
+          <a:p>
+            <a:pPr algn="l" eaLnBrk="0">
+              <a:lnSpc>
+                <a:spcPct val="110000"/>
+              </a:lnSpc>
+            </a:pPr>
+            <a:r>
+              <a:rPr sz="1900" b="1">
+                <a:solidFill>
+                  <a:srgbClr val="13294B"/>
+                </a:solidFill>
+                <a:latin typeface="맑은 고딕"/>
+                <a:ea typeface="맑은 고딕"/>
+                <a:cs typeface="맑은 고딕"/>
+              </a:rPr>
+              <a:t>수용 기준으로 알맞은 문장은?</a:t>
+            </a:r>
+          </a:p>
+        </p:txBody>
+      </p:sp>
+      <p:sp>
+        <p:nvSpPr>
+          <p:cNvPr id="8" name="Rounded Rectangle 7"/>
+          <p:cNvSpPr/>
+          <p:nvPr/>
+        </p:nvSpPr>
+        <p:spPr>
+          <a:xfrm>
+            <a:off x="548640" y="2560320"/>
+            <a:ext cx="11094415" cy="822960"/>
+          </a:xfrm>
+          <a:prstGeom prst="roundRect">
+            <a:avLst>
+              <a:gd name="adj" fmla="val 8000"/>
+            </a:avLst>
+          </a:prstGeom>
+          <a:solidFill>
+            <a:srgbClr val="F3F6F9"/>
+          </a:solidFill>
+          <a:ln>
+            <a:noFill/>
+          </a:ln>
+        </p:spPr>
+        <p:txBody>
+          <a:bodyPr rtlCol="0" anchor="ctr"/>
+          <a:lstStyle/>
+          <a:p>
+            <a:pPr algn="ctr"/>
+          </a:p>
+        </p:txBody>
+      </p:sp>
+      <p:sp>
+        <p:nvSpPr>
+          <p:cNvPr id="9" name="Oval 8"/>
+          <p:cNvSpPr/>
+          <p:nvPr/>
+        </p:nvSpPr>
+        <p:spPr>
+          <a:xfrm>
+            <a:off x="731520" y="2788920"/>
+            <a:ext cx="365760" cy="365760"/>
+          </a:xfrm>
+          <a:prstGeom prst="ellipse">
+            <a:avLst/>
+          </a:prstGeom>
+          <a:solidFill>
+            <a:srgbClr val="13294B"/>
+          </a:solidFill>
+          <a:ln>
+            <a:noFill/>
+          </a:ln>
+        </p:spPr>
+        <p:txBody>
+          <a:bodyPr rtlCol="0" anchor="ctr"/>
+          <a:lstStyle/>
+          <a:p>
+            <a:pPr algn="ctr"/>
+          </a:p>
+        </p:txBody>
+      </p:sp>
+      <p:sp>
+        <p:nvSpPr>
+          <p:cNvPr id="10" name="TextBox 9"/>
+          <p:cNvSpPr txBox="1"/>
+          <p:nvPr/>
+        </p:nvSpPr>
+        <p:spPr>
+          <a:xfrm>
+            <a:off x="731520" y="2788920"/>
+            <a:ext cx="365760" cy="365760"/>
+          </a:xfrm>
+          <a:prstGeom prst="rect">
+            <a:avLst/>
+          </a:prstGeom>
+          <a:noFill/>
+        </p:spPr>
+        <p:txBody>
+          <a:bodyPr wrap="square" anchor="ctr"/>
+          <a:lstStyle/>
+          <a:p>
+            <a:pPr algn="ctr" eaLnBrk="0">
+              <a:lnSpc>
+                <a:spcPct val="110000"/>
+              </a:lnSpc>
+            </a:pPr>
+            <a:r>
+              <a:rPr sz="1300" b="1">
+                <a:solidFill>
+                  <a:srgbClr val="FFFFFF"/>
+                </a:solidFill>
+                <a:latin typeface="맑은 고딕"/>
+                <a:ea typeface="맑은 고딕"/>
+                <a:cs typeface="맑은 고딕"/>
+              </a:rPr>
+              <a:t>1</a:t>
+            </a:r>
+          </a:p>
+        </p:txBody>
+      </p:sp>
+      <p:sp>
+        <p:nvSpPr>
+          <p:cNvPr id="11" name="TextBox 10"/>
+          <p:cNvSpPr txBox="1"/>
+          <p:nvPr/>
+        </p:nvSpPr>
+        <p:spPr>
+          <a:xfrm>
+            <a:off x="1234440" y="2514600"/>
+            <a:ext cx="10225735" cy="914400"/>
+          </a:xfrm>
+          <a:prstGeom prst="rect">
+            <a:avLst/>
+          </a:prstGeom>
+          <a:noFill/>
+        </p:spPr>
+        <p:txBody>
+          <a:bodyPr wrap="square" anchor="ctr"/>
+          <a:lstStyle/>
+          <a:p>
+            <a:pPr algn="l" eaLnBrk="0">
+              <a:lnSpc>
+                <a:spcPct val="110000"/>
+              </a:lnSpc>
+            </a:pPr>
+            <a:r>
+              <a:rPr sz="1550" b="1">
+                <a:solidFill>
+                  <a:srgbClr val="1F2A3A"/>
+                </a:solidFill>
+                <a:latin typeface="맑은 고딕"/>
+                <a:ea typeface="맑은 고딕"/>
+                <a:cs typeface="맑은 고딕"/>
+              </a:rPr>
+              <a:t>긴급한 경보는 일반 경보보다 눈에 띄게 빨리 처리된다</a:t>
+            </a:r>
+          </a:p>
+        </p:txBody>
+      </p:sp>
+      <p:sp>
+        <p:nvSpPr>
+          <p:cNvPr id="12" name="Rounded Rectangle 11"/>
+          <p:cNvSpPr/>
+          <p:nvPr/>
+        </p:nvSpPr>
+        <p:spPr>
+          <a:xfrm>
+            <a:off x="548640" y="3474720"/>
+            <a:ext cx="11094415" cy="822960"/>
+          </a:xfrm>
+          <a:prstGeom prst="roundRect">
+            <a:avLst>
+              <a:gd name="adj" fmla="val 8000"/>
+            </a:avLst>
+          </a:prstGeom>
+          <a:solidFill>
+            <a:srgbClr val="F3F6F9"/>
+          </a:solidFill>
+          <a:ln>
+            <a:noFill/>
+          </a:ln>
+        </p:spPr>
+        <p:txBody>
+          <a:bodyPr rtlCol="0" anchor="ctr"/>
+          <a:lstStyle/>
+          <a:p>
+            <a:pPr algn="ctr"/>
+          </a:p>
+        </p:txBody>
+      </p:sp>
+      <p:sp>
+        <p:nvSpPr>
+          <p:cNvPr id="13" name="Oval 12"/>
+          <p:cNvSpPr/>
+          <p:nvPr/>
+        </p:nvSpPr>
+        <p:spPr>
+          <a:xfrm>
+            <a:off x="731520" y="3703320"/>
+            <a:ext cx="365760" cy="365760"/>
+          </a:xfrm>
+          <a:prstGeom prst="ellipse">
+            <a:avLst/>
+          </a:prstGeom>
+          <a:solidFill>
+            <a:srgbClr val="13294B"/>
+          </a:solidFill>
+          <a:ln>
+            <a:noFill/>
+          </a:ln>
+        </p:spPr>
+        <p:txBody>
+          <a:bodyPr rtlCol="0" anchor="ctr"/>
+          <a:lstStyle/>
+          <a:p>
+            <a:pPr algn="ctr"/>
+          </a:p>
+        </p:txBody>
+      </p:sp>
+      <p:sp>
+        <p:nvSpPr>
+          <p:cNvPr id="14" name="TextBox 13"/>
+          <p:cNvSpPr txBox="1"/>
+          <p:nvPr/>
+        </p:nvSpPr>
+        <p:spPr>
+          <a:xfrm>
+            <a:off x="731520" y="3703320"/>
+            <a:ext cx="365760" cy="365760"/>
+          </a:xfrm>
+          <a:prstGeom prst="rect">
+            <a:avLst/>
+          </a:prstGeom>
+          <a:noFill/>
+        </p:spPr>
+        <p:txBody>
+          <a:bodyPr wrap="square" anchor="ctr"/>
+          <a:lstStyle/>
+          <a:p>
+            <a:pPr algn="ctr" eaLnBrk="0">
+              <a:lnSpc>
+                <a:spcPct val="110000"/>
+              </a:lnSpc>
+            </a:pPr>
+            <a:r>
+              <a:rPr sz="1300" b="1">
+                <a:solidFill>
+                  <a:srgbClr val="FFFFFF"/>
+                </a:solidFill>
+                <a:latin typeface="맑은 고딕"/>
+                <a:ea typeface="맑은 고딕"/>
+                <a:cs typeface="맑은 고딕"/>
+              </a:rPr>
+              <a:t>2</a:t>
+            </a:r>
+          </a:p>
+        </p:txBody>
+      </p:sp>
+      <p:sp>
+        <p:nvSpPr>
+          <p:cNvPr id="15" name="TextBox 14"/>
+          <p:cNvSpPr txBox="1"/>
+          <p:nvPr/>
+        </p:nvSpPr>
+        <p:spPr>
+          <a:xfrm>
+            <a:off x="1234440" y="3429000"/>
+            <a:ext cx="10225735" cy="914400"/>
+          </a:xfrm>
+          <a:prstGeom prst="rect">
+            <a:avLst/>
+          </a:prstGeom>
+          <a:noFill/>
+        </p:spPr>
+        <p:txBody>
+          <a:bodyPr wrap="square" anchor="ctr"/>
+          <a:lstStyle/>
+          <a:p>
+            <a:pPr algn="l" eaLnBrk="0">
+              <a:lnSpc>
+                <a:spcPct val="110000"/>
+              </a:lnSpc>
+            </a:pPr>
+            <a:r>
+              <a:rPr sz="1550" b="1">
+                <a:solidFill>
+                  <a:srgbClr val="1F2A3A"/>
+                </a:solidFill>
+                <a:latin typeface="맑은 고딕"/>
+                <a:ea typeface="맑은 고딕"/>
+                <a:cs typeface="맑은 고딕"/>
+              </a:rPr>
+              <a:t>긴급한 경보의 추천안은 상황에 맞는 조치를 담고 있다</a:t>
+            </a:r>
+          </a:p>
+        </p:txBody>
+      </p:sp>
+      <p:sp>
+        <p:nvSpPr>
+          <p:cNvPr id="16" name="Rounded Rectangle 15"/>
+          <p:cNvSpPr/>
+          <p:nvPr/>
+        </p:nvSpPr>
+        <p:spPr>
+          <a:xfrm>
+            <a:off x="548640" y="4389120"/>
+            <a:ext cx="11094415" cy="822960"/>
+          </a:xfrm>
+          <a:prstGeom prst="roundRect">
+            <a:avLst>
+              <a:gd name="adj" fmla="val 8000"/>
+            </a:avLst>
+          </a:prstGeom>
+          <a:solidFill>
+            <a:srgbClr val="F3F6F9"/>
+          </a:solidFill>
+          <a:ln>
+            <a:noFill/>
+          </a:ln>
+        </p:spPr>
+        <p:txBody>
+          <a:bodyPr rtlCol="0" anchor="ctr"/>
+          <a:lstStyle/>
+          <a:p>
+            <a:pPr algn="ctr"/>
+          </a:p>
+        </p:txBody>
+      </p:sp>
+      <p:sp>
+        <p:nvSpPr>
+          <p:cNvPr id="17" name="Oval 16"/>
+          <p:cNvSpPr/>
+          <p:nvPr/>
+        </p:nvSpPr>
+        <p:spPr>
+          <a:xfrm>
+            <a:off x="731520" y="4617720"/>
+            <a:ext cx="365760" cy="365760"/>
+          </a:xfrm>
+          <a:prstGeom prst="ellipse">
+            <a:avLst/>
+          </a:prstGeom>
+          <a:solidFill>
+            <a:srgbClr val="13294B"/>
+          </a:solidFill>
+          <a:ln>
+            <a:noFill/>
+          </a:ln>
+        </p:spPr>
+        <p:txBody>
+          <a:bodyPr rtlCol="0" anchor="ctr"/>
+          <a:lstStyle/>
+          <a:p>
+            <a:pPr algn="ctr"/>
+          </a:p>
+        </p:txBody>
+      </p:sp>
+      <p:sp>
+        <p:nvSpPr>
+          <p:cNvPr id="18" name="TextBox 17"/>
+          <p:cNvSpPr txBox="1"/>
+          <p:nvPr/>
+        </p:nvSpPr>
+        <p:spPr>
+          <a:xfrm>
+            <a:off x="731520" y="4617720"/>
+            <a:ext cx="365760" cy="365760"/>
+          </a:xfrm>
+          <a:prstGeom prst="rect">
+            <a:avLst/>
+          </a:prstGeom>
+          <a:noFill/>
+        </p:spPr>
+        <p:txBody>
+          <a:bodyPr wrap="square" anchor="ctr"/>
+          <a:lstStyle/>
+          <a:p>
+            <a:pPr algn="ctr" eaLnBrk="0">
+              <a:lnSpc>
+                <a:spcPct val="110000"/>
+              </a:lnSpc>
+            </a:pPr>
+            <a:r>
+              <a:rPr sz="1300" b="1">
+                <a:solidFill>
+                  <a:srgbClr val="FFFFFF"/>
+                </a:solidFill>
+                <a:latin typeface="맑은 고딕"/>
+                <a:ea typeface="맑은 고딕"/>
+                <a:cs typeface="맑은 고딕"/>
+              </a:rPr>
+              <a:t>3</a:t>
+            </a:r>
+          </a:p>
+        </p:txBody>
+      </p:sp>
+      <p:sp>
+        <p:nvSpPr>
+          <p:cNvPr id="19" name="TextBox 18"/>
+          <p:cNvSpPr txBox="1"/>
+          <p:nvPr/>
+        </p:nvSpPr>
+        <p:spPr>
+          <a:xfrm>
+            <a:off x="1234440" y="4343400"/>
+            <a:ext cx="10225735" cy="914400"/>
+          </a:xfrm>
+          <a:prstGeom prst="rect">
+            <a:avLst/>
+          </a:prstGeom>
+          <a:noFill/>
+        </p:spPr>
+        <p:txBody>
+          <a:bodyPr wrap="square" anchor="ctr"/>
+          <a:lstStyle/>
+          <a:p>
+            <a:pPr algn="l" eaLnBrk="0">
+              <a:lnSpc>
+                <a:spcPct val="110000"/>
+              </a:lnSpc>
+            </a:pPr>
+            <a:r>
+              <a:rPr sz="1550" b="1">
+                <a:solidFill>
+                  <a:srgbClr val="1F2A3A"/>
+                </a:solidFill>
+                <a:latin typeface="맑은 고딕"/>
+                <a:ea typeface="맑은 고딕"/>
+                <a:cs typeface="맑은 고딕"/>
+              </a:rPr>
+              <a:t>같은 입력 · 조회 자료에서 일반 경보의 기존 항목은 정한 기대값과 같다</a:t>
+            </a:r>
+          </a:p>
+        </p:txBody>
+      </p:sp>
+      <p:sp>
+        <p:nvSpPr>
+          <p:cNvPr id="20" name="Rounded Rectangle 19"/>
+          <p:cNvSpPr/>
+          <p:nvPr/>
+        </p:nvSpPr>
+        <p:spPr>
+          <a:xfrm>
+            <a:off x="548640" y="5303520"/>
+            <a:ext cx="11094415" cy="822960"/>
+          </a:xfrm>
+          <a:prstGeom prst="roundRect">
+            <a:avLst>
+              <a:gd name="adj" fmla="val 8000"/>
+            </a:avLst>
+          </a:prstGeom>
+          <a:solidFill>
+            <a:srgbClr val="F3F6F9"/>
+          </a:solidFill>
+          <a:ln>
+            <a:noFill/>
+          </a:ln>
+        </p:spPr>
+        <p:txBody>
+          <a:bodyPr rtlCol="0" anchor="ctr"/>
+          <a:lstStyle/>
+          <a:p>
+            <a:pPr algn="ctr"/>
+          </a:p>
+        </p:txBody>
+      </p:sp>
+      <p:sp>
+        <p:nvSpPr>
+          <p:cNvPr id="21" name="Oval 20"/>
+          <p:cNvSpPr/>
+          <p:nvPr/>
+        </p:nvSpPr>
+        <p:spPr>
+          <a:xfrm>
+            <a:off x="731520" y="5532120"/>
+            <a:ext cx="365760" cy="365760"/>
+          </a:xfrm>
+          <a:prstGeom prst="ellipse">
+            <a:avLst/>
+          </a:prstGeom>
+          <a:solidFill>
+            <a:srgbClr val="13294B"/>
+          </a:solidFill>
+          <a:ln>
+            <a:noFill/>
+          </a:ln>
+        </p:spPr>
+        <p:txBody>
+          <a:bodyPr rtlCol="0" anchor="ctr"/>
+          <a:lstStyle/>
+          <a:p>
+            <a:pPr algn="ctr"/>
+          </a:p>
+        </p:txBody>
+      </p:sp>
+      <p:sp>
+        <p:nvSpPr>
+          <p:cNvPr id="22" name="TextBox 21"/>
+          <p:cNvSpPr txBox="1"/>
+          <p:nvPr/>
+        </p:nvSpPr>
+        <p:spPr>
+          <a:xfrm>
+            <a:off x="731520" y="5532120"/>
+            <a:ext cx="365760" cy="365760"/>
+          </a:xfrm>
+          <a:prstGeom prst="rect">
+            <a:avLst/>
+          </a:prstGeom>
+          <a:noFill/>
+        </p:spPr>
+        <p:txBody>
+          <a:bodyPr wrap="square" anchor="ctr"/>
+          <a:lstStyle/>
+          <a:p>
+            <a:pPr algn="ctr" eaLnBrk="0">
+              <a:lnSpc>
+                <a:spcPct val="110000"/>
+              </a:lnSpc>
+            </a:pPr>
+            <a:r>
+              <a:rPr sz="1300" b="1">
+                <a:solidFill>
+                  <a:srgbClr val="FFFFFF"/>
+                </a:solidFill>
+                <a:latin typeface="맑은 고딕"/>
+                <a:ea typeface="맑은 고딕"/>
+                <a:cs typeface="맑은 고딕"/>
+              </a:rPr>
+              <a:t>4</a:t>
+            </a:r>
+          </a:p>
+        </p:txBody>
+      </p:sp>
+      <p:sp>
+        <p:nvSpPr>
+          <p:cNvPr id="23" name="TextBox 22"/>
+          <p:cNvSpPr txBox="1"/>
+          <p:nvPr/>
+        </p:nvSpPr>
+        <p:spPr>
+          <a:xfrm>
+            <a:off x="1234440" y="5257800"/>
+            <a:ext cx="10225735" cy="914400"/>
+          </a:xfrm>
+          <a:prstGeom prst="rect">
+            <a:avLst/>
+          </a:prstGeom>
+          <a:noFill/>
+        </p:spPr>
+        <p:txBody>
+          <a:bodyPr wrap="square" anchor="ctr"/>
+          <a:lstStyle/>
+          <a:p>
+            <a:pPr algn="l" eaLnBrk="0">
+              <a:lnSpc>
+                <a:spcPct val="110000"/>
+              </a:lnSpc>
+            </a:pPr>
+            <a:r>
+              <a:rPr sz="1550" b="1">
+                <a:solidFill>
+                  <a:srgbClr val="1F2A3A"/>
+                </a:solidFill>
+                <a:latin typeface="맑은 고딕"/>
+                <a:ea typeface="맑은 고딕"/>
+                <a:cs typeface="맑은 고딕"/>
+              </a:rPr>
+              <a:t>긴급한 경보에서는 승인 절차가 알맞게 간소화된다</a:t>
+            </a:r>
+          </a:p>
+        </p:txBody>
+      </p:sp>
+    </p:spTree>
+  </p:cSld>
+  <p:clrMapOvr>
+    <a:masterClrMapping/>
+  </p:clrMapOvr>
+</p:sld>
+</file>
+
+<file path=ppt/slides/slide36.xml><?xml version="1.0" encoding="utf-8"?>
+<p:sld xmlns:a="http://schemas.openxmlformats.org/drawingml/2006/main" xmlns:p="http://schemas.openxmlformats.org/presentationml/2006/main" xmlns:r="http://schemas.openxmlformats.org/officeDocument/2006/relationships">
+  <p:cSld>
+    <p:bg>
+      <p:bgPr>
+        <a:solidFill>
+          <a:srgbClr val="FFFFFF"/>
+        </a:solidFill>
+        <a:effectLst/>
+      </p:bgPr>
+    </p:bg>
+    <p:spTree>
+      <p:nvGrpSpPr>
+        <p:cNvPr id="1" name=""/>
+        <p:cNvGrpSpPr/>
+        <p:nvPr/>
+      </p:nvGrpSpPr>
+      <p:grpSpPr/>
+      <p:sp>
+        <p:nvSpPr>
+          <p:cNvPr id="2" name="TextBox 1"/>
+          <p:cNvSpPr txBox="1"/>
+          <p:nvPr/>
+        </p:nvSpPr>
+        <p:spPr>
+          <a:xfrm>
+            <a:off x="457200" y="329184"/>
+            <a:ext cx="11277295" cy="603504"/>
+          </a:xfrm>
+          <a:prstGeom prst="rect">
+            <a:avLst/>
+          </a:prstGeom>
+          <a:noFill/>
+        </p:spPr>
+        <p:txBody>
+          <a:bodyPr wrap="square" anchor="ctr"/>
+          <a:lstStyle/>
+          <a:p>
+            <a:pPr algn="l" eaLnBrk="0">
+              <a:lnSpc>
+                <a:spcPct val="110000"/>
+              </a:lnSpc>
+            </a:pPr>
+            <a:r>
+              <a:rPr sz="2800" b="1">
+                <a:solidFill>
+                  <a:srgbClr val="13294B"/>
+                </a:solidFill>
+                <a:latin typeface="맑은 고딕"/>
+                <a:ea typeface="맑은 고딕"/>
+                <a:cs typeface="맑은 고딕"/>
+              </a:rPr>
+              <a:t>정답과 판단 기준</a:t>
+            </a:r>
+          </a:p>
+        </p:txBody>
+      </p:sp>
+      <p:sp>
+        <p:nvSpPr>
+          <p:cNvPr id="3" name="TextBox 2"/>
+          <p:cNvSpPr txBox="1"/>
+          <p:nvPr/>
+        </p:nvSpPr>
+        <p:spPr>
+          <a:xfrm>
+            <a:off x="457200" y="932688"/>
+            <a:ext cx="11277295" cy="420624"/>
+          </a:xfrm>
+          <a:prstGeom prst="rect">
+            <a:avLst/>
+          </a:prstGeom>
+          <a:noFill/>
+        </p:spPr>
+        <p:txBody>
+          <a:bodyPr wrap="square" anchor="ctr"/>
+          <a:lstStyle/>
+          <a:p>
+            <a:pPr algn="l" eaLnBrk="0">
+              <a:lnSpc>
+                <a:spcPct val="110000"/>
+              </a:lnSpc>
+            </a:pPr>
+            <a:r>
+              <a:rPr sz="1600" b="0">
+                <a:solidFill>
+                  <a:srgbClr val="556175"/>
+                </a:solidFill>
+                <a:latin typeface="맑은 고딕"/>
+                <a:ea typeface="맑은 고딕"/>
+                <a:cs typeface="맑은 고딕"/>
+              </a:rPr>
+              <a:t>세 문항은 표현 차이와 계약 위반, 답변과 승인, 판정할 수 있는 문장과 없는 문장을 올바르게 구분하는지 확인한다.</a:t>
+            </a:r>
+          </a:p>
+        </p:txBody>
+      </p:sp>
+      <p:sp>
+        <p:nvSpPr>
+          <p:cNvPr id="4" name="Rectangle 3"/>
+          <p:cNvSpPr/>
+          <p:nvPr/>
+        </p:nvSpPr>
+        <p:spPr>
+          <a:xfrm>
+            <a:off x="548640" y="1408176"/>
+            <a:ext cx="11094415" cy="18288"/>
+          </a:xfrm>
+          <a:prstGeom prst="rect">
+            <a:avLst/>
+          </a:prstGeom>
+          <a:solidFill>
+            <a:srgbClr val="D3D9E1"/>
+          </a:solidFill>
+          <a:ln>
+            <a:noFill/>
+          </a:ln>
+        </p:spPr>
+        <p:txBody>
+          <a:bodyPr rtlCol="0" anchor="ctr"/>
+          <a:lstStyle/>
+          <a:p>
+            <a:pPr algn="ctr"/>
+          </a:p>
+        </p:txBody>
+      </p:sp>
+      <p:sp>
+        <p:nvSpPr>
+          <p:cNvPr id="5" name="TextBox 4"/>
+          <p:cNvSpPr txBox="1"/>
+          <p:nvPr/>
+        </p:nvSpPr>
+        <p:spPr>
+          <a:xfrm>
+            <a:off x="10911535" y="6473952"/>
+            <a:ext cx="822960" cy="274320"/>
+          </a:xfrm>
+          <a:prstGeom prst="rect">
+            <a:avLst/>
+          </a:prstGeom>
+          <a:noFill/>
+        </p:spPr>
+        <p:txBody>
+          <a:bodyPr wrap="square" anchor="t"/>
+          <a:lstStyle/>
+          <a:p>
+            <a:pPr algn="r" eaLnBrk="0">
+              <a:lnSpc>
+                <a:spcPct val="110000"/>
+              </a:lnSpc>
+            </a:pPr>
+            <a:r>
+              <a:rPr sz="1000" b="0">
+                <a:solidFill>
+                  <a:srgbClr val="556175"/>
+                </a:solidFill>
+                <a:latin typeface="맑은 고딕"/>
+                <a:ea typeface="맑은 고딕"/>
+                <a:cs typeface="맑은 고딕"/>
+              </a:rPr>
+              <a:t>36</a:t>
+            </a:r>
+          </a:p>
+        </p:txBody>
+      </p:sp>
+      <p:sp>
+        <p:nvSpPr>
+          <p:cNvPr id="6" name="Rounded Rectangle 5"/>
+          <p:cNvSpPr/>
+          <p:nvPr/>
+        </p:nvSpPr>
+        <p:spPr>
+          <a:xfrm>
+            <a:off x="548640" y="2418587"/>
+            <a:ext cx="11094415" cy="347472"/>
+          </a:xfrm>
+          <a:prstGeom prst="roundRect">
+            <a:avLst>
+              <a:gd name="adj" fmla="val 12000"/>
+            </a:avLst>
+          </a:prstGeom>
+          <a:solidFill>
+            <a:srgbClr val="13294B"/>
+          </a:solidFill>
+          <a:ln>
+            <a:noFill/>
+          </a:ln>
+        </p:spPr>
+        <p:txBody>
+          <a:bodyPr rtlCol="0" anchor="ctr"/>
+          <a:lstStyle/>
+          <a:p>
+            <a:pPr algn="ctr"/>
+          </a:p>
+        </p:txBody>
+      </p:sp>
+      <p:sp>
+        <p:nvSpPr>
+          <p:cNvPr id="7" name="TextBox 6"/>
+          <p:cNvSpPr txBox="1"/>
+          <p:nvPr/>
+        </p:nvSpPr>
+        <p:spPr>
+          <a:xfrm>
+            <a:off x="685800" y="2418587"/>
+            <a:ext cx="2514600" cy="347472"/>
+          </a:xfrm>
+          <a:prstGeom prst="rect">
+            <a:avLst/>
+          </a:prstGeom>
+          <a:noFill/>
+        </p:spPr>
+        <p:txBody>
+          <a:bodyPr wrap="square" anchor="ctr"/>
+          <a:lstStyle/>
+          <a:p>
+            <a:pPr algn="l" eaLnBrk="0">
+              <a:lnSpc>
+                <a:spcPct val="110000"/>
+              </a:lnSpc>
+            </a:pPr>
+            <a:r>
+              <a:rPr sz="1300" b="1">
+                <a:solidFill>
+                  <a:srgbClr val="FFFFFF"/>
+                </a:solidFill>
+                <a:latin typeface="맑은 고딕"/>
+                <a:ea typeface="맑은 고딕"/>
+                <a:cs typeface="맑은 고딕"/>
+              </a:rPr>
+              <a:t>문항</a:t>
+            </a:r>
+          </a:p>
+        </p:txBody>
+      </p:sp>
+      <p:sp>
+        <p:nvSpPr>
+          <p:cNvPr id="8" name="TextBox 7"/>
+          <p:cNvSpPr txBox="1"/>
+          <p:nvPr/>
+        </p:nvSpPr>
+        <p:spPr>
+          <a:xfrm>
+            <a:off x="3200400" y="2418587"/>
+            <a:ext cx="6248095" cy="347472"/>
+          </a:xfrm>
+          <a:prstGeom prst="rect">
+            <a:avLst/>
+          </a:prstGeom>
+          <a:noFill/>
+        </p:spPr>
+        <p:txBody>
+          <a:bodyPr wrap="square" anchor="ctr"/>
+          <a:lstStyle/>
+          <a:p>
+            <a:pPr algn="l" eaLnBrk="0">
+              <a:lnSpc>
+                <a:spcPct val="110000"/>
+              </a:lnSpc>
+            </a:pPr>
+            <a:r>
+              <a:rPr sz="1300" b="1">
+                <a:solidFill>
+                  <a:srgbClr val="FFFFFF"/>
+                </a:solidFill>
+                <a:latin typeface="맑은 고딕"/>
+                <a:ea typeface="맑은 고딕"/>
+                <a:cs typeface="맑은 고딕"/>
+              </a:rPr>
+              <a:t>판단 기준</a:t>
+            </a:r>
+          </a:p>
+        </p:txBody>
+      </p:sp>
+      <p:sp>
+        <p:nvSpPr>
+          <p:cNvPr id="9" name="TextBox 8"/>
+          <p:cNvSpPr txBox="1"/>
+          <p:nvPr/>
+        </p:nvSpPr>
+        <p:spPr>
+          <a:xfrm>
+            <a:off x="9448495" y="2418587"/>
+            <a:ext cx="2194560" cy="347472"/>
+          </a:xfrm>
+          <a:prstGeom prst="rect">
+            <a:avLst/>
+          </a:prstGeom>
+          <a:noFill/>
+        </p:spPr>
+        <p:txBody>
+          <a:bodyPr wrap="square" anchor="ctr"/>
+          <a:lstStyle/>
+          <a:p>
+            <a:pPr algn="l" eaLnBrk="0">
+              <a:lnSpc>
+                <a:spcPct val="110000"/>
+              </a:lnSpc>
+            </a:pPr>
+            <a:r>
+              <a:rPr sz="1300" b="1">
+                <a:solidFill>
+                  <a:srgbClr val="FFFFFF"/>
+                </a:solidFill>
+                <a:latin typeface="맑은 고딕"/>
+                <a:ea typeface="맑은 고딕"/>
+                <a:cs typeface="맑은 고딕"/>
+              </a:rPr>
+              <a:t>정답</a:t>
+            </a:r>
+          </a:p>
+        </p:txBody>
+      </p:sp>
+      <p:sp>
+        <p:nvSpPr>
+          <p:cNvPr id="10" name="Rounded Rectangle 9"/>
+          <p:cNvSpPr/>
+          <p:nvPr/>
+        </p:nvSpPr>
+        <p:spPr>
+          <a:xfrm>
+            <a:off x="548640" y="2852927"/>
+            <a:ext cx="11094415" cy="850392"/>
+          </a:xfrm>
+          <a:prstGeom prst="roundRect">
+            <a:avLst>
+              <a:gd name="adj" fmla="val 8000"/>
+            </a:avLst>
+          </a:prstGeom>
+          <a:solidFill>
+            <a:srgbClr val="F3F6F9"/>
+          </a:solidFill>
+          <a:ln>
+            <a:noFill/>
+          </a:ln>
+        </p:spPr>
+        <p:txBody>
+          <a:bodyPr rtlCol="0" anchor="ctr"/>
+          <a:lstStyle/>
+          <a:p>
+            <a:pPr algn="ctr"/>
+          </a:p>
+        </p:txBody>
+      </p:sp>
+      <p:sp>
+        <p:nvSpPr>
+          <p:cNvPr id="11" name="TextBox 10"/>
+          <p:cNvSpPr txBox="1"/>
+          <p:nvPr/>
+        </p:nvSpPr>
+        <p:spPr>
+          <a:xfrm>
+            <a:off x="685800" y="2820923"/>
+            <a:ext cx="2514600" cy="914400"/>
+          </a:xfrm>
+          <a:prstGeom prst="rect">
+            <a:avLst/>
+          </a:prstGeom>
+          <a:noFill/>
+        </p:spPr>
+        <p:txBody>
+          <a:bodyPr wrap="square" anchor="ctr"/>
+          <a:lstStyle/>
+          <a:p>
+            <a:pPr algn="l" eaLnBrk="0">
+              <a:lnSpc>
+                <a:spcPct val="110000"/>
+              </a:lnSpc>
+            </a:pPr>
+            <a:r>
+              <a:rPr sz="1600" b="1">
+                <a:solidFill>
+                  <a:srgbClr val="13294B"/>
+                </a:solidFill>
+                <a:latin typeface="맑은 고딕"/>
+                <a:ea typeface="맑은 고딕"/>
+                <a:cs typeface="맑은 고딕"/>
+              </a:rPr>
+              <a:t>Quiz 1</a:t>
+            </a:r>
+          </a:p>
+        </p:txBody>
+      </p:sp>
+      <p:sp>
+        <p:nvSpPr>
+          <p:cNvPr id="12" name="TextBox 11"/>
+          <p:cNvSpPr txBox="1"/>
+          <p:nvPr/>
+        </p:nvSpPr>
+        <p:spPr>
+          <a:xfrm>
+            <a:off x="3200400" y="2820923"/>
+            <a:ext cx="6156655" cy="914400"/>
+          </a:xfrm>
+          <a:prstGeom prst="rect">
+            <a:avLst/>
+          </a:prstGeom>
+          <a:noFill/>
+        </p:spPr>
+        <p:txBody>
+          <a:bodyPr wrap="square" anchor="ctr"/>
+          <a:lstStyle/>
+          <a:p>
+            <a:pPr algn="l" eaLnBrk="0">
+              <a:lnSpc>
+                <a:spcPct val="110000"/>
+              </a:lnSpc>
+            </a:pPr>
+            <a:r>
+              <a:rPr sz="1400" b="0">
+                <a:solidFill>
+                  <a:srgbClr val="1F2A3A"/>
+                </a:solidFill>
+                <a:latin typeface="맑은 고딕"/>
+                <a:ea typeface="맑은 고딕"/>
+                <a:cs typeface="맑은 고딕"/>
+              </a:rPr>
+              <a:t>의미 · 근거 · 실행 조건을 지킨 차이는 허용한다. 필수 판단 번호 누락은 계약 위반이다.</a:t>
+            </a:r>
+          </a:p>
+        </p:txBody>
+      </p:sp>
+      <p:sp>
+        <p:nvSpPr>
+          <p:cNvPr id="13" name="TextBox 12"/>
+          <p:cNvSpPr txBox="1"/>
+          <p:nvPr/>
+        </p:nvSpPr>
+        <p:spPr>
+          <a:xfrm>
+            <a:off x="9448495" y="2820923"/>
+            <a:ext cx="2103120" cy="914400"/>
+          </a:xfrm>
+          <a:prstGeom prst="rect">
+            <a:avLst/>
+          </a:prstGeom>
+          <a:noFill/>
+        </p:spPr>
+        <p:txBody>
+          <a:bodyPr wrap="square" anchor="ctr"/>
+          <a:lstStyle/>
+          <a:p>
+            <a:pPr algn="l" eaLnBrk="0">
+              <a:lnSpc>
+                <a:spcPct val="110000"/>
+              </a:lnSpc>
+            </a:pPr>
+            <a:r>
+              <a:rPr sz="1250" b="1">
+                <a:solidFill>
+                  <a:srgbClr val="556175"/>
+                </a:solidFill>
+                <a:latin typeface="맑은 고딕"/>
+                <a:ea typeface="맑은 고딕"/>
+                <a:cs typeface="맑은 고딕"/>
+              </a:rPr>
+              <a:t>1번</a:t>
+            </a:r>
+          </a:p>
+        </p:txBody>
+      </p:sp>
+      <p:sp>
+        <p:nvSpPr>
+          <p:cNvPr id="14" name="Rounded Rectangle 13"/>
+          <p:cNvSpPr/>
+          <p:nvPr/>
+        </p:nvSpPr>
+        <p:spPr>
+          <a:xfrm>
+            <a:off x="548640" y="3767327"/>
+            <a:ext cx="11094415" cy="850392"/>
+          </a:xfrm>
+          <a:prstGeom prst="roundRect">
+            <a:avLst>
+              <a:gd name="adj" fmla="val 8000"/>
+            </a:avLst>
+          </a:prstGeom>
+          <a:solidFill>
+            <a:srgbClr val="F3F6F9"/>
+          </a:solidFill>
+          <a:ln>
+            <a:noFill/>
+          </a:ln>
+        </p:spPr>
+        <p:txBody>
+          <a:bodyPr rtlCol="0" anchor="ctr"/>
+          <a:lstStyle/>
+          <a:p>
+            <a:pPr algn="ctr"/>
+          </a:p>
+        </p:txBody>
+      </p:sp>
+      <p:sp>
+        <p:nvSpPr>
+          <p:cNvPr id="15" name="TextBox 14"/>
+          <p:cNvSpPr txBox="1"/>
+          <p:nvPr/>
+        </p:nvSpPr>
+        <p:spPr>
+          <a:xfrm>
+            <a:off x="685800" y="3735323"/>
+            <a:ext cx="2514600" cy="914400"/>
+          </a:xfrm>
+          <a:prstGeom prst="rect">
+            <a:avLst/>
+          </a:prstGeom>
+          <a:noFill/>
+        </p:spPr>
+        <p:txBody>
+          <a:bodyPr wrap="square" anchor="ctr"/>
+          <a:lstStyle/>
+          <a:p>
+            <a:pPr algn="l" eaLnBrk="0">
+              <a:lnSpc>
+                <a:spcPct val="110000"/>
+              </a:lnSpc>
+            </a:pPr>
+            <a:r>
+              <a:rPr sz="1600" b="1">
+                <a:solidFill>
+                  <a:srgbClr val="13294B"/>
+                </a:solidFill>
+                <a:latin typeface="맑은 고딕"/>
+                <a:ea typeface="맑은 고딕"/>
+                <a:cs typeface="맑은 고딕"/>
+              </a:rPr>
+              <a:t>Quiz 2</a:t>
+            </a:r>
+          </a:p>
+        </p:txBody>
+      </p:sp>
+      <p:sp>
+        <p:nvSpPr>
+          <p:cNvPr id="16" name="TextBox 15"/>
+          <p:cNvSpPr txBox="1"/>
+          <p:nvPr/>
+        </p:nvSpPr>
+        <p:spPr>
+          <a:xfrm>
+            <a:off x="3200400" y="3735323"/>
+            <a:ext cx="6156655" cy="914400"/>
+          </a:xfrm>
+          <a:prstGeom prst="rect">
+            <a:avLst/>
+          </a:prstGeom>
+          <a:noFill/>
+        </p:spPr>
+        <p:txBody>
+          <a:bodyPr wrap="square" anchor="ctr"/>
+          <a:lstStyle/>
+          <a:p>
+            <a:pPr algn="l" eaLnBrk="0">
+              <a:lnSpc>
+                <a:spcPct val="110000"/>
+              </a:lnSpc>
+            </a:pPr>
+            <a:r>
+              <a:rPr sz="1400" b="0">
+                <a:solidFill>
+                  <a:srgbClr val="1F2A3A"/>
+                </a:solidFill>
+                <a:latin typeface="맑은 고딕"/>
+                <a:ea typeface="맑은 고딕"/>
+                <a:cs typeface="맑은 고딕"/>
+              </a:rPr>
+              <a:t>답변에서 받는 것은 업무 정보뿐이다. 답변은 승인이 되지 않고, 결정 기록은 승인을 받은 시스템만 적는다.</a:t>
+            </a:r>
+          </a:p>
+        </p:txBody>
+      </p:sp>
+      <p:sp>
+        <p:nvSpPr>
+          <p:cNvPr id="17" name="TextBox 16"/>
+          <p:cNvSpPr txBox="1"/>
+          <p:nvPr/>
+        </p:nvSpPr>
+        <p:spPr>
+          <a:xfrm>
+            <a:off x="9448495" y="3735323"/>
+            <a:ext cx="2103120" cy="914400"/>
+          </a:xfrm>
+          <a:prstGeom prst="rect">
+            <a:avLst/>
+          </a:prstGeom>
+          <a:noFill/>
+        </p:spPr>
+        <p:txBody>
+          <a:bodyPr wrap="square" anchor="ctr"/>
+          <a:lstStyle/>
+          <a:p>
+            <a:pPr algn="l" eaLnBrk="0">
+              <a:lnSpc>
+                <a:spcPct val="110000"/>
+              </a:lnSpc>
+            </a:pPr>
+            <a:r>
+              <a:rPr sz="1250" b="1">
+                <a:solidFill>
+                  <a:srgbClr val="556175"/>
+                </a:solidFill>
+                <a:latin typeface="맑은 고딕"/>
+                <a:ea typeface="맑은 고딕"/>
+                <a:cs typeface="맑은 고딕"/>
+              </a:rPr>
+              <a:t>4번</a:t>
+            </a:r>
+          </a:p>
+        </p:txBody>
+      </p:sp>
+      <p:sp>
+        <p:nvSpPr>
+          <p:cNvPr id="18" name="Rounded Rectangle 17"/>
+          <p:cNvSpPr/>
+          <p:nvPr/>
+        </p:nvSpPr>
+        <p:spPr>
+          <a:xfrm>
+            <a:off x="548640" y="4681727"/>
+            <a:ext cx="11094415" cy="850392"/>
+          </a:xfrm>
+          <a:prstGeom prst="roundRect">
+            <a:avLst>
+              <a:gd name="adj" fmla="val 8000"/>
+            </a:avLst>
+          </a:prstGeom>
+          <a:solidFill>
+            <a:srgbClr val="F3F6F9"/>
+          </a:solidFill>
+          <a:ln>
+            <a:noFill/>
+          </a:ln>
+        </p:spPr>
+        <p:txBody>
+          <a:bodyPr rtlCol="0" anchor="ctr"/>
+          <a:lstStyle/>
+          <a:p>
+            <a:pPr algn="ctr"/>
+          </a:p>
+        </p:txBody>
+      </p:sp>
+      <p:sp>
+        <p:nvSpPr>
           <p:cNvPr id="19" name="TextBox 18"/>
           <p:cNvSpPr txBox="1"/>
           <p:nvPr/>
@@ -24562,7 +30322,7 @@
                 <a:ea typeface="맑은 고딕"/>
                 <a:cs typeface="맑은 고딕"/>
               </a:rPr>
-              <a:t>4교시</a:t>
+              <a:t>Quiz 3</a:t>
             </a:r>
           </a:p>
         </p:txBody>
@@ -24601,7 +30361,7 @@
                 <a:ea typeface="맑은 고딕"/>
                 <a:cs typeface="맑은 고딕"/>
               </a:rPr>
-              <a:t>행동을 검증하고 인수인계 결과 만들기</a:t>
+              <a:t>같은 입력과 조회 자료에서 정한 기대값과 대조해 판정한다. 나머지는 판정할 기준이 없다.</a:t>
             </a:r>
           </a:p>
         </p:txBody>
@@ -24634,31 +30394,13 @@
             <a:r>
               <a:rPr sz="1250" b="1">
                 <a:solidFill>
-                  <a:srgbClr val="1A6FC4"/>
-                </a:solidFill>
-                <a:latin typeface="맑은 고딕"/>
-                <a:ea typeface="맑은 고딕"/>
-                <a:cs typeface="맑은 고딕"/>
-              </a:rPr>
-              <a:t>시나리오와 실제 출력,</a:t>
-            </a:r>
-          </a:p>
-          <a:p>
-            <a:pPr algn="l" eaLnBrk="0">
-              <a:lnSpc>
-                <a:spcPct val="110000"/>
-              </a:lnSpc>
-            </a:pPr>
-            <a:r>
-              <a:rPr sz="1250" b="1">
-                <a:solidFill>
-                  <a:srgbClr val="1A6FC4"/>
-                </a:solidFill>
-                <a:latin typeface="맑은 고딕"/>
-                <a:ea typeface="맑은 고딕"/>
-                <a:cs typeface="맑은 고딕"/>
-              </a:rPr>
-              <a:t>원자료와 대조한 인수인계</a:t>
+                  <a:srgbClr val="556175"/>
+                </a:solidFill>
+                <a:latin typeface="맑은 고딕"/>
+                <a:ea typeface="맑은 고딕"/>
+                <a:cs typeface="맑은 고딕"/>
+              </a:rPr>
+              <a:t>3번</a:t>
             </a:r>
           </a:p>
         </p:txBody>

--- a/산출물/통합반/이론_오프라인/07회차/통합반_오프라인_07회차.pptx
+++ b/산출물/통합반/이론_오프라인/07회차/통합반_오프라인_07회차.pptx
@@ -552,11 +552,6 @@
           </a:p>
           <a:p>
             <a:r>
-              <a:t>· 이론은 온라인 7 · 8회차 교재의 장에서 오늘 실습에 쓰는 것만</a:t>
-            </a:r>
-          </a:p>
-          <a:p>
-            <a:r>
               <a:t>[다음] 학습목표</a:t>
             </a:r>
           </a:p>
@@ -637,7 +632,7 @@
           </a:p>
           <a:p>
             <a:r>
-              <a:t>· 실습에서 같은 점검 요청 프로젝트의 spec.md에 긴급 표시를 명세하고 구현한다</a:t>
+              <a:t>· 새 요구 한 문장 → 세 해석 → 새 기능만 본 확인의 빈틈 → SDD와 명세의 다섯 항목 → 수용 기준</a:t>
             </a:r>
           </a:p>
           <a:p>
@@ -1032,7 +1027,7 @@
           </a:p>
           <a:p>
             <a:r>
-              <a:t>· 놓이는 곳: 프로젝트 안 spec.md 같은 파일로 코드와 함께 변경 관리. 파일 이름이나 다섯 항목 틀이 모든 SDD 도구의 공통 의무는 아니다(이 수업에서 쓸 구성). 실습에서 쓸 파일도 이 이름</a:t>
+              <a:t>· 놓이는 곳: 프로젝트 안 spec.md 같은 파일로 코드와 함께 변경 관리. 파일 이름이나 다섯 항목 틀이 모든 SDD 도구의 공통 의무는 아니다(이 수업에서 쓸 구성)</a:t>
             </a:r>
           </a:p>
           <a:p>
@@ -1422,7 +1417,7 @@
           </a:p>
           <a:p>
             <a:r>
-              <a:t>· 실습에서 정상 · 정보 누락 · 변경 요구의 기대 결과를 Given · When · Then으로 적어 실제 출력과 비교한다</a:t>
+              <a:t>· BDD → 시나리오의 세 부분 → 거절 시나리오 한 편 → 실행 결과로 가릴 수 있는 Then</a:t>
             </a:r>
           </a:p>
           <a:p>
@@ -1607,7 +1602,7 @@
           </a:p>
           <a:p>
             <a:r>
-              <a:t>· 2 명세: 한 문장 요구는 여러 뜻으로 읽힌다 → 무엇을 받아 무엇을 내고 무엇을 하지 않는지, 끝났음을 가르는 기준 → 실습의 spec.md</a:t>
+              <a:t>· 2 명세: 한 문장 요구는 여러 뜻으로 읽힌다 → 무엇을 받아 무엇을 내고 무엇을 하지 않는지, 끝났음을 가르는 기준</a:t>
             </a:r>
           </a:p>
           <a:p>
@@ -2312,7 +2307,7 @@
           </a:p>
           <a:p>
             <a:r>
-              <a:t>· 경계: 기준값 바로 안팎에서 판정이 맞는가. 조치 뒤 유온을 다시 읽어 회복을 판정하는데 이 실습 설비의 회복 기준은 55 ℃ 미만 → 재관측 55.0 ℃는 회복으로 보지 않아야</a:t>
+              <a:t>· 경계: 기준값 바로 안팎에서 판정이 맞는가. 조치 뒤 유온을 다시 읽어 회복을 판정하는데 이 설비의 회복 기준은 55 ℃ 미만 → 재관측 55.0 ℃는 회복으로 보지 않아야</a:t>
             </a:r>
           </a:p>
           <a:p>
@@ -2327,7 +2322,7 @@
           </a:p>
           <a:p>
             <a:r>
-              <a:t>· 넷은 같은 결이 아니다: 앞 셋은 「무엇을」 확인하나, 회귀는 「언제」 확인하나에 가깝다 → 회귀 시험의 내용은 대개 이미 있던 정상 · 경계 · 예외 시험. 정상은 앞의 승인 시나리오가 예이니 나머지 셋을 차례로</a:t>
+              <a:t>· 넷은 같은 결이 아니다: 앞 셋은 「무엇을」 확인하나, 회귀는 「언제」 확인하나에 가깝다 → 회귀 시험의 내용은 대개 이미 있던 정상 · 경계 · 예외 시험. 정상은 쿨러 사건의 승인 흐름(「승인과 거절이 남기는 결과」)이 예이고, 경계와 회귀를 이어서 본다</a:t>
             </a:r>
           </a:p>
           <a:p>
@@ -3382,7 +3377,7 @@
           </a:p>
           <a:p>
             <a:r>
-              <a:t>· Q2 정답 4번. 답이 채울 수 있는 건 빠진 업무 정보뿐, 답변은 실행 권한을 바꾸지 않는다. 1번은 답을 승인으로 바꿔 씀, 3번은 시스템만 적는 칸을 에이전트가 채움, 2번은 받은 수량까지 버리고 짐작 — 질문한 의미가 없어진다</a:t>
+              <a:t>· Q2 정답 4번. 답이 채울 수 있는 건 빠진 업무 정보뿐, 답변은 실행 권한을 바꾸지 않는다. 1번은 답을 승인으로 바꿔 씀, 3번은 승인 단계를 거치지 않은 승인을 에이전트가 기록에 적음, 2번은 받은 수량까지 버리고 짐작 — 질문한 의미가 없어진다</a:t>
             </a:r>
           </a:p>
           <a:p>
@@ -3487,7 +3482,7 @@
           </a:p>
           <a:p>
             <a:r>
-              <a:t>· 실습에서 점검 요청이 부족한 정보만 묻고 같은 요청의 답으로 다시 이어지게 만든다</a:t>
+              <a:t>· HITL → 승인과 거절의 결과 → 일하는 도중의 질문 → 질문으로 채우는 것과 바꾸지 못하는 것 → 보류의 세 상황</a:t>
             </a:r>
           </a:p>
           <a:p>
@@ -8528,7 +8523,7 @@
       </p:sp>
       <p:pic>
         <p:nvPicPr>
-          <p:cNvPr id="6" name="삽화:세해석.svg" descr="illust_3380066889389731305_1793113376.png"/>
+          <p:cNvPr id="6" name="삽화:세해석.svg" descr="illust_5067512834994689460_1793113376.png"/>
           <p:cNvPicPr>
             <a:picLocks noChangeAspect="1"/>
           </p:cNvPicPr>
@@ -10453,7 +10448,7 @@
       </p:sp>
       <p:pic>
         <p:nvPicPr>
-          <p:cNvPr id="6" name="삽화:명세문서.svg" descr="illust_6855670524677779462_1793113376.png"/>
+          <p:cNvPr id="6" name="삽화:명세문서.svg" descr="illust_7738577216673108231_1793113376.png"/>
           <p:cNvPicPr>
             <a:picLocks noChangeAspect="1"/>
           </p:cNvPicPr>
@@ -14438,7 +14433,7 @@
       </p:sp>
       <p:pic>
         <p:nvPicPr>
-          <p:cNvPr id="6" name="삽화:세부분.svg" descr="illust_8429173867990618835_1793113376.png"/>
+          <p:cNvPr id="6" name="삽화:세부분.svg" descr="illust_5845821135938417539_1793113376.png"/>
           <p:cNvPicPr>
             <a:picLocks noChangeAspect="1"/>
           </p:cNvPicPr>
@@ -21883,7 +21878,7 @@
       </p:sp>
       <p:pic>
         <p:nvPicPr>
-          <p:cNvPr id="6" name="삽화:경계값.svg" descr="illust_71074534985612163_1793113376.png"/>
+          <p:cNvPr id="6" name="삽화:경계값.svg" descr="illust_3356726642889706473_1793113376.png"/>
           <p:cNvPicPr>
             <a:picLocks noChangeAspect="1"/>
           </p:cNvPicPr>
@@ -22478,7 +22473,7 @@
       </p:sp>
       <p:pic>
         <p:nvPicPr>
-          <p:cNvPr id="6" name="삽화:회귀.svg" descr="illust_7506574040064455395_1793113376.png"/>
+          <p:cNvPr id="6" name="삽화:회귀.svg" descr="illust_7779662020556628523_1793113376.png"/>
           <p:cNvPicPr>
             <a:picLocks noChangeAspect="1"/>
           </p:cNvPicPr>
@@ -27358,7 +27353,7 @@
                 <a:ea typeface="맑은 고딕"/>
                 <a:cs typeface="맑은 고딕"/>
               </a:rPr>
-              <a:t>설명과 호출 순서는 필요한 의미 · 근거 · 권한 · 선행 조건을 지켰으나 필수 decision_id 항목이 없다.</a:t>
+              <a:t>둘째 실행은 첫 실행과 설명 문장 · 호출 순서가 달랐고(조건은 지킴), 필수 decision_id 항목이 없었다.</a:t>
             </a:r>
           </a:p>
         </p:txBody>
@@ -30213,7 +30208,7 @@
                 <a:ea typeface="맑은 고딕"/>
                 <a:cs typeface="맑은 고딕"/>
               </a:rPr>
-              <a:t>답변에서 받는 것은 업무 정보뿐이다. 답변은 승인이 되지 않고, 결정 기록은 승인을 받은 시스템만 적는다.</a:t>
+              <a:t>답변에서 받는 것은 업무 정보뿐이다. 답변은 승인이 되지 않으며, 승인은 승인 단계에서 담당자가 한다.</a:t>
             </a:r>
           </a:p>
         </p:txBody>
